--- a/Mid Project Presentation.pptx
+++ b/Mid Project Presentation.pptx
@@ -109,7 +109,147 @@
       </a:defRPr>
     </a:lvl9pPr>
   </p:defaultTextStyle>
+  <p:extLst>
+    <p:ext uri="{EFAFB233-063F-42B5-8137-9DF3F51BA10A}">
+      <p15:sldGuideLst xmlns:p15="http://schemas.microsoft.com/office/powerpoint/2012/main"/>
+    </p:ext>
+  </p:extLst>
 </p:presentation>
+</file>
+
+<file path=ppt/revisionInfo.xml><?xml version="1.0" encoding="utf-8"?>
+<p1510:revInfo xmlns:a="http://schemas.openxmlformats.org/drawingml/2006/main" xmlns:r="http://schemas.openxmlformats.org/officeDocument/2006/relationships" xmlns:p1510="http://schemas.microsoft.com/office/powerpoint/2015/10/main">
+  <p1510:revLst>
+    <p1510:client id="{1F050285-B4F3-42C3-BF88-8016C8E92A90}" v="2" dt="2026-09-07T05:50:46.225"/>
+  </p1510:revLst>
+</p1510:revInfo>
+</file>
+
+<file path=ppt/changesInfos/changesInfo1.xml><?xml version="1.0" encoding="utf-8"?>
+<pc:chgInfo xmlns:a="http://schemas.openxmlformats.org/drawingml/2006/main" xmlns:r="http://schemas.openxmlformats.org/officeDocument/2006/relationships" xmlns:ac="http://schemas.microsoft.com/office/drawing/2013/main/command" xmlns:pc="http://schemas.microsoft.com/office/powerpoint/2013/main/command">
+  <pc:docChgLst>
+    <pc:chgData name="Dave Sushames" userId="ce71797e-895c-47df-af8e-c160254d5cef" providerId="ADAL" clId="{067FCE3D-3D41-4548-936F-F0A348C85C95}"/>
+    <pc:docChg chg="undo custSel addSld delSld modSld sldOrd">
+      <pc:chgData name="Dave Sushames" userId="ce71797e-895c-47df-af8e-c160254d5cef" providerId="ADAL" clId="{067FCE3D-3D41-4548-936F-F0A348C85C95}" dt="2026-09-08T03:08:40.664" v="987" actId="20577"/>
+      <pc:docMkLst>
+        <pc:docMk/>
+      </pc:docMkLst>
+      <pc:sldChg chg="modSp mod">
+        <pc:chgData name="Dave Sushames" userId="ce71797e-895c-47df-af8e-c160254d5cef" providerId="ADAL" clId="{067FCE3D-3D41-4548-936F-F0A348C85C95}" dt="2026-09-07T05:51:06.852" v="120" actId="113"/>
+        <pc:sldMkLst>
+          <pc:docMk/>
+          <pc:sldMk cId="137548550" sldId="256"/>
+        </pc:sldMkLst>
+        <pc:spChg chg="mod">
+          <ac:chgData name="Dave Sushames" userId="ce71797e-895c-47df-af8e-c160254d5cef" providerId="ADAL" clId="{067FCE3D-3D41-4548-936F-F0A348C85C95}" dt="2026-09-07T05:51:06.852" v="120" actId="113"/>
+          <ac:spMkLst>
+            <pc:docMk/>
+            <pc:sldMk cId="137548550" sldId="256"/>
+            <ac:spMk id="3" creationId="{7B0A87BF-4DD4-CC52-28FC-A1DDAFEC8998}"/>
+          </ac:spMkLst>
+        </pc:spChg>
+      </pc:sldChg>
+      <pc:sldChg chg="modSp mod">
+        <pc:chgData name="Dave Sushames" userId="ce71797e-895c-47df-af8e-c160254d5cef" providerId="ADAL" clId="{067FCE3D-3D41-4548-936F-F0A348C85C95}" dt="2026-09-08T01:48:59.089" v="600" actId="20577"/>
+        <pc:sldMkLst>
+          <pc:docMk/>
+          <pc:sldMk cId="2362368263" sldId="257"/>
+        </pc:sldMkLst>
+        <pc:spChg chg="mod">
+          <ac:chgData name="Dave Sushames" userId="ce71797e-895c-47df-af8e-c160254d5cef" providerId="ADAL" clId="{067FCE3D-3D41-4548-936F-F0A348C85C95}" dt="2026-09-07T06:10:38.489" v="262" actId="20577"/>
+          <ac:spMkLst>
+            <pc:docMk/>
+            <pc:sldMk cId="2362368263" sldId="257"/>
+            <ac:spMk id="2" creationId="{90530326-B10D-8D61-0CFF-8C79806EB64C}"/>
+          </ac:spMkLst>
+        </pc:spChg>
+        <pc:spChg chg="mod">
+          <ac:chgData name="Dave Sushames" userId="ce71797e-895c-47df-af8e-c160254d5cef" providerId="ADAL" clId="{067FCE3D-3D41-4548-936F-F0A348C85C95}" dt="2026-09-08T01:48:59.089" v="600" actId="20577"/>
+          <ac:spMkLst>
+            <pc:docMk/>
+            <pc:sldMk cId="2362368263" sldId="257"/>
+            <ac:spMk id="3" creationId="{6C0C07A1-BD55-F571-87E1-3E1F8CB44291}"/>
+          </ac:spMkLst>
+        </pc:spChg>
+      </pc:sldChg>
+      <pc:sldChg chg="modSp mod">
+        <pc:chgData name="Dave Sushames" userId="ce71797e-895c-47df-af8e-c160254d5cef" providerId="ADAL" clId="{067FCE3D-3D41-4548-936F-F0A348C85C95}" dt="2026-09-08T02:45:23.662" v="933" actId="20577"/>
+        <pc:sldMkLst>
+          <pc:docMk/>
+          <pc:sldMk cId="3384359967" sldId="258"/>
+        </pc:sldMkLst>
+        <pc:spChg chg="mod">
+          <ac:chgData name="Dave Sushames" userId="ce71797e-895c-47df-af8e-c160254d5cef" providerId="ADAL" clId="{067FCE3D-3D41-4548-936F-F0A348C85C95}" dt="2026-09-08T02:45:23.662" v="933" actId="20577"/>
+          <ac:spMkLst>
+            <pc:docMk/>
+            <pc:sldMk cId="3384359967" sldId="258"/>
+            <ac:spMk id="3" creationId="{0F35839F-4D04-EB1F-ADC7-579D8D73B752}"/>
+          </ac:spMkLst>
+        </pc:spChg>
+      </pc:sldChg>
+      <pc:sldChg chg="modSp mod">
+        <pc:chgData name="Dave Sushames" userId="ce71797e-895c-47df-af8e-c160254d5cef" providerId="ADAL" clId="{067FCE3D-3D41-4548-936F-F0A348C85C95}" dt="2026-09-08T01:22:39.694" v="524" actId="20577"/>
+        <pc:sldMkLst>
+          <pc:docMk/>
+          <pc:sldMk cId="256383110" sldId="259"/>
+        </pc:sldMkLst>
+        <pc:spChg chg="mod">
+          <ac:chgData name="Dave Sushames" userId="ce71797e-895c-47df-af8e-c160254d5cef" providerId="ADAL" clId="{067FCE3D-3D41-4548-936F-F0A348C85C95}" dt="2026-09-08T01:22:39.694" v="524" actId="20577"/>
+          <ac:spMkLst>
+            <pc:docMk/>
+            <pc:sldMk cId="256383110" sldId="259"/>
+            <ac:spMk id="3" creationId="{D196632A-DFFF-0D91-597A-10CA65E9657B}"/>
+          </ac:spMkLst>
+        </pc:spChg>
+      </pc:sldChg>
+      <pc:sldChg chg="modSp mod">
+        <pc:chgData name="Dave Sushames" userId="ce71797e-895c-47df-af8e-c160254d5cef" providerId="ADAL" clId="{067FCE3D-3D41-4548-936F-F0A348C85C95}" dt="2026-09-08T03:08:40.664" v="987" actId="20577"/>
+        <pc:sldMkLst>
+          <pc:docMk/>
+          <pc:sldMk cId="1449235414" sldId="260"/>
+        </pc:sldMkLst>
+        <pc:spChg chg="mod">
+          <ac:chgData name="Dave Sushames" userId="ce71797e-895c-47df-af8e-c160254d5cef" providerId="ADAL" clId="{067FCE3D-3D41-4548-936F-F0A348C85C95}" dt="2026-09-08T03:08:40.664" v="987" actId="20577"/>
+          <ac:spMkLst>
+            <pc:docMk/>
+            <pc:sldMk cId="1449235414" sldId="260"/>
+            <ac:spMk id="3" creationId="{FE3682BF-2AAA-17DB-13EF-80FD9DC2ED51}"/>
+          </ac:spMkLst>
+        </pc:spChg>
+      </pc:sldChg>
+      <pc:sldChg chg="modSp mod">
+        <pc:chgData name="Dave Sushames" userId="ce71797e-895c-47df-af8e-c160254d5cef" providerId="ADAL" clId="{067FCE3D-3D41-4548-936F-F0A348C85C95}" dt="2026-09-08T03:08:13.054" v="958" actId="5793"/>
+        <pc:sldMkLst>
+          <pc:docMk/>
+          <pc:sldMk cId="1776220710" sldId="261"/>
+        </pc:sldMkLst>
+        <pc:spChg chg="mod">
+          <ac:chgData name="Dave Sushames" userId="ce71797e-895c-47df-af8e-c160254d5cef" providerId="ADAL" clId="{067FCE3D-3D41-4548-936F-F0A348C85C95}" dt="2026-09-08T03:08:13.054" v="958" actId="5793"/>
+          <ac:spMkLst>
+            <pc:docMk/>
+            <pc:sldMk cId="1776220710" sldId="261"/>
+            <ac:spMk id="3" creationId="{26D92AE9-27DD-FCA7-1967-4FD13345CD68}"/>
+          </ac:spMkLst>
+        </pc:spChg>
+      </pc:sldChg>
+      <pc:sldChg chg="modSp new del mod ord">
+        <pc:chgData name="Dave Sushames" userId="ce71797e-895c-47df-af8e-c160254d5cef" providerId="ADAL" clId="{067FCE3D-3D41-4548-936F-F0A348C85C95}" dt="2026-09-07T05:52:40.345" v="121" actId="2696"/>
+        <pc:sldMkLst>
+          <pc:docMk/>
+          <pc:sldMk cId="3664128229" sldId="262"/>
+        </pc:sldMkLst>
+        <pc:spChg chg="mod">
+          <ac:chgData name="Dave Sushames" userId="ce71797e-895c-47df-af8e-c160254d5cef" providerId="ADAL" clId="{067FCE3D-3D41-4548-936F-F0A348C85C95}" dt="2026-09-07T05:45:11.722" v="101" actId="20577"/>
+          <ac:spMkLst>
+            <pc:docMk/>
+            <pc:sldMk cId="3664128229" sldId="262"/>
+            <ac:spMk id="2" creationId="{FCF6980F-FB78-22F3-FB74-C591CA127345}"/>
+          </ac:spMkLst>
+        </pc:spChg>
+      </pc:sldChg>
+    </pc:docChg>
+  </pc:docChgLst>
+</pc:chgInfo>
 </file>
 
 <file path=ppt/slideLayouts/slideLayout1.xml><?xml version="1.0" encoding="utf-8"?>
@@ -261,7 +401,7 @@
           <a:p>
             <a:fld id="{A23C7EEE-1AD9-4CFE-8AFB-1041F302144F}" type="datetimeFigureOut">
               <a:rPr lang="en-NZ" smtClean="0"/>
-              <a:t>2/09/2026</a:t>
+              <a:t>8/09/2026</a:t>
             </a:fld>
             <a:endParaRPr lang="en-NZ"/>
           </a:p>
@@ -461,7 +601,7 @@
           <a:p>
             <a:fld id="{A23C7EEE-1AD9-4CFE-8AFB-1041F302144F}" type="datetimeFigureOut">
               <a:rPr lang="en-NZ" smtClean="0"/>
-              <a:t>2/09/2026</a:t>
+              <a:t>8/09/2026</a:t>
             </a:fld>
             <a:endParaRPr lang="en-NZ"/>
           </a:p>
@@ -671,7 +811,7 @@
           <a:p>
             <a:fld id="{A23C7EEE-1AD9-4CFE-8AFB-1041F302144F}" type="datetimeFigureOut">
               <a:rPr lang="en-NZ" smtClean="0"/>
-              <a:t>2/09/2026</a:t>
+              <a:t>8/09/2026</a:t>
             </a:fld>
             <a:endParaRPr lang="en-NZ"/>
           </a:p>
@@ -871,7 +1011,7 @@
           <a:p>
             <a:fld id="{A23C7EEE-1AD9-4CFE-8AFB-1041F302144F}" type="datetimeFigureOut">
               <a:rPr lang="en-NZ" smtClean="0"/>
-              <a:t>2/09/2026</a:t>
+              <a:t>8/09/2026</a:t>
             </a:fld>
             <a:endParaRPr lang="en-NZ"/>
           </a:p>
@@ -1147,7 +1287,7 @@
           <a:p>
             <a:fld id="{A23C7EEE-1AD9-4CFE-8AFB-1041F302144F}" type="datetimeFigureOut">
               <a:rPr lang="en-NZ" smtClean="0"/>
-              <a:t>2/09/2026</a:t>
+              <a:t>8/09/2026</a:t>
             </a:fld>
             <a:endParaRPr lang="en-NZ"/>
           </a:p>
@@ -1415,7 +1555,7 @@
           <a:p>
             <a:fld id="{A23C7EEE-1AD9-4CFE-8AFB-1041F302144F}" type="datetimeFigureOut">
               <a:rPr lang="en-NZ" smtClean="0"/>
-              <a:t>2/09/2026</a:t>
+              <a:t>8/09/2026</a:t>
             </a:fld>
             <a:endParaRPr lang="en-NZ"/>
           </a:p>
@@ -1830,7 +1970,7 @@
           <a:p>
             <a:fld id="{A23C7EEE-1AD9-4CFE-8AFB-1041F302144F}" type="datetimeFigureOut">
               <a:rPr lang="en-NZ" smtClean="0"/>
-              <a:t>2/09/2026</a:t>
+              <a:t>8/09/2026</a:t>
             </a:fld>
             <a:endParaRPr lang="en-NZ"/>
           </a:p>
@@ -1972,7 +2112,7 @@
           <a:p>
             <a:fld id="{A23C7EEE-1AD9-4CFE-8AFB-1041F302144F}" type="datetimeFigureOut">
               <a:rPr lang="en-NZ" smtClean="0"/>
-              <a:t>2/09/2026</a:t>
+              <a:t>8/09/2026</a:t>
             </a:fld>
             <a:endParaRPr lang="en-NZ"/>
           </a:p>
@@ -2085,7 +2225,7 @@
           <a:p>
             <a:fld id="{A23C7EEE-1AD9-4CFE-8AFB-1041F302144F}" type="datetimeFigureOut">
               <a:rPr lang="en-NZ" smtClean="0"/>
-              <a:t>2/09/2026</a:t>
+              <a:t>8/09/2026</a:t>
             </a:fld>
             <a:endParaRPr lang="en-NZ"/>
           </a:p>
@@ -2398,7 +2538,7 @@
           <a:p>
             <a:fld id="{A23C7EEE-1AD9-4CFE-8AFB-1041F302144F}" type="datetimeFigureOut">
               <a:rPr lang="en-NZ" smtClean="0"/>
-              <a:t>2/09/2026</a:t>
+              <a:t>8/09/2026</a:t>
             </a:fld>
             <a:endParaRPr lang="en-NZ"/>
           </a:p>
@@ -2687,7 +2827,7 @@
           <a:p>
             <a:fld id="{A23C7EEE-1AD9-4CFE-8AFB-1041F302144F}" type="datetimeFigureOut">
               <a:rPr lang="en-NZ" smtClean="0"/>
-              <a:t>2/09/2026</a:t>
+              <a:t>8/09/2026</a:t>
             </a:fld>
             <a:endParaRPr lang="en-NZ"/>
           </a:p>
@@ -2930,7 +3070,7 @@
           <a:p>
             <a:fld id="{A23C7EEE-1AD9-4CFE-8AFB-1041F302144F}" type="datetimeFigureOut">
               <a:rPr lang="en-NZ" smtClean="0"/>
-              <a:t>2/09/2026</a:t>
+              <a:t>8/09/2026</a:t>
             </a:fld>
             <a:endParaRPr lang="en-NZ"/>
           </a:p>
@@ -3394,10 +3534,49 @@
         </p:nvSpPr>
         <p:spPr/>
         <p:txBody>
-          <a:bodyPr/>
-          <a:lstStyle/>
-          <a:p>
-            <a:endParaRPr lang="en-NZ" dirty="0"/>
+          <a:bodyPr>
+            <a:normAutofit fontScale="85000" lnSpcReduction="20000"/>
+          </a:bodyPr>
+          <a:lstStyle/>
+          <a:p>
+            <a:r>
+              <a:rPr lang="en-NZ" b="1" dirty="0"/>
+              <a:t>Project Title: </a:t>
+            </a:r>
+            <a:r>
+              <a:rPr lang="en-NZ" dirty="0"/>
+              <a:t>AI-Enhanced vs Legacy Digital Forensics and Investigation Tools – A Comparative Efficacy Analysis</a:t>
+            </a:r>
+          </a:p>
+          <a:p>
+            <a:r>
+              <a:rPr lang="en-NZ" b="1" dirty="0"/>
+              <a:t>Team Name: </a:t>
+            </a:r>
+            <a:r>
+              <a:rPr lang="en-NZ" dirty="0"/>
+              <a:t>Byte Harbor Butchers</a:t>
+            </a:r>
+          </a:p>
+          <a:p>
+            <a:r>
+              <a:rPr lang="en-NZ" b="1" dirty="0"/>
+              <a:t>Team Members: </a:t>
+            </a:r>
+            <a:r>
+              <a:rPr lang="en-NZ" dirty="0"/>
+              <a:t>Olivia Hey, Matt Baker, Sam Davies, Dave Sushames</a:t>
+            </a:r>
+          </a:p>
+          <a:p>
+            <a:r>
+              <a:rPr lang="en-NZ" b="1" dirty="0"/>
+              <a:t>Project Client: </a:t>
+            </a:r>
+            <a:r>
+              <a:rPr lang="en-NZ" dirty="0"/>
+              <a:t>Geoff Gordon</a:t>
+            </a:r>
           </a:p>
         </p:txBody>
       </p:sp>
@@ -3454,7 +3633,7 @@
           <a:p>
             <a:r>
               <a:rPr lang="en-US" dirty="0"/>
-              <a:t>What is the project?</a:t>
+              <a:t>Project description</a:t>
             </a:r>
             <a:endParaRPr lang="en-NZ" dirty="0"/>
           </a:p>
@@ -3481,7 +3660,28 @@
           <a:bodyPr/>
           <a:lstStyle/>
           <a:p>
-            <a:endParaRPr lang="en-NZ"/>
+            <a:pPr marL="0" indent="0">
+              <a:buNone/>
+            </a:pPr>
+            <a:r>
+              <a:rPr lang="en-US" dirty="0"/>
+              <a:t>The project is to compare how locally-run Large Language Models (LLMs) interpret and report on Nmap, Foremost, and Wireshark outputs compared to human analysts.</a:t>
+            </a:r>
+          </a:p>
+          <a:p>
+            <a:pPr marL="0" indent="0">
+              <a:buNone/>
+            </a:pPr>
+            <a:r>
+              <a:rPr lang="en-US" dirty="0"/>
+              <a:t>Framework: Design Science Research.</a:t>
+            </a:r>
+          </a:p>
+          <a:p>
+            <a:pPr marL="0" indent="0">
+              <a:buNone/>
+            </a:pPr>
+            <a:endParaRPr lang="en-NZ" dirty="0"/>
           </a:p>
         </p:txBody>
       </p:sp>
@@ -3565,7 +3765,49 @@
           <a:bodyPr/>
           <a:lstStyle/>
           <a:p>
-            <a:endParaRPr lang="en-NZ"/>
+            <a:pPr marL="0" indent="0">
+              <a:buNone/>
+            </a:pPr>
+            <a:r>
+              <a:rPr lang="en-US" dirty="0"/>
+              <a:t>Proposal finished</a:t>
+            </a:r>
+          </a:p>
+          <a:p>
+            <a:pPr marL="0" indent="0">
+              <a:buNone/>
+            </a:pPr>
+            <a:r>
+              <a:rPr lang="en-US" dirty="0"/>
+              <a:t>All forensics tools installed.</a:t>
+            </a:r>
+          </a:p>
+          <a:p>
+            <a:pPr marL="0" indent="0">
+              <a:buNone/>
+            </a:pPr>
+            <a:r>
+              <a:rPr lang="en-US" dirty="0"/>
+              <a:t>Created Test Environment</a:t>
+            </a:r>
+          </a:p>
+          <a:p>
+            <a:pPr marL="0" indent="0">
+              <a:buNone/>
+            </a:pPr>
+            <a:r>
+              <a:rPr lang="en-NZ" dirty="0"/>
+              <a:t>Selected AI model: Gemma4:26b</a:t>
+            </a:r>
+          </a:p>
+          <a:p>
+            <a:pPr marL="0" indent="0">
+              <a:buNone/>
+            </a:pPr>
+            <a:r>
+              <a:rPr lang="en-NZ" dirty="0"/>
+              <a:t>AI Foremost integration: Python script to automatically feed the carved files into the LLM and produce a report.</a:t>
+            </a:r>
           </a:p>
         </p:txBody>
       </p:sp>
@@ -3649,7 +3891,10 @@
           <a:bodyPr/>
           <a:lstStyle/>
           <a:p>
-            <a:endParaRPr lang="en-NZ"/>
+            <a:pPr marL="0" indent="0">
+              <a:buNone/>
+            </a:pPr>
+            <a:endParaRPr lang="en-NZ" dirty="0"/>
           </a:p>
         </p:txBody>
       </p:sp>
@@ -3733,7 +3978,56 @@
           <a:bodyPr/>
           <a:lstStyle/>
           <a:p>
-            <a:endParaRPr lang="en-NZ"/>
+            <a:pPr marL="0" indent="0">
+              <a:buNone/>
+            </a:pPr>
+            <a:r>
+              <a:rPr lang="en-US" dirty="0"/>
+              <a:t>Finalize test metrics</a:t>
+            </a:r>
+          </a:p>
+          <a:p>
+            <a:pPr marL="0" indent="0">
+              <a:buNone/>
+            </a:pPr>
+            <a:r>
+              <a:rPr lang="en-US" dirty="0"/>
+              <a:t>Nmap and Wireshark integration</a:t>
+            </a:r>
+          </a:p>
+          <a:p>
+            <a:pPr marL="0" indent="0">
+              <a:buNone/>
+            </a:pPr>
+            <a:r>
+              <a:rPr lang="en-US" dirty="0"/>
+              <a:t>Run tests</a:t>
+            </a:r>
+          </a:p>
+          <a:p>
+            <a:pPr marL="0" indent="0">
+              <a:buNone/>
+            </a:pPr>
+            <a:r>
+              <a:rPr lang="en-US" dirty="0"/>
+              <a:t>Consolidate findings</a:t>
+            </a:r>
+          </a:p>
+          <a:p>
+            <a:pPr marL="0" indent="0">
+              <a:buNone/>
+            </a:pPr>
+            <a:r>
+              <a:rPr lang="en-US"/>
+              <a:t>Final report</a:t>
+            </a:r>
+            <a:endParaRPr lang="en-US" dirty="0"/>
+          </a:p>
+          <a:p>
+            <a:pPr marL="0" indent="0">
+              <a:buNone/>
+            </a:pPr>
+            <a:endParaRPr lang="en-NZ" dirty="0"/>
           </a:p>
         </p:txBody>
       </p:sp>
@@ -3817,6 +4111,9 @@
           <a:bodyPr/>
           <a:lstStyle/>
           <a:p>
+            <a:pPr marL="0" indent="0">
+              <a:buNone/>
+            </a:pPr>
             <a:endParaRPr lang="en-NZ" dirty="0"/>
           </a:p>
         </p:txBody>

--- a/Mid Project Presentation.pptx
+++ b/Mid Project Presentation.pptx
@@ -2,15 +2,17 @@
 <file path=ppt/presentation.xml><?xml version="1.0" encoding="utf-8"?>
 <p:presentation xmlns:a="http://schemas.openxmlformats.org/drawingml/2006/main" xmlns:r="http://schemas.openxmlformats.org/officeDocument/2006/relationships" xmlns:p="http://schemas.openxmlformats.org/presentationml/2006/main" saveSubsetFonts="1">
   <p:sldMasterIdLst>
-    <p:sldMasterId id="2147483648" r:id="rId1"/>
+    <p:sldMasterId id="2147483690" r:id="rId1"/>
   </p:sldMasterIdLst>
   <p:sldIdLst>
     <p:sldId id="256" r:id="rId2"/>
-    <p:sldId id="257" r:id="rId3"/>
-    <p:sldId id="258" r:id="rId4"/>
-    <p:sldId id="259" r:id="rId5"/>
-    <p:sldId id="260" r:id="rId6"/>
-    <p:sldId id="261" r:id="rId7"/>
+    <p:sldId id="262" r:id="rId3"/>
+    <p:sldId id="257" r:id="rId4"/>
+    <p:sldId id="258" r:id="rId5"/>
+    <p:sldId id="259" r:id="rId6"/>
+    <p:sldId id="260" r:id="rId7"/>
+    <p:sldId id="261" r:id="rId8"/>
+    <p:sldId id="263" r:id="rId9"/>
   </p:sldIdLst>
   <p:sldSz cx="12192000" cy="6858000"/>
   <p:notesSz cx="6858000" cy="9144000"/>
@@ -18,7 +20,7 @@
     <a:defPPr>
       <a:defRPr lang="en-US"/>
     </a:defPPr>
-    <a:lvl1pPr marL="0" algn="l" defTabSz="914400" rtl="0" eaLnBrk="1" latinLnBrk="0" hangingPunct="1">
+    <a:lvl1pPr marL="0" algn="l" defTabSz="457200" rtl="0" eaLnBrk="1" latinLnBrk="0" hangingPunct="1">
       <a:defRPr sz="1800" kern="1200">
         <a:solidFill>
           <a:schemeClr val="tx1"/>
@@ -28,7 +30,7 @@
         <a:cs typeface="+mn-cs"/>
       </a:defRPr>
     </a:lvl1pPr>
-    <a:lvl2pPr marL="457200" algn="l" defTabSz="914400" rtl="0" eaLnBrk="1" latinLnBrk="0" hangingPunct="1">
+    <a:lvl2pPr marL="457200" algn="l" defTabSz="457200" rtl="0" eaLnBrk="1" latinLnBrk="0" hangingPunct="1">
       <a:defRPr sz="1800" kern="1200">
         <a:solidFill>
           <a:schemeClr val="tx1"/>
@@ -38,7 +40,7 @@
         <a:cs typeface="+mn-cs"/>
       </a:defRPr>
     </a:lvl2pPr>
-    <a:lvl3pPr marL="914400" algn="l" defTabSz="914400" rtl="0" eaLnBrk="1" latinLnBrk="0" hangingPunct="1">
+    <a:lvl3pPr marL="914400" algn="l" defTabSz="457200" rtl="0" eaLnBrk="1" latinLnBrk="0" hangingPunct="1">
       <a:defRPr sz="1800" kern="1200">
         <a:solidFill>
           <a:schemeClr val="tx1"/>
@@ -48,7 +50,7 @@
         <a:cs typeface="+mn-cs"/>
       </a:defRPr>
     </a:lvl3pPr>
-    <a:lvl4pPr marL="1371600" algn="l" defTabSz="914400" rtl="0" eaLnBrk="1" latinLnBrk="0" hangingPunct="1">
+    <a:lvl4pPr marL="1371600" algn="l" defTabSz="457200" rtl="0" eaLnBrk="1" latinLnBrk="0" hangingPunct="1">
       <a:defRPr sz="1800" kern="1200">
         <a:solidFill>
           <a:schemeClr val="tx1"/>
@@ -58,7 +60,7 @@
         <a:cs typeface="+mn-cs"/>
       </a:defRPr>
     </a:lvl4pPr>
-    <a:lvl5pPr marL="1828800" algn="l" defTabSz="914400" rtl="0" eaLnBrk="1" latinLnBrk="0" hangingPunct="1">
+    <a:lvl5pPr marL="1828800" algn="l" defTabSz="457200" rtl="0" eaLnBrk="1" latinLnBrk="0" hangingPunct="1">
       <a:defRPr sz="1800" kern="1200">
         <a:solidFill>
           <a:schemeClr val="tx1"/>
@@ -68,7 +70,7 @@
         <a:cs typeface="+mn-cs"/>
       </a:defRPr>
     </a:lvl5pPr>
-    <a:lvl6pPr marL="2286000" algn="l" defTabSz="914400" rtl="0" eaLnBrk="1" latinLnBrk="0" hangingPunct="1">
+    <a:lvl6pPr marL="2286000" algn="l" defTabSz="457200" rtl="0" eaLnBrk="1" latinLnBrk="0" hangingPunct="1">
       <a:defRPr sz="1800" kern="1200">
         <a:solidFill>
           <a:schemeClr val="tx1"/>
@@ -78,7 +80,7 @@
         <a:cs typeface="+mn-cs"/>
       </a:defRPr>
     </a:lvl6pPr>
-    <a:lvl7pPr marL="2743200" algn="l" defTabSz="914400" rtl="0" eaLnBrk="1" latinLnBrk="0" hangingPunct="1">
+    <a:lvl7pPr marL="2743200" algn="l" defTabSz="457200" rtl="0" eaLnBrk="1" latinLnBrk="0" hangingPunct="1">
       <a:defRPr sz="1800" kern="1200">
         <a:solidFill>
           <a:schemeClr val="tx1"/>
@@ -88,7 +90,7 @@
         <a:cs typeface="+mn-cs"/>
       </a:defRPr>
     </a:lvl7pPr>
-    <a:lvl8pPr marL="3200400" algn="l" defTabSz="914400" rtl="0" eaLnBrk="1" latinLnBrk="0" hangingPunct="1">
+    <a:lvl8pPr marL="3200400" algn="l" defTabSz="457200" rtl="0" eaLnBrk="1" latinLnBrk="0" hangingPunct="1">
       <a:defRPr sz="1800" kern="1200">
         <a:solidFill>
           <a:schemeClr val="tx1"/>
@@ -98,7 +100,7 @@
         <a:cs typeface="+mn-cs"/>
       </a:defRPr>
     </a:lvl8pPr>
-    <a:lvl9pPr marL="3657600" algn="l" defTabSz="914400" rtl="0" eaLnBrk="1" latinLnBrk="0" hangingPunct="1">
+    <a:lvl9pPr marL="3657600" algn="l" defTabSz="457200" rtl="0" eaLnBrk="1" latinLnBrk="0" hangingPunct="1">
       <a:defRPr sz="1800" kern="1200">
         <a:solidFill>
           <a:schemeClr val="tx1"/>
@@ -120,7 +122,7 @@
 <file path=ppt/revisionInfo.xml><?xml version="1.0" encoding="utf-8"?>
 <p1510:revInfo xmlns:a="http://schemas.openxmlformats.org/drawingml/2006/main" xmlns:r="http://schemas.openxmlformats.org/officeDocument/2006/relationships" xmlns:p1510="http://schemas.microsoft.com/office/powerpoint/2015/10/main">
   <p1510:revLst>
-    <p1510:client id="{1F050285-B4F3-42C3-BF88-8016C8E92A90}" v="2" dt="2026-09-07T05:50:46.225"/>
+    <p1510:client id="{1F050285-B4F3-42C3-BF88-8016C8E92A90}" v="25" dt="2026-09-10T03:23:22.785"/>
   </p1510:revLst>
 </p1510:revInfo>
 </file>
@@ -129,34 +131,106 @@
 <pc:chgInfo xmlns:a="http://schemas.openxmlformats.org/drawingml/2006/main" xmlns:r="http://schemas.openxmlformats.org/officeDocument/2006/relationships" xmlns:ac="http://schemas.microsoft.com/office/drawing/2013/main/command" xmlns:pc="http://schemas.microsoft.com/office/powerpoint/2013/main/command">
   <pc:docChgLst>
     <pc:chgData name="Dave Sushames" userId="ce71797e-895c-47df-af8e-c160254d5cef" providerId="ADAL" clId="{067FCE3D-3D41-4548-936F-F0A348C85C95}"/>
-    <pc:docChg chg="undo custSel addSld delSld modSld sldOrd">
-      <pc:chgData name="Dave Sushames" userId="ce71797e-895c-47df-af8e-c160254d5cef" providerId="ADAL" clId="{067FCE3D-3D41-4548-936F-F0A348C85C95}" dt="2026-09-08T03:08:40.664" v="987" actId="20577"/>
+    <pc:docChg chg="undo redo custSel addSld delSld modSld sldOrd modMainMaster">
+      <pc:chgData name="Dave Sushames" userId="ce71797e-895c-47df-af8e-c160254d5cef" providerId="ADAL" clId="{067FCE3D-3D41-4548-936F-F0A348C85C95}" dt="2026-09-10T03:23:22.782" v="1489"/>
       <pc:docMkLst>
         <pc:docMk/>
       </pc:docMkLst>
-      <pc:sldChg chg="modSp mod">
-        <pc:chgData name="Dave Sushames" userId="ce71797e-895c-47df-af8e-c160254d5cef" providerId="ADAL" clId="{067FCE3D-3D41-4548-936F-F0A348C85C95}" dt="2026-09-07T05:51:06.852" v="120" actId="113"/>
+      <pc:sldChg chg="addSp delSp modSp mod setBg setClrOvrMap">
+        <pc:chgData name="Dave Sushames" userId="ce71797e-895c-47df-af8e-c160254d5cef" providerId="ADAL" clId="{067FCE3D-3D41-4548-936F-F0A348C85C95}" dt="2026-09-10T02:55:32.987" v="1038" actId="1076"/>
         <pc:sldMkLst>
           <pc:docMk/>
           <pc:sldMk cId="137548550" sldId="256"/>
         </pc:sldMkLst>
         <pc:spChg chg="mod">
-          <ac:chgData name="Dave Sushames" userId="ce71797e-895c-47df-af8e-c160254d5cef" providerId="ADAL" clId="{067FCE3D-3D41-4548-936F-F0A348C85C95}" dt="2026-09-07T05:51:06.852" v="120" actId="113"/>
+          <ac:chgData name="Dave Sushames" userId="ce71797e-895c-47df-af8e-c160254d5cef" providerId="ADAL" clId="{067FCE3D-3D41-4548-936F-F0A348C85C95}" dt="2026-09-10T02:55:14.691" v="1034" actId="1076"/>
+          <ac:spMkLst>
+            <pc:docMk/>
+            <pc:sldMk cId="137548550" sldId="256"/>
+            <ac:spMk id="2" creationId="{91D376B7-C157-6B08-B8E5-DCCC8ED6982F}"/>
+          </ac:spMkLst>
+        </pc:spChg>
+        <pc:spChg chg="mod">
+          <ac:chgData name="Dave Sushames" userId="ce71797e-895c-47df-af8e-c160254d5cef" providerId="ADAL" clId="{067FCE3D-3D41-4548-936F-F0A348C85C95}" dt="2026-09-10T02:55:32.987" v="1038" actId="1076"/>
           <ac:spMkLst>
             <pc:docMk/>
             <pc:sldMk cId="137548550" sldId="256"/>
             <ac:spMk id="3" creationId="{7B0A87BF-4DD4-CC52-28FC-A1DDAFEC8998}"/>
           </ac:spMkLst>
         </pc:spChg>
+        <pc:spChg chg="add del">
+          <ac:chgData name="Dave Sushames" userId="ce71797e-895c-47df-af8e-c160254d5cef" providerId="ADAL" clId="{067FCE3D-3D41-4548-936F-F0A348C85C95}" dt="2026-09-10T02:55:08.186" v="1033" actId="26606"/>
+          <ac:spMkLst>
+            <pc:docMk/>
+            <pc:sldMk cId="137548550" sldId="256"/>
+            <ac:spMk id="12" creationId="{4FA533C5-33E3-4611-AF9F-72811D8B26A6}"/>
+          </ac:spMkLst>
+        </pc:spChg>
+        <pc:spChg chg="add del">
+          <ac:chgData name="Dave Sushames" userId="ce71797e-895c-47df-af8e-c160254d5cef" providerId="ADAL" clId="{067FCE3D-3D41-4548-936F-F0A348C85C95}" dt="2026-09-10T02:55:08.186" v="1033" actId="26606"/>
+          <ac:spMkLst>
+            <pc:docMk/>
+            <pc:sldMk cId="137548550" sldId="256"/>
+            <ac:spMk id="18" creationId="{87F0FDC4-AD8C-47D9-9131-623C98ADB0AE}"/>
+          </ac:spMkLst>
+        </pc:spChg>
+        <pc:spChg chg="add del">
+          <ac:chgData name="Dave Sushames" userId="ce71797e-895c-47df-af8e-c160254d5cef" providerId="ADAL" clId="{067FCE3D-3D41-4548-936F-F0A348C85C95}" dt="2026-09-10T02:55:08.186" v="1033" actId="26606"/>
+          <ac:spMkLst>
+            <pc:docMk/>
+            <pc:sldMk cId="137548550" sldId="256"/>
+            <ac:spMk id="20" creationId="{052BEFF1-896C-45B1-B02C-96A6A1BC389A}"/>
+          </ac:spMkLst>
+        </pc:spChg>
+        <pc:spChg chg="add del">
+          <ac:chgData name="Dave Sushames" userId="ce71797e-895c-47df-af8e-c160254d5cef" providerId="ADAL" clId="{067FCE3D-3D41-4548-936F-F0A348C85C95}" dt="2026-09-10T02:55:08.186" v="1033" actId="26606"/>
+          <ac:spMkLst>
+            <pc:docMk/>
+            <pc:sldMk cId="137548550" sldId="256"/>
+            <ac:spMk id="22" creationId="{BB237A14-61B1-4C00-A670-5D8D68A8668E}"/>
+          </ac:spMkLst>
+        </pc:spChg>
+        <pc:spChg chg="add del">
+          <ac:chgData name="Dave Sushames" userId="ce71797e-895c-47df-af8e-c160254d5cef" providerId="ADAL" clId="{067FCE3D-3D41-4548-936F-F0A348C85C95}" dt="2026-09-10T02:55:08.186" v="1033" actId="26606"/>
+          <ac:spMkLst>
+            <pc:docMk/>
+            <pc:sldMk cId="137548550" sldId="256"/>
+            <ac:spMk id="24" creationId="{8598F259-6F54-47A3-8D13-1603D786A328}"/>
+          </ac:spMkLst>
+        </pc:spChg>
+        <pc:spChg chg="add del">
+          <ac:chgData name="Dave Sushames" userId="ce71797e-895c-47df-af8e-c160254d5cef" providerId="ADAL" clId="{067FCE3D-3D41-4548-936F-F0A348C85C95}" dt="2026-09-10T02:55:08.186" v="1033" actId="26606"/>
+          <ac:spMkLst>
+            <pc:docMk/>
+            <pc:sldMk cId="137548550" sldId="256"/>
+            <ac:spMk id="26" creationId="{0BA768A8-4FED-4ED8-9E46-6BE72188ECD2}"/>
+          </ac:spMkLst>
+        </pc:spChg>
+        <pc:picChg chg="add del">
+          <ac:chgData name="Dave Sushames" userId="ce71797e-895c-47df-af8e-c160254d5cef" providerId="ADAL" clId="{067FCE3D-3D41-4548-936F-F0A348C85C95}" dt="2026-09-10T02:55:08.186" v="1033" actId="26606"/>
+          <ac:picMkLst>
+            <pc:docMk/>
+            <pc:sldMk cId="137548550" sldId="256"/>
+            <ac:picMk id="8" creationId="{91B28F63-CF00-448F-B141-FE33C33B1891}"/>
+          </ac:picMkLst>
+        </pc:picChg>
+        <pc:picChg chg="add del">
+          <ac:chgData name="Dave Sushames" userId="ce71797e-895c-47df-af8e-c160254d5cef" providerId="ADAL" clId="{067FCE3D-3D41-4548-936F-F0A348C85C95}" dt="2026-09-10T02:55:08.186" v="1033" actId="26606"/>
+          <ac:picMkLst>
+            <pc:docMk/>
+            <pc:sldMk cId="137548550" sldId="256"/>
+            <ac:picMk id="14" creationId="{8949AD42-25FD-4C3D-9EEE-B7FEC5809988}"/>
+          </ac:picMkLst>
+        </pc:picChg>
       </pc:sldChg>
       <pc:sldChg chg="modSp mod">
-        <pc:chgData name="Dave Sushames" userId="ce71797e-895c-47df-af8e-c160254d5cef" providerId="ADAL" clId="{067FCE3D-3D41-4548-936F-F0A348C85C95}" dt="2026-09-08T01:48:59.089" v="600" actId="20577"/>
+        <pc:chgData name="Dave Sushames" userId="ce71797e-895c-47df-af8e-c160254d5cef" providerId="ADAL" clId="{067FCE3D-3D41-4548-936F-F0A348C85C95}" dt="2026-09-10T03:03:10.235" v="1441" actId="20577"/>
         <pc:sldMkLst>
           <pc:docMk/>
           <pc:sldMk cId="2362368263" sldId="257"/>
         </pc:sldMkLst>
         <pc:spChg chg="mod">
-          <ac:chgData name="Dave Sushames" userId="ce71797e-895c-47df-af8e-c160254d5cef" providerId="ADAL" clId="{067FCE3D-3D41-4548-936F-F0A348C85C95}" dt="2026-09-07T06:10:38.489" v="262" actId="20577"/>
+          <ac:chgData name="Dave Sushames" userId="ce71797e-895c-47df-af8e-c160254d5cef" providerId="ADAL" clId="{067FCE3D-3D41-4548-936F-F0A348C85C95}" dt="2026-09-10T02:55:03.086" v="1031"/>
           <ac:spMkLst>
             <pc:docMk/>
             <pc:sldMk cId="2362368263" sldId="257"/>
@@ -164,7 +238,7 @@
           </ac:spMkLst>
         </pc:spChg>
         <pc:spChg chg="mod">
-          <ac:chgData name="Dave Sushames" userId="ce71797e-895c-47df-af8e-c160254d5cef" providerId="ADAL" clId="{067FCE3D-3D41-4548-936F-F0A348C85C95}" dt="2026-09-08T01:48:59.089" v="600" actId="20577"/>
+          <ac:chgData name="Dave Sushames" userId="ce71797e-895c-47df-af8e-c160254d5cef" providerId="ADAL" clId="{067FCE3D-3D41-4548-936F-F0A348C85C95}" dt="2026-09-10T03:03:10.235" v="1441" actId="20577"/>
           <ac:spMkLst>
             <pc:docMk/>
             <pc:sldMk cId="2362368263" sldId="257"/>
@@ -173,13 +247,21 @@
         </pc:spChg>
       </pc:sldChg>
       <pc:sldChg chg="modSp mod">
-        <pc:chgData name="Dave Sushames" userId="ce71797e-895c-47df-af8e-c160254d5cef" providerId="ADAL" clId="{067FCE3D-3D41-4548-936F-F0A348C85C95}" dt="2026-09-08T02:45:23.662" v="933" actId="20577"/>
+        <pc:chgData name="Dave Sushames" userId="ce71797e-895c-47df-af8e-c160254d5cef" providerId="ADAL" clId="{067FCE3D-3D41-4548-936F-F0A348C85C95}" dt="2026-09-10T02:55:03.086" v="1031"/>
         <pc:sldMkLst>
           <pc:docMk/>
           <pc:sldMk cId="3384359967" sldId="258"/>
         </pc:sldMkLst>
         <pc:spChg chg="mod">
-          <ac:chgData name="Dave Sushames" userId="ce71797e-895c-47df-af8e-c160254d5cef" providerId="ADAL" clId="{067FCE3D-3D41-4548-936F-F0A348C85C95}" dt="2026-09-08T02:45:23.662" v="933" actId="20577"/>
+          <ac:chgData name="Dave Sushames" userId="ce71797e-895c-47df-af8e-c160254d5cef" providerId="ADAL" clId="{067FCE3D-3D41-4548-936F-F0A348C85C95}" dt="2026-09-10T02:55:03.086" v="1031"/>
+          <ac:spMkLst>
+            <pc:docMk/>
+            <pc:sldMk cId="3384359967" sldId="258"/>
+            <ac:spMk id="2" creationId="{2683624D-3129-03E9-F115-6F90475E4794}"/>
+          </ac:spMkLst>
+        </pc:spChg>
+        <pc:spChg chg="mod">
+          <ac:chgData name="Dave Sushames" userId="ce71797e-895c-47df-af8e-c160254d5cef" providerId="ADAL" clId="{067FCE3D-3D41-4548-936F-F0A348C85C95}" dt="2026-09-10T02:55:03.086" v="1031"/>
           <ac:spMkLst>
             <pc:docMk/>
             <pc:sldMk cId="3384359967" sldId="258"/>
@@ -188,13 +270,21 @@
         </pc:spChg>
       </pc:sldChg>
       <pc:sldChg chg="modSp mod">
-        <pc:chgData name="Dave Sushames" userId="ce71797e-895c-47df-af8e-c160254d5cef" providerId="ADAL" clId="{067FCE3D-3D41-4548-936F-F0A348C85C95}" dt="2026-09-08T01:22:39.694" v="524" actId="20577"/>
+        <pc:chgData name="Dave Sushames" userId="ce71797e-895c-47df-af8e-c160254d5cef" providerId="ADAL" clId="{067FCE3D-3D41-4548-936F-F0A348C85C95}" dt="2026-09-10T03:03:36.781" v="1483" actId="20577"/>
         <pc:sldMkLst>
           <pc:docMk/>
           <pc:sldMk cId="256383110" sldId="259"/>
         </pc:sldMkLst>
         <pc:spChg chg="mod">
-          <ac:chgData name="Dave Sushames" userId="ce71797e-895c-47df-af8e-c160254d5cef" providerId="ADAL" clId="{067FCE3D-3D41-4548-936F-F0A348C85C95}" dt="2026-09-08T01:22:39.694" v="524" actId="20577"/>
+          <ac:chgData name="Dave Sushames" userId="ce71797e-895c-47df-af8e-c160254d5cef" providerId="ADAL" clId="{067FCE3D-3D41-4548-936F-F0A348C85C95}" dt="2026-09-10T02:55:03.086" v="1031"/>
+          <ac:spMkLst>
+            <pc:docMk/>
+            <pc:sldMk cId="256383110" sldId="259"/>
+            <ac:spMk id="2" creationId="{2938C9BD-10F8-3FB7-B12D-383CA5C6C775}"/>
+          </ac:spMkLst>
+        </pc:spChg>
+        <pc:spChg chg="mod">
+          <ac:chgData name="Dave Sushames" userId="ce71797e-895c-47df-af8e-c160254d5cef" providerId="ADAL" clId="{067FCE3D-3D41-4548-936F-F0A348C85C95}" dt="2026-09-10T03:03:36.781" v="1483" actId="20577"/>
           <ac:spMkLst>
             <pc:docMk/>
             <pc:sldMk cId="256383110" sldId="259"/>
@@ -203,13 +293,21 @@
         </pc:spChg>
       </pc:sldChg>
       <pc:sldChg chg="modSp mod">
-        <pc:chgData name="Dave Sushames" userId="ce71797e-895c-47df-af8e-c160254d5cef" providerId="ADAL" clId="{067FCE3D-3D41-4548-936F-F0A348C85C95}" dt="2026-09-08T03:08:40.664" v="987" actId="20577"/>
+        <pc:chgData name="Dave Sushames" userId="ce71797e-895c-47df-af8e-c160254d5cef" providerId="ADAL" clId="{067FCE3D-3D41-4548-936F-F0A348C85C95}" dt="2026-09-10T02:55:03.086" v="1031"/>
         <pc:sldMkLst>
           <pc:docMk/>
           <pc:sldMk cId="1449235414" sldId="260"/>
         </pc:sldMkLst>
         <pc:spChg chg="mod">
-          <ac:chgData name="Dave Sushames" userId="ce71797e-895c-47df-af8e-c160254d5cef" providerId="ADAL" clId="{067FCE3D-3D41-4548-936F-F0A348C85C95}" dt="2026-09-08T03:08:40.664" v="987" actId="20577"/>
+          <ac:chgData name="Dave Sushames" userId="ce71797e-895c-47df-af8e-c160254d5cef" providerId="ADAL" clId="{067FCE3D-3D41-4548-936F-F0A348C85C95}" dt="2026-09-10T02:55:03.086" v="1031"/>
+          <ac:spMkLst>
+            <pc:docMk/>
+            <pc:sldMk cId="1449235414" sldId="260"/>
+            <ac:spMk id="2" creationId="{86421533-E00D-2C2D-FEDE-CB1FC05A20A6}"/>
+          </ac:spMkLst>
+        </pc:spChg>
+        <pc:spChg chg="mod">
+          <ac:chgData name="Dave Sushames" userId="ce71797e-895c-47df-af8e-c160254d5cef" providerId="ADAL" clId="{067FCE3D-3D41-4548-936F-F0A348C85C95}" dt="2026-09-10T02:55:03.086" v="1031"/>
           <ac:spMkLst>
             <pc:docMk/>
             <pc:sldMk cId="1449235414" sldId="260"/>
@@ -218,13 +316,21 @@
         </pc:spChg>
       </pc:sldChg>
       <pc:sldChg chg="modSp mod">
-        <pc:chgData name="Dave Sushames" userId="ce71797e-895c-47df-af8e-c160254d5cef" providerId="ADAL" clId="{067FCE3D-3D41-4548-936F-F0A348C85C95}" dt="2026-09-08T03:08:13.054" v="958" actId="5793"/>
+        <pc:chgData name="Dave Sushames" userId="ce71797e-895c-47df-af8e-c160254d5cef" providerId="ADAL" clId="{067FCE3D-3D41-4548-936F-F0A348C85C95}" dt="2026-09-10T03:23:02.289" v="1484"/>
         <pc:sldMkLst>
           <pc:docMk/>
           <pc:sldMk cId="1776220710" sldId="261"/>
         </pc:sldMkLst>
         <pc:spChg chg="mod">
-          <ac:chgData name="Dave Sushames" userId="ce71797e-895c-47df-af8e-c160254d5cef" providerId="ADAL" clId="{067FCE3D-3D41-4548-936F-F0A348C85C95}" dt="2026-09-08T03:08:13.054" v="958" actId="5793"/>
+          <ac:chgData name="Dave Sushames" userId="ce71797e-895c-47df-af8e-c160254d5cef" providerId="ADAL" clId="{067FCE3D-3D41-4548-936F-F0A348C85C95}" dt="2026-09-10T02:55:03.086" v="1031"/>
+          <ac:spMkLst>
+            <pc:docMk/>
+            <pc:sldMk cId="1776220710" sldId="261"/>
+            <ac:spMk id="2" creationId="{34223870-F07E-046E-D74E-D0008EB3121A}"/>
+          </ac:spMkLst>
+        </pc:spChg>
+        <pc:spChg chg="mod">
+          <ac:chgData name="Dave Sushames" userId="ce71797e-895c-47df-af8e-c160254d5cef" providerId="ADAL" clId="{067FCE3D-3D41-4548-936F-F0A348C85C95}" dt="2026-09-10T03:23:02.289" v="1484"/>
           <ac:spMkLst>
             <pc:docMk/>
             <pc:sldMk cId="1776220710" sldId="261"/>
@@ -232,21 +338,100 @@
           </ac:spMkLst>
         </pc:spChg>
       </pc:sldChg>
-      <pc:sldChg chg="modSp new del mod ord">
-        <pc:chgData name="Dave Sushames" userId="ce71797e-895c-47df-af8e-c160254d5cef" providerId="ADAL" clId="{067FCE3D-3D41-4548-936F-F0A348C85C95}" dt="2026-09-07T05:52:40.345" v="121" actId="2696"/>
+      <pc:sldChg chg="modSp new mod ord">
+        <pc:chgData name="Dave Sushames" userId="ce71797e-895c-47df-af8e-c160254d5cef" providerId="ADAL" clId="{067FCE3D-3D41-4548-936F-F0A348C85C95}" dt="2026-09-10T02:56:06.509" v="1051" actId="5793"/>
         <pc:sldMkLst>
           <pc:docMk/>
-          <pc:sldMk cId="3664128229" sldId="262"/>
+          <pc:sldMk cId="3468736769" sldId="262"/>
         </pc:sldMkLst>
         <pc:spChg chg="mod">
-          <ac:chgData name="Dave Sushames" userId="ce71797e-895c-47df-af8e-c160254d5cef" providerId="ADAL" clId="{067FCE3D-3D41-4548-936F-F0A348C85C95}" dt="2026-09-07T05:45:11.722" v="101" actId="20577"/>
+          <ac:chgData name="Dave Sushames" userId="ce71797e-895c-47df-af8e-c160254d5cef" providerId="ADAL" clId="{067FCE3D-3D41-4548-936F-F0A348C85C95}" dt="2026-09-10T02:56:02.600" v="1049" actId="20577"/>
           <ac:spMkLst>
             <pc:docMk/>
-            <pc:sldMk cId="3664128229" sldId="262"/>
-            <ac:spMk id="2" creationId="{FCF6980F-FB78-22F3-FB74-C591CA127345}"/>
+            <pc:sldMk cId="3468736769" sldId="262"/>
+            <ac:spMk id="2" creationId="{047335D3-B3E6-C8A2-402C-FE455859BD5F}"/>
+          </ac:spMkLst>
+        </pc:spChg>
+        <pc:spChg chg="mod">
+          <ac:chgData name="Dave Sushames" userId="ce71797e-895c-47df-af8e-c160254d5cef" providerId="ADAL" clId="{067FCE3D-3D41-4548-936F-F0A348C85C95}" dt="2026-09-10T02:56:06.509" v="1051" actId="5793"/>
+          <ac:spMkLst>
+            <pc:docMk/>
+            <pc:sldMk cId="3468736769" sldId="262"/>
+            <ac:spMk id="3" creationId="{A157AFC2-32EC-591F-EAE0-425D725D535E}"/>
           </ac:spMkLst>
         </pc:spChg>
       </pc:sldChg>
+      <pc:sldChg chg="add">
+        <pc:chgData name="Dave Sushames" userId="ce71797e-895c-47df-af8e-c160254d5cef" providerId="ADAL" clId="{067FCE3D-3D41-4548-936F-F0A348C85C95}" dt="2026-09-10T03:23:22.782" v="1489"/>
+        <pc:sldMkLst>
+          <pc:docMk/>
+          <pc:sldMk cId="300935319" sldId="263"/>
+        </pc:sldMkLst>
+      </pc:sldChg>
+      <pc:sldChg chg="modSp new del">
+        <pc:chgData name="Dave Sushames" userId="ce71797e-895c-47df-af8e-c160254d5cef" providerId="ADAL" clId="{067FCE3D-3D41-4548-936F-F0A348C85C95}" dt="2026-09-10T03:23:18.147" v="1488" actId="680"/>
+        <pc:sldMkLst>
+          <pc:docMk/>
+          <pc:sldMk cId="3299044373" sldId="263"/>
+        </pc:sldMkLst>
+        <pc:spChg chg="mod">
+          <ac:chgData name="Dave Sushames" userId="ce71797e-895c-47df-af8e-c160254d5cef" providerId="ADAL" clId="{067FCE3D-3D41-4548-936F-F0A348C85C95}" dt="2026-09-10T03:23:13.480" v="1487"/>
+          <ac:spMkLst>
+            <pc:docMk/>
+            <pc:sldMk cId="3299044373" sldId="263"/>
+            <ac:spMk id="2" creationId="{11A8B00C-7DDA-11D2-0675-3127D7546268}"/>
+          </ac:spMkLst>
+        </pc:spChg>
+        <pc:spChg chg="mod">
+          <ac:chgData name="Dave Sushames" userId="ce71797e-895c-47df-af8e-c160254d5cef" providerId="ADAL" clId="{067FCE3D-3D41-4548-936F-F0A348C85C95}" dt="2026-09-10T03:23:12.252" v="1486"/>
+          <ac:spMkLst>
+            <pc:docMk/>
+            <pc:sldMk cId="3299044373" sldId="263"/>
+            <ac:spMk id="3" creationId="{A9D2C890-5872-98EB-ACB3-F41469604AB9}"/>
+          </ac:spMkLst>
+        </pc:spChg>
+      </pc:sldChg>
+      <pc:sldMasterChg chg="modSldLayout">
+        <pc:chgData name="Dave Sushames" userId="ce71797e-895c-47df-af8e-c160254d5cef" providerId="ADAL" clId="{067FCE3D-3D41-4548-936F-F0A348C85C95}" dt="2026-09-09T02:35:14.433" v="1003"/>
+        <pc:sldMasterMkLst>
+          <pc:docMk/>
+          <pc:sldMasterMk cId="3488028552" sldId="2147483746"/>
+        </pc:sldMasterMkLst>
+        <pc:sldLayoutChg chg="addSp delSp">
+          <pc:chgData name="Dave Sushames" userId="ce71797e-895c-47df-af8e-c160254d5cef" providerId="ADAL" clId="{067FCE3D-3D41-4548-936F-F0A348C85C95}" dt="2026-09-09T02:35:14.433" v="1003"/>
+          <pc:sldLayoutMkLst>
+            <pc:docMk/>
+            <pc:sldMasterMk cId="3488028552" sldId="2147483746"/>
+            <pc:sldLayoutMk cId="878715823" sldId="2147483758"/>
+          </pc:sldLayoutMkLst>
+          <pc:cxnChg chg="add del">
+            <ac:chgData name="Dave Sushames" userId="ce71797e-895c-47df-af8e-c160254d5cef" providerId="ADAL" clId="{067FCE3D-3D41-4548-936F-F0A348C85C95}" dt="2026-09-09T02:35:14.433" v="1003"/>
+            <ac:cxnSpMkLst>
+              <pc:docMk/>
+              <pc:sldMasterMk cId="3488028552" sldId="2147483746"/>
+              <pc:sldLayoutMk cId="878715823" sldId="2147483758"/>
+              <ac:cxnSpMk id="8" creationId="{3C1F8589-B640-4540-D0AD-2B0461CD340F}"/>
+            </ac:cxnSpMkLst>
+          </pc:cxnChg>
+        </pc:sldLayoutChg>
+        <pc:sldLayoutChg chg="addSp delSp">
+          <pc:chgData name="Dave Sushames" userId="ce71797e-895c-47df-af8e-c160254d5cef" providerId="ADAL" clId="{067FCE3D-3D41-4548-936F-F0A348C85C95}" dt="2026-09-09T02:35:14.433" v="1003"/>
+          <pc:sldLayoutMkLst>
+            <pc:docMk/>
+            <pc:sldMasterMk cId="3488028552" sldId="2147483746"/>
+            <pc:sldLayoutMk cId="1403078055" sldId="2147483759"/>
+          </pc:sldLayoutMkLst>
+          <pc:cxnChg chg="add del">
+            <ac:chgData name="Dave Sushames" userId="ce71797e-895c-47df-af8e-c160254d5cef" providerId="ADAL" clId="{067FCE3D-3D41-4548-936F-F0A348C85C95}" dt="2026-09-09T02:35:14.433" v="1003"/>
+            <ac:cxnSpMkLst>
+              <pc:docMk/>
+              <pc:sldMasterMk cId="3488028552" sldId="2147483746"/>
+              <pc:sldLayoutMk cId="1403078055" sldId="2147483759"/>
+              <ac:cxnSpMk id="7" creationId="{FD144482-F463-E942-01AE-69DF54F4171C}"/>
+            </ac:cxnSpMkLst>
+          </pc:cxnChg>
+        </pc:sldLayoutChg>
+      </pc:sldMasterChg>
     </pc:docChg>
   </pc:docChgLst>
 </pc:chgInfo>
@@ -271,13 +456,7 @@
       </p:grpSpPr>
       <p:sp>
         <p:nvSpPr>
-          <p:cNvPr id="2" name="Title 1">
-            <a:extLst>
-              <a:ext uri="{FF2B5EF4-FFF2-40B4-BE49-F238E27FC236}">
-                <a16:creationId xmlns:a16="http://schemas.microsoft.com/office/drawing/2014/main" id="{1CDCF5E9-DA82-E1A2-DE2B-9232B47B86B9}"/>
-              </a:ext>
-            </a:extLst>
-          </p:cNvPr>
+          <p:cNvPr id="2" name="Title 1"/>
           <p:cNvSpPr>
             <a:spLocks noGrp="1"/>
           </p:cNvSpPr>
@@ -287,15 +466,15 @@
         </p:nvSpPr>
         <p:spPr>
           <a:xfrm>
-            <a:off x="1524000" y="1122363"/>
-            <a:ext cx="9144000" cy="2387600"/>
+            <a:off x="1154955" y="1447800"/>
+            <a:ext cx="8825658" cy="3329581"/>
           </a:xfrm>
         </p:spPr>
         <p:txBody>
           <a:bodyPr anchor="b"/>
           <a:lstStyle>
-            <a:lvl1pPr algn="ctr">
-              <a:defRPr sz="6000"/>
+            <a:lvl1pPr>
+              <a:defRPr sz="7200"/>
             </a:lvl1pPr>
           </a:lstStyle>
           <a:p>
@@ -303,19 +482,13 @@
               <a:rPr lang="en-GB"/>
               <a:t>Click to edit Master title style</a:t>
             </a:r>
-            <a:endParaRPr lang="en-NZ"/>
-          </a:p>
-        </p:txBody>
-      </p:sp>
-      <p:sp>
-        <p:nvSpPr>
-          <p:cNvPr id="3" name="Subtitle 2">
-            <a:extLst>
-              <a:ext uri="{FF2B5EF4-FFF2-40B4-BE49-F238E27FC236}">
-                <a16:creationId xmlns:a16="http://schemas.microsoft.com/office/drawing/2014/main" id="{2DD373EB-6CD3-FA13-4FA4-35BDAAF6924B}"/>
-              </a:ext>
-            </a:extLst>
-          </p:cNvPr>
+            <a:endParaRPr lang="en-US" dirty="0"/>
+          </a:p>
+        </p:txBody>
+      </p:sp>
+      <p:sp>
+        <p:nvSpPr>
+          <p:cNvPr id="3" name="Subtitle 2"/>
           <p:cNvSpPr>
             <a:spLocks noGrp="1"/>
           </p:cNvSpPr>
@@ -325,48 +498,103 @@
         </p:nvSpPr>
         <p:spPr>
           <a:xfrm>
-            <a:off x="1524000" y="3602038"/>
-            <a:ext cx="9144000" cy="1655762"/>
+            <a:off x="1154955" y="4777380"/>
+            <a:ext cx="8825658" cy="861420"/>
           </a:xfrm>
         </p:spPr>
         <p:txBody>
-          <a:bodyPr/>
+          <a:bodyPr anchor="t"/>
           <a:lstStyle>
-            <a:lvl1pPr marL="0" indent="0" algn="ctr">
-              <a:buNone/>
-              <a:defRPr sz="2400"/>
+            <a:lvl1pPr marL="0" indent="0" algn="l">
+              <a:buNone/>
+              <a:defRPr cap="all">
+                <a:solidFill>
+                  <a:schemeClr val="bg2">
+                    <a:lumMod val="40000"/>
+                    <a:lumOff val="60000"/>
+                  </a:schemeClr>
+                </a:solidFill>
+              </a:defRPr>
             </a:lvl1pPr>
             <a:lvl2pPr marL="457200" indent="0" algn="ctr">
               <a:buNone/>
-              <a:defRPr sz="2000"/>
+              <a:defRPr>
+                <a:solidFill>
+                  <a:schemeClr val="tx1">
+                    <a:tint val="75000"/>
+                  </a:schemeClr>
+                </a:solidFill>
+              </a:defRPr>
             </a:lvl2pPr>
             <a:lvl3pPr marL="914400" indent="0" algn="ctr">
               <a:buNone/>
-              <a:defRPr sz="1800"/>
+              <a:defRPr>
+                <a:solidFill>
+                  <a:schemeClr val="tx1">
+                    <a:tint val="75000"/>
+                  </a:schemeClr>
+                </a:solidFill>
+              </a:defRPr>
             </a:lvl3pPr>
             <a:lvl4pPr marL="1371600" indent="0" algn="ctr">
               <a:buNone/>
-              <a:defRPr sz="1600"/>
+              <a:defRPr>
+                <a:solidFill>
+                  <a:schemeClr val="tx1">
+                    <a:tint val="75000"/>
+                  </a:schemeClr>
+                </a:solidFill>
+              </a:defRPr>
             </a:lvl4pPr>
             <a:lvl5pPr marL="1828800" indent="0" algn="ctr">
               <a:buNone/>
-              <a:defRPr sz="1600"/>
+              <a:defRPr>
+                <a:solidFill>
+                  <a:schemeClr val="tx1">
+                    <a:tint val="75000"/>
+                  </a:schemeClr>
+                </a:solidFill>
+              </a:defRPr>
             </a:lvl5pPr>
             <a:lvl6pPr marL="2286000" indent="0" algn="ctr">
               <a:buNone/>
-              <a:defRPr sz="1600"/>
+              <a:defRPr>
+                <a:solidFill>
+                  <a:schemeClr val="tx1">
+                    <a:tint val="75000"/>
+                  </a:schemeClr>
+                </a:solidFill>
+              </a:defRPr>
             </a:lvl6pPr>
             <a:lvl7pPr marL="2743200" indent="0" algn="ctr">
               <a:buNone/>
-              <a:defRPr sz="1600"/>
+              <a:defRPr>
+                <a:solidFill>
+                  <a:schemeClr val="tx1">
+                    <a:tint val="75000"/>
+                  </a:schemeClr>
+                </a:solidFill>
+              </a:defRPr>
             </a:lvl7pPr>
             <a:lvl8pPr marL="3200400" indent="0" algn="ctr">
               <a:buNone/>
-              <a:defRPr sz="1600"/>
+              <a:defRPr>
+                <a:solidFill>
+                  <a:schemeClr val="tx1">
+                    <a:tint val="75000"/>
+                  </a:schemeClr>
+                </a:solidFill>
+              </a:defRPr>
             </a:lvl8pPr>
             <a:lvl9pPr marL="3657600" indent="0" algn="ctr">
               <a:buNone/>
-              <a:defRPr sz="1600"/>
+              <a:defRPr>
+                <a:solidFill>
+                  <a:schemeClr val="tx1">
+                    <a:tint val="75000"/>
+                  </a:schemeClr>
+                </a:solidFill>
+              </a:defRPr>
             </a:lvl9pPr>
           </a:lstStyle>
           <a:p>
@@ -374,19 +602,13 @@
               <a:rPr lang="en-GB"/>
               <a:t>Click to edit Master subtitle style</a:t>
             </a:r>
-            <a:endParaRPr lang="en-NZ"/>
-          </a:p>
-        </p:txBody>
-      </p:sp>
-      <p:sp>
-        <p:nvSpPr>
-          <p:cNvPr id="4" name="Date Placeholder 3">
-            <a:extLst>
-              <a:ext uri="{FF2B5EF4-FFF2-40B4-BE49-F238E27FC236}">
-                <a16:creationId xmlns:a16="http://schemas.microsoft.com/office/drawing/2014/main" id="{EAA42B96-DA85-7BB0-FB08-6F6CB4FB88AB}"/>
-              </a:ext>
-            </a:extLst>
-          </p:cNvPr>
+            <a:endParaRPr lang="en-US" dirty="0"/>
+          </a:p>
+        </p:txBody>
+      </p:sp>
+      <p:sp>
+        <p:nvSpPr>
+          <p:cNvPr id="4" name="Date Placeholder 3"/>
           <p:cNvSpPr>
             <a:spLocks noGrp="1"/>
           </p:cNvSpPr>
@@ -401,7 +623,7 @@
           <a:p>
             <a:fld id="{A23C7EEE-1AD9-4CFE-8AFB-1041F302144F}" type="datetimeFigureOut">
               <a:rPr lang="en-NZ" smtClean="0"/>
-              <a:t>8/09/2026</a:t>
+              <a:t>10/09/2026</a:t>
             </a:fld>
             <a:endParaRPr lang="en-NZ"/>
           </a:p>
@@ -409,13 +631,7 @@
       </p:sp>
       <p:sp>
         <p:nvSpPr>
-          <p:cNvPr id="5" name="Footer Placeholder 4">
-            <a:extLst>
-              <a:ext uri="{FF2B5EF4-FFF2-40B4-BE49-F238E27FC236}">
-                <a16:creationId xmlns:a16="http://schemas.microsoft.com/office/drawing/2014/main" id="{7864FAA0-8ADF-3B39-A618-39D746D344B8}"/>
-              </a:ext>
-            </a:extLst>
-          </p:cNvPr>
+          <p:cNvPr id="5" name="Footer Placeholder 4"/>
           <p:cNvSpPr>
             <a:spLocks noGrp="1"/>
           </p:cNvSpPr>
@@ -434,13 +650,7 @@
       </p:sp>
       <p:sp>
         <p:nvSpPr>
-          <p:cNvPr id="6" name="Slide Number Placeholder 5">
-            <a:extLst>
-              <a:ext uri="{FF2B5EF4-FFF2-40B4-BE49-F238E27FC236}">
-                <a16:creationId xmlns:a16="http://schemas.microsoft.com/office/drawing/2014/main" id="{4A90D58E-6CD0-06BF-B59B-3035C218FB05}"/>
-              </a:ext>
-            </a:extLst>
-          </p:cNvPr>
+          <p:cNvPr id="6" name="Slide Number Placeholder 5"/>
           <p:cNvSpPr>
             <a:spLocks noGrp="1"/>
           </p:cNvSpPr>
@@ -464,7 +674,7 @@
     </p:spTree>
     <p:extLst>
       <p:ext uri="{BB962C8B-B14F-4D97-AF65-F5344CB8AC3E}">
-        <p14:creationId xmlns:p14="http://schemas.microsoft.com/office/powerpoint/2010/main" val="288377891"/>
+        <p14:creationId xmlns:p14="http://schemas.microsoft.com/office/powerpoint/2010/main" val="2285579791"/>
       </p:ext>
     </p:extLst>
   </p:cSld>
@@ -475,6 +685,2572 @@
 </file>
 
 <file path=ppt/slideLayouts/slideLayout10.xml><?xml version="1.0" encoding="utf-8"?>
+<p:sldLayout xmlns:a="http://schemas.openxmlformats.org/drawingml/2006/main" xmlns:r="http://schemas.openxmlformats.org/officeDocument/2006/relationships" xmlns:p="http://schemas.openxmlformats.org/presentationml/2006/main" preserve="1">
+  <p:cSld name="Panoramic Picture with Caption">
+    <p:spTree>
+      <p:nvGrpSpPr>
+        <p:cNvPr id="1" name=""/>
+        <p:cNvGrpSpPr/>
+        <p:nvPr/>
+      </p:nvGrpSpPr>
+      <p:grpSpPr>
+        <a:xfrm>
+          <a:off x="0" y="0"/>
+          <a:ext cx="0" cy="0"/>
+          <a:chOff x="0" y="0"/>
+          <a:chExt cx="0" cy="0"/>
+        </a:xfrm>
+      </p:grpSpPr>
+      <p:sp>
+        <p:nvSpPr>
+          <p:cNvPr id="2" name="Title 1"/>
+          <p:cNvSpPr>
+            <a:spLocks noGrp="1"/>
+          </p:cNvSpPr>
+          <p:nvPr>
+            <p:ph type="title"/>
+          </p:nvPr>
+        </p:nvSpPr>
+        <p:spPr>
+          <a:xfrm>
+            <a:off x="1154956" y="4800587"/>
+            <a:ext cx="8825657" cy="566738"/>
+          </a:xfrm>
+        </p:spPr>
+        <p:txBody>
+          <a:bodyPr anchor="b">
+            <a:normAutofit/>
+          </a:bodyPr>
+          <a:lstStyle>
+            <a:lvl1pPr algn="l">
+              <a:defRPr sz="2400" b="0"/>
+            </a:lvl1pPr>
+          </a:lstStyle>
+          <a:p>
+            <a:r>
+              <a:rPr lang="en-GB"/>
+              <a:t>Click to edit Master title style</a:t>
+            </a:r>
+            <a:endParaRPr lang="en-US" dirty="0"/>
+          </a:p>
+        </p:txBody>
+      </p:sp>
+      <p:sp>
+        <p:nvSpPr>
+          <p:cNvPr id="3" name="Picture Placeholder 2"/>
+          <p:cNvSpPr>
+            <a:spLocks noGrp="1" noChangeAspect="1"/>
+          </p:cNvSpPr>
+          <p:nvPr>
+            <p:ph type="pic" idx="1"/>
+          </p:nvPr>
+        </p:nvSpPr>
+        <p:spPr>
+          <a:xfrm>
+            <a:off x="1154955" y="685800"/>
+            <a:ext cx="8825658" cy="3640666"/>
+          </a:xfrm>
+          <a:prstGeom prst="roundRect">
+            <a:avLst>
+              <a:gd name="adj" fmla="val 1858"/>
+            </a:avLst>
+          </a:prstGeom>
+          <a:effectLst>
+            <a:outerShdw blurRad="50800" dist="50800" dir="5400000" algn="tl" rotWithShape="0">
+              <a:srgbClr val="000000">
+                <a:alpha val="43000"/>
+              </a:srgbClr>
+            </a:outerShdw>
+          </a:effectLst>
+        </p:spPr>
+        <p:txBody>
+          <a:bodyPr anchor="t">
+            <a:normAutofit/>
+          </a:bodyPr>
+          <a:lstStyle>
+            <a:lvl1pPr marL="0" indent="0" algn="ctr">
+              <a:buNone/>
+              <a:defRPr sz="1600"/>
+            </a:lvl1pPr>
+            <a:lvl2pPr marL="457200" indent="0">
+              <a:buNone/>
+              <a:defRPr sz="1600"/>
+            </a:lvl2pPr>
+            <a:lvl3pPr marL="914400" indent="0">
+              <a:buNone/>
+              <a:defRPr sz="1600"/>
+            </a:lvl3pPr>
+            <a:lvl4pPr marL="1371600" indent="0">
+              <a:buNone/>
+              <a:defRPr sz="1600"/>
+            </a:lvl4pPr>
+            <a:lvl5pPr marL="1828800" indent="0">
+              <a:buNone/>
+              <a:defRPr sz="1600"/>
+            </a:lvl5pPr>
+            <a:lvl6pPr marL="2286000" indent="0">
+              <a:buNone/>
+              <a:defRPr sz="1600"/>
+            </a:lvl6pPr>
+            <a:lvl7pPr marL="2743200" indent="0">
+              <a:buNone/>
+              <a:defRPr sz="1600"/>
+            </a:lvl7pPr>
+            <a:lvl8pPr marL="3200400" indent="0">
+              <a:buNone/>
+              <a:defRPr sz="1600"/>
+            </a:lvl8pPr>
+            <a:lvl9pPr marL="3657600" indent="0">
+              <a:buNone/>
+              <a:defRPr sz="1600"/>
+            </a:lvl9pPr>
+          </a:lstStyle>
+          <a:p>
+            <a:r>
+              <a:rPr lang="en-GB"/>
+              <a:t>Click icon to add picture</a:t>
+            </a:r>
+            <a:endParaRPr lang="en-US" dirty="0"/>
+          </a:p>
+        </p:txBody>
+      </p:sp>
+      <p:sp>
+        <p:nvSpPr>
+          <p:cNvPr id="4" name="Text Placeholder 3"/>
+          <p:cNvSpPr>
+            <a:spLocks noGrp="1"/>
+          </p:cNvSpPr>
+          <p:nvPr>
+            <p:ph type="body" sz="half" idx="2"/>
+          </p:nvPr>
+        </p:nvSpPr>
+        <p:spPr>
+          <a:xfrm>
+            <a:off x="1154956" y="5367325"/>
+            <a:ext cx="8825656" cy="493712"/>
+          </a:xfrm>
+        </p:spPr>
+        <p:txBody>
+          <a:bodyPr>
+            <a:normAutofit/>
+          </a:bodyPr>
+          <a:lstStyle>
+            <a:lvl1pPr marL="0" indent="0">
+              <a:buNone/>
+              <a:defRPr sz="1200"/>
+            </a:lvl1pPr>
+            <a:lvl2pPr marL="457200" indent="0">
+              <a:buNone/>
+              <a:defRPr sz="1200"/>
+            </a:lvl2pPr>
+            <a:lvl3pPr marL="914400" indent="0">
+              <a:buNone/>
+              <a:defRPr sz="1000"/>
+            </a:lvl3pPr>
+            <a:lvl4pPr marL="1371600" indent="0">
+              <a:buNone/>
+              <a:defRPr sz="900"/>
+            </a:lvl4pPr>
+            <a:lvl5pPr marL="1828800" indent="0">
+              <a:buNone/>
+              <a:defRPr sz="900"/>
+            </a:lvl5pPr>
+            <a:lvl6pPr marL="2286000" indent="0">
+              <a:buNone/>
+              <a:defRPr sz="900"/>
+            </a:lvl6pPr>
+            <a:lvl7pPr marL="2743200" indent="0">
+              <a:buNone/>
+              <a:defRPr sz="900"/>
+            </a:lvl7pPr>
+            <a:lvl8pPr marL="3200400" indent="0">
+              <a:buNone/>
+              <a:defRPr sz="900"/>
+            </a:lvl8pPr>
+            <a:lvl9pPr marL="3657600" indent="0">
+              <a:buNone/>
+              <a:defRPr sz="900"/>
+            </a:lvl9pPr>
+          </a:lstStyle>
+          <a:p>
+            <a:pPr lvl="0"/>
+            <a:r>
+              <a:rPr lang="en-GB"/>
+              <a:t>Click to edit Master text styles</a:t>
+            </a:r>
+          </a:p>
+        </p:txBody>
+      </p:sp>
+      <p:sp>
+        <p:nvSpPr>
+          <p:cNvPr id="5" name="Date Placeholder 4"/>
+          <p:cNvSpPr>
+            <a:spLocks noGrp="1"/>
+          </p:cNvSpPr>
+          <p:nvPr>
+            <p:ph type="dt" sz="half" idx="10"/>
+          </p:nvPr>
+        </p:nvSpPr>
+        <p:spPr/>
+        <p:txBody>
+          <a:bodyPr/>
+          <a:lstStyle/>
+          <a:p>
+            <a:fld id="{A23C7EEE-1AD9-4CFE-8AFB-1041F302144F}" type="datetimeFigureOut">
+              <a:rPr lang="en-NZ" smtClean="0"/>
+              <a:t>10/09/2026</a:t>
+            </a:fld>
+            <a:endParaRPr lang="en-NZ"/>
+          </a:p>
+        </p:txBody>
+      </p:sp>
+      <p:sp>
+        <p:nvSpPr>
+          <p:cNvPr id="6" name="Footer Placeholder 5"/>
+          <p:cNvSpPr>
+            <a:spLocks noGrp="1"/>
+          </p:cNvSpPr>
+          <p:nvPr>
+            <p:ph type="ftr" sz="quarter" idx="11"/>
+          </p:nvPr>
+        </p:nvSpPr>
+        <p:spPr/>
+        <p:txBody>
+          <a:bodyPr/>
+          <a:lstStyle/>
+          <a:p>
+            <a:endParaRPr lang="en-NZ"/>
+          </a:p>
+        </p:txBody>
+      </p:sp>
+      <p:sp>
+        <p:nvSpPr>
+          <p:cNvPr id="7" name="Slide Number Placeholder 6"/>
+          <p:cNvSpPr>
+            <a:spLocks noGrp="1"/>
+          </p:cNvSpPr>
+          <p:nvPr>
+            <p:ph type="sldNum" sz="quarter" idx="12"/>
+          </p:nvPr>
+        </p:nvSpPr>
+        <p:spPr/>
+        <p:txBody>
+          <a:bodyPr/>
+          <a:lstStyle/>
+          <a:p>
+            <a:fld id="{4AE78319-C126-4CCF-AB9F-8D6DA74409B1}" type="slidenum">
+              <a:rPr lang="en-NZ" smtClean="0"/>
+              <a:t>‹#›</a:t>
+            </a:fld>
+            <a:endParaRPr lang="en-NZ"/>
+          </a:p>
+        </p:txBody>
+      </p:sp>
+    </p:spTree>
+    <p:extLst>
+      <p:ext uri="{BB962C8B-B14F-4D97-AF65-F5344CB8AC3E}">
+        <p14:creationId xmlns:p14="http://schemas.microsoft.com/office/powerpoint/2010/main" val="2009884168"/>
+      </p:ext>
+    </p:extLst>
+  </p:cSld>
+  <p:clrMapOvr>
+    <a:masterClrMapping/>
+  </p:clrMapOvr>
+</p:sldLayout>
+</file>
+
+<file path=ppt/slideLayouts/slideLayout11.xml><?xml version="1.0" encoding="utf-8"?>
+<p:sldLayout xmlns:a="http://schemas.openxmlformats.org/drawingml/2006/main" xmlns:r="http://schemas.openxmlformats.org/officeDocument/2006/relationships" xmlns:p="http://schemas.openxmlformats.org/presentationml/2006/main" preserve="1">
+  <p:cSld name="Title and Caption">
+    <p:spTree>
+      <p:nvGrpSpPr>
+        <p:cNvPr id="1" name=""/>
+        <p:cNvGrpSpPr/>
+        <p:nvPr/>
+      </p:nvGrpSpPr>
+      <p:grpSpPr>
+        <a:xfrm>
+          <a:off x="0" y="0"/>
+          <a:ext cx="0" cy="0"/>
+          <a:chOff x="0" y="0"/>
+          <a:chExt cx="0" cy="0"/>
+        </a:xfrm>
+      </p:grpSpPr>
+      <p:sp>
+        <p:nvSpPr>
+          <p:cNvPr id="2" name="Title 1"/>
+          <p:cNvSpPr>
+            <a:spLocks noGrp="1"/>
+          </p:cNvSpPr>
+          <p:nvPr>
+            <p:ph type="title"/>
+          </p:nvPr>
+        </p:nvSpPr>
+        <p:spPr>
+          <a:xfrm>
+            <a:off x="1154954" y="1447800"/>
+            <a:ext cx="8825659" cy="1981200"/>
+          </a:xfrm>
+        </p:spPr>
+        <p:txBody>
+          <a:bodyPr/>
+          <a:lstStyle>
+            <a:lvl1pPr>
+              <a:defRPr sz="4800"/>
+            </a:lvl1pPr>
+          </a:lstStyle>
+          <a:p>
+            <a:r>
+              <a:rPr lang="en-GB"/>
+              <a:t>Click to edit Master title style</a:t>
+            </a:r>
+            <a:endParaRPr lang="en-US" dirty="0"/>
+          </a:p>
+        </p:txBody>
+      </p:sp>
+      <p:sp>
+        <p:nvSpPr>
+          <p:cNvPr id="8" name="Text Placeholder 3"/>
+          <p:cNvSpPr>
+            <a:spLocks noGrp="1"/>
+          </p:cNvSpPr>
+          <p:nvPr>
+            <p:ph type="body" sz="half" idx="2"/>
+          </p:nvPr>
+        </p:nvSpPr>
+        <p:spPr>
+          <a:xfrm>
+            <a:off x="1154954" y="3657600"/>
+            <a:ext cx="8825659" cy="2362200"/>
+          </a:xfrm>
+        </p:spPr>
+        <p:txBody>
+          <a:bodyPr anchor="ctr">
+            <a:normAutofit/>
+          </a:bodyPr>
+          <a:lstStyle>
+            <a:lvl1pPr marL="0" indent="0">
+              <a:buNone/>
+              <a:defRPr sz="1800"/>
+            </a:lvl1pPr>
+            <a:lvl2pPr marL="457200" indent="0">
+              <a:buNone/>
+              <a:defRPr sz="1200"/>
+            </a:lvl2pPr>
+            <a:lvl3pPr marL="914400" indent="0">
+              <a:buNone/>
+              <a:defRPr sz="1000"/>
+            </a:lvl3pPr>
+            <a:lvl4pPr marL="1371600" indent="0">
+              <a:buNone/>
+              <a:defRPr sz="900"/>
+            </a:lvl4pPr>
+            <a:lvl5pPr marL="1828800" indent="0">
+              <a:buNone/>
+              <a:defRPr sz="900"/>
+            </a:lvl5pPr>
+            <a:lvl6pPr marL="2286000" indent="0">
+              <a:buNone/>
+              <a:defRPr sz="900"/>
+            </a:lvl6pPr>
+            <a:lvl7pPr marL="2743200" indent="0">
+              <a:buNone/>
+              <a:defRPr sz="900"/>
+            </a:lvl7pPr>
+            <a:lvl8pPr marL="3200400" indent="0">
+              <a:buNone/>
+              <a:defRPr sz="900"/>
+            </a:lvl8pPr>
+            <a:lvl9pPr marL="3657600" indent="0">
+              <a:buNone/>
+              <a:defRPr sz="900"/>
+            </a:lvl9pPr>
+          </a:lstStyle>
+          <a:p>
+            <a:pPr lvl="0"/>
+            <a:r>
+              <a:rPr lang="en-GB"/>
+              <a:t>Click to edit Master text styles</a:t>
+            </a:r>
+          </a:p>
+        </p:txBody>
+      </p:sp>
+      <p:sp>
+        <p:nvSpPr>
+          <p:cNvPr id="4" name="Date Placeholder 3"/>
+          <p:cNvSpPr>
+            <a:spLocks noGrp="1"/>
+          </p:cNvSpPr>
+          <p:nvPr>
+            <p:ph type="dt" sz="half" idx="10"/>
+          </p:nvPr>
+        </p:nvSpPr>
+        <p:spPr/>
+        <p:txBody>
+          <a:bodyPr/>
+          <a:lstStyle/>
+          <a:p>
+            <a:fld id="{A23C7EEE-1AD9-4CFE-8AFB-1041F302144F}" type="datetimeFigureOut">
+              <a:rPr lang="en-NZ" smtClean="0"/>
+              <a:t>10/09/2026</a:t>
+            </a:fld>
+            <a:endParaRPr lang="en-NZ"/>
+          </a:p>
+        </p:txBody>
+      </p:sp>
+      <p:sp>
+        <p:nvSpPr>
+          <p:cNvPr id="5" name="Footer Placeholder 4"/>
+          <p:cNvSpPr>
+            <a:spLocks noGrp="1"/>
+          </p:cNvSpPr>
+          <p:nvPr>
+            <p:ph type="ftr" sz="quarter" idx="11"/>
+          </p:nvPr>
+        </p:nvSpPr>
+        <p:spPr/>
+        <p:txBody>
+          <a:bodyPr/>
+          <a:lstStyle/>
+          <a:p>
+            <a:endParaRPr lang="en-NZ"/>
+          </a:p>
+        </p:txBody>
+      </p:sp>
+      <p:sp>
+        <p:nvSpPr>
+          <p:cNvPr id="6" name="Slide Number Placeholder 5"/>
+          <p:cNvSpPr>
+            <a:spLocks noGrp="1"/>
+          </p:cNvSpPr>
+          <p:nvPr>
+            <p:ph type="sldNum" sz="quarter" idx="12"/>
+          </p:nvPr>
+        </p:nvSpPr>
+        <p:spPr/>
+        <p:txBody>
+          <a:bodyPr/>
+          <a:lstStyle/>
+          <a:p>
+            <a:fld id="{4AE78319-C126-4CCF-AB9F-8D6DA74409B1}" type="slidenum">
+              <a:rPr lang="en-NZ" smtClean="0"/>
+              <a:t>‹#›</a:t>
+            </a:fld>
+            <a:endParaRPr lang="en-NZ"/>
+          </a:p>
+        </p:txBody>
+      </p:sp>
+    </p:spTree>
+    <p:extLst>
+      <p:ext uri="{BB962C8B-B14F-4D97-AF65-F5344CB8AC3E}">
+        <p14:creationId xmlns:p14="http://schemas.microsoft.com/office/powerpoint/2010/main" val="3074296379"/>
+      </p:ext>
+    </p:extLst>
+  </p:cSld>
+  <p:clrMapOvr>
+    <a:masterClrMapping/>
+  </p:clrMapOvr>
+</p:sldLayout>
+</file>
+
+<file path=ppt/slideLayouts/slideLayout12.xml><?xml version="1.0" encoding="utf-8"?>
+<p:sldLayout xmlns:a="http://schemas.openxmlformats.org/drawingml/2006/main" xmlns:r="http://schemas.openxmlformats.org/officeDocument/2006/relationships" xmlns:p="http://schemas.openxmlformats.org/presentationml/2006/main" preserve="1">
+  <p:cSld name="Quote with Caption">
+    <p:spTree>
+      <p:nvGrpSpPr>
+        <p:cNvPr id="1" name=""/>
+        <p:cNvGrpSpPr/>
+        <p:nvPr/>
+      </p:nvGrpSpPr>
+      <p:grpSpPr>
+        <a:xfrm>
+          <a:off x="0" y="0"/>
+          <a:ext cx="0" cy="0"/>
+          <a:chOff x="0" y="0"/>
+          <a:chExt cx="0" cy="0"/>
+        </a:xfrm>
+      </p:grpSpPr>
+      <p:sp>
+        <p:nvSpPr>
+          <p:cNvPr id="2" name="Title 1"/>
+          <p:cNvSpPr>
+            <a:spLocks noGrp="1"/>
+          </p:cNvSpPr>
+          <p:nvPr>
+            <p:ph type="title"/>
+          </p:nvPr>
+        </p:nvSpPr>
+        <p:spPr>
+          <a:xfrm>
+            <a:off x="1574801" y="1447800"/>
+            <a:ext cx="7999315" cy="2323374"/>
+          </a:xfrm>
+        </p:spPr>
+        <p:txBody>
+          <a:bodyPr/>
+          <a:lstStyle>
+            <a:lvl1pPr>
+              <a:defRPr sz="4800"/>
+            </a:lvl1pPr>
+          </a:lstStyle>
+          <a:p>
+            <a:r>
+              <a:rPr lang="en-GB"/>
+              <a:t>Click to edit Master title style</a:t>
+            </a:r>
+            <a:endParaRPr lang="en-US" dirty="0"/>
+          </a:p>
+        </p:txBody>
+      </p:sp>
+      <p:sp>
+        <p:nvSpPr>
+          <p:cNvPr id="11" name="Text Placeholder 3"/>
+          <p:cNvSpPr>
+            <a:spLocks noGrp="1"/>
+          </p:cNvSpPr>
+          <p:nvPr>
+            <p:ph type="body" sz="half" idx="14"/>
+          </p:nvPr>
+        </p:nvSpPr>
+        <p:spPr>
+          <a:xfrm>
+            <a:off x="1930400" y="3771174"/>
+            <a:ext cx="7279649" cy="342174"/>
+          </a:xfrm>
+        </p:spPr>
+        <p:txBody>
+          <a:bodyPr vert="horz" lIns="91440" tIns="45720" rIns="91440" bIns="45720" rtlCol="0" anchor="t">
+            <a:normAutofit/>
+          </a:bodyPr>
+          <a:lstStyle>
+            <a:lvl1pPr marL="0" indent="0">
+              <a:buNone/>
+              <a:defRPr lang="en-US" sz="1400" b="0" i="0" kern="1200" cap="small" dirty="0">
+                <a:solidFill>
+                  <a:schemeClr val="bg2">
+                    <a:lumMod val="40000"/>
+                    <a:lumOff val="60000"/>
+                  </a:schemeClr>
+                </a:solidFill>
+                <a:latin typeface="+mj-lt"/>
+                <a:ea typeface="+mj-ea"/>
+                <a:cs typeface="+mj-cs"/>
+              </a:defRPr>
+            </a:lvl1pPr>
+            <a:lvl2pPr marL="457200" indent="0">
+              <a:buNone/>
+              <a:defRPr sz="1200"/>
+            </a:lvl2pPr>
+            <a:lvl3pPr marL="914400" indent="0">
+              <a:buNone/>
+              <a:defRPr sz="1000"/>
+            </a:lvl3pPr>
+            <a:lvl4pPr marL="1371600" indent="0">
+              <a:buNone/>
+              <a:defRPr sz="900"/>
+            </a:lvl4pPr>
+            <a:lvl5pPr marL="1828800" indent="0">
+              <a:buNone/>
+              <a:defRPr sz="900"/>
+            </a:lvl5pPr>
+            <a:lvl6pPr marL="2286000" indent="0">
+              <a:buNone/>
+              <a:defRPr sz="900"/>
+            </a:lvl6pPr>
+            <a:lvl7pPr marL="2743200" indent="0">
+              <a:buNone/>
+              <a:defRPr sz="900"/>
+            </a:lvl7pPr>
+            <a:lvl8pPr marL="3200400" indent="0">
+              <a:buNone/>
+              <a:defRPr sz="900"/>
+            </a:lvl8pPr>
+            <a:lvl9pPr marL="3657600" indent="0">
+              <a:buNone/>
+              <a:defRPr sz="900"/>
+            </a:lvl9pPr>
+          </a:lstStyle>
+          <a:p>
+            <a:pPr marL="0" lvl="0" indent="0">
+              <a:buNone/>
+            </a:pPr>
+            <a:r>
+              <a:rPr lang="en-GB"/>
+              <a:t>Click to edit Master text styles</a:t>
+            </a:r>
+          </a:p>
+        </p:txBody>
+      </p:sp>
+      <p:sp>
+        <p:nvSpPr>
+          <p:cNvPr id="10" name="Text Placeholder 3"/>
+          <p:cNvSpPr>
+            <a:spLocks noGrp="1"/>
+          </p:cNvSpPr>
+          <p:nvPr>
+            <p:ph type="body" sz="half" idx="2"/>
+          </p:nvPr>
+        </p:nvSpPr>
+        <p:spPr>
+          <a:xfrm>
+            <a:off x="1154954" y="4350657"/>
+            <a:ext cx="8825659" cy="1676400"/>
+          </a:xfrm>
+        </p:spPr>
+        <p:txBody>
+          <a:bodyPr anchor="ctr">
+            <a:normAutofit/>
+          </a:bodyPr>
+          <a:lstStyle>
+            <a:lvl1pPr marL="0" indent="0">
+              <a:buNone/>
+              <a:defRPr sz="1800"/>
+            </a:lvl1pPr>
+            <a:lvl2pPr marL="457200" indent="0">
+              <a:buNone/>
+              <a:defRPr sz="1200"/>
+            </a:lvl2pPr>
+            <a:lvl3pPr marL="914400" indent="0">
+              <a:buNone/>
+              <a:defRPr sz="1000"/>
+            </a:lvl3pPr>
+            <a:lvl4pPr marL="1371600" indent="0">
+              <a:buNone/>
+              <a:defRPr sz="900"/>
+            </a:lvl4pPr>
+            <a:lvl5pPr marL="1828800" indent="0">
+              <a:buNone/>
+              <a:defRPr sz="900"/>
+            </a:lvl5pPr>
+            <a:lvl6pPr marL="2286000" indent="0">
+              <a:buNone/>
+              <a:defRPr sz="900"/>
+            </a:lvl6pPr>
+            <a:lvl7pPr marL="2743200" indent="0">
+              <a:buNone/>
+              <a:defRPr sz="900"/>
+            </a:lvl7pPr>
+            <a:lvl8pPr marL="3200400" indent="0">
+              <a:buNone/>
+              <a:defRPr sz="900"/>
+            </a:lvl8pPr>
+            <a:lvl9pPr marL="3657600" indent="0">
+              <a:buNone/>
+              <a:defRPr sz="900"/>
+            </a:lvl9pPr>
+          </a:lstStyle>
+          <a:p>
+            <a:pPr lvl="0"/>
+            <a:r>
+              <a:rPr lang="en-GB"/>
+              <a:t>Click to edit Master text styles</a:t>
+            </a:r>
+          </a:p>
+        </p:txBody>
+      </p:sp>
+      <p:sp>
+        <p:nvSpPr>
+          <p:cNvPr id="4" name="Date Placeholder 3"/>
+          <p:cNvSpPr>
+            <a:spLocks noGrp="1"/>
+          </p:cNvSpPr>
+          <p:nvPr>
+            <p:ph type="dt" sz="half" idx="10"/>
+          </p:nvPr>
+        </p:nvSpPr>
+        <p:spPr/>
+        <p:txBody>
+          <a:bodyPr/>
+          <a:lstStyle/>
+          <a:p>
+            <a:fld id="{A23C7EEE-1AD9-4CFE-8AFB-1041F302144F}" type="datetimeFigureOut">
+              <a:rPr lang="en-NZ" smtClean="0"/>
+              <a:t>10/09/2026</a:t>
+            </a:fld>
+            <a:endParaRPr lang="en-NZ"/>
+          </a:p>
+        </p:txBody>
+      </p:sp>
+      <p:sp>
+        <p:nvSpPr>
+          <p:cNvPr id="5" name="Footer Placeholder 4"/>
+          <p:cNvSpPr>
+            <a:spLocks noGrp="1"/>
+          </p:cNvSpPr>
+          <p:nvPr>
+            <p:ph type="ftr" sz="quarter" idx="11"/>
+          </p:nvPr>
+        </p:nvSpPr>
+        <p:spPr/>
+        <p:txBody>
+          <a:bodyPr/>
+          <a:lstStyle/>
+          <a:p>
+            <a:endParaRPr lang="en-NZ"/>
+          </a:p>
+        </p:txBody>
+      </p:sp>
+      <p:sp>
+        <p:nvSpPr>
+          <p:cNvPr id="6" name="Slide Number Placeholder 5"/>
+          <p:cNvSpPr>
+            <a:spLocks noGrp="1"/>
+          </p:cNvSpPr>
+          <p:nvPr>
+            <p:ph type="sldNum" sz="quarter" idx="12"/>
+          </p:nvPr>
+        </p:nvSpPr>
+        <p:spPr/>
+        <p:txBody>
+          <a:bodyPr/>
+          <a:lstStyle/>
+          <a:p>
+            <a:fld id="{4AE78319-C126-4CCF-AB9F-8D6DA74409B1}" type="slidenum">
+              <a:rPr lang="en-NZ" smtClean="0"/>
+              <a:t>‹#›</a:t>
+            </a:fld>
+            <a:endParaRPr lang="en-NZ"/>
+          </a:p>
+        </p:txBody>
+      </p:sp>
+      <p:sp>
+        <p:nvSpPr>
+          <p:cNvPr id="12" name="TextBox 11"/>
+          <p:cNvSpPr txBox="1"/>
+          <p:nvPr/>
+        </p:nvSpPr>
+        <p:spPr>
+          <a:xfrm>
+            <a:off x="898295" y="971253"/>
+            <a:ext cx="801912" cy="1969770"/>
+          </a:xfrm>
+          <a:prstGeom prst="rect">
+            <a:avLst/>
+          </a:prstGeom>
+          <a:noFill/>
+        </p:spPr>
+        <p:txBody>
+          <a:bodyPr wrap="square" rtlCol="0">
+            <a:spAutoFit/>
+          </a:bodyPr>
+          <a:lstStyle>
+            <a:defPPr>
+              <a:defRPr lang="en-US"/>
+            </a:defPPr>
+            <a:lvl1pPr algn="r">
+              <a:defRPr sz="12200" b="0" i="0">
+                <a:solidFill>
+                  <a:schemeClr val="bg2">
+                    <a:lumMod val="40000"/>
+                    <a:lumOff val="60000"/>
+                  </a:schemeClr>
+                </a:solidFill>
+                <a:latin typeface="Arial"/>
+                <a:ea typeface="+mj-ea"/>
+                <a:cs typeface="+mj-cs"/>
+              </a:defRPr>
+            </a:lvl1pPr>
+          </a:lstStyle>
+          <a:p>
+            <a:pPr lvl="0"/>
+            <a:r>
+              <a:rPr lang="en-US" dirty="0"/>
+              <a:t>“</a:t>
+            </a:r>
+          </a:p>
+        </p:txBody>
+      </p:sp>
+      <p:sp>
+        <p:nvSpPr>
+          <p:cNvPr id="15" name="TextBox 14"/>
+          <p:cNvSpPr txBox="1"/>
+          <p:nvPr/>
+        </p:nvSpPr>
+        <p:spPr>
+          <a:xfrm>
+            <a:off x="9330490" y="2613787"/>
+            <a:ext cx="801912" cy="1969770"/>
+          </a:xfrm>
+          <a:prstGeom prst="rect">
+            <a:avLst/>
+          </a:prstGeom>
+          <a:noFill/>
+        </p:spPr>
+        <p:txBody>
+          <a:bodyPr wrap="square" rtlCol="0">
+            <a:spAutoFit/>
+          </a:bodyPr>
+          <a:lstStyle>
+            <a:defPPr>
+              <a:defRPr lang="en-US"/>
+            </a:defPPr>
+            <a:lvl1pPr algn="r">
+              <a:defRPr sz="12200" b="0" i="0">
+                <a:solidFill>
+                  <a:schemeClr val="bg2">
+                    <a:lumMod val="40000"/>
+                    <a:lumOff val="60000"/>
+                  </a:schemeClr>
+                </a:solidFill>
+                <a:latin typeface="Arial"/>
+                <a:ea typeface="+mj-ea"/>
+                <a:cs typeface="+mj-cs"/>
+              </a:defRPr>
+            </a:lvl1pPr>
+          </a:lstStyle>
+          <a:p>
+            <a:pPr lvl="0"/>
+            <a:r>
+              <a:rPr lang="en-US" dirty="0"/>
+              <a:t>”</a:t>
+            </a:r>
+          </a:p>
+        </p:txBody>
+      </p:sp>
+    </p:spTree>
+    <p:extLst>
+      <p:ext uri="{BB962C8B-B14F-4D97-AF65-F5344CB8AC3E}">
+        <p14:creationId xmlns:p14="http://schemas.microsoft.com/office/powerpoint/2010/main" val="1427067105"/>
+      </p:ext>
+    </p:extLst>
+  </p:cSld>
+  <p:clrMapOvr>
+    <a:masterClrMapping/>
+  </p:clrMapOvr>
+</p:sldLayout>
+</file>
+
+<file path=ppt/slideLayouts/slideLayout13.xml><?xml version="1.0" encoding="utf-8"?>
+<p:sldLayout xmlns:a="http://schemas.openxmlformats.org/drawingml/2006/main" xmlns:r="http://schemas.openxmlformats.org/officeDocument/2006/relationships" xmlns:p="http://schemas.openxmlformats.org/presentationml/2006/main" preserve="1">
+  <p:cSld name="Name Card">
+    <p:spTree>
+      <p:nvGrpSpPr>
+        <p:cNvPr id="1" name=""/>
+        <p:cNvGrpSpPr/>
+        <p:nvPr/>
+      </p:nvGrpSpPr>
+      <p:grpSpPr>
+        <a:xfrm>
+          <a:off x="0" y="0"/>
+          <a:ext cx="0" cy="0"/>
+          <a:chOff x="0" y="0"/>
+          <a:chExt cx="0" cy="0"/>
+        </a:xfrm>
+      </p:grpSpPr>
+      <p:sp>
+        <p:nvSpPr>
+          <p:cNvPr id="2" name="Title 1"/>
+          <p:cNvSpPr>
+            <a:spLocks noGrp="1"/>
+          </p:cNvSpPr>
+          <p:nvPr>
+            <p:ph type="title"/>
+          </p:nvPr>
+        </p:nvSpPr>
+        <p:spPr>
+          <a:xfrm>
+            <a:off x="1154954" y="3124201"/>
+            <a:ext cx="8825660" cy="1653180"/>
+          </a:xfrm>
+        </p:spPr>
+        <p:txBody>
+          <a:bodyPr anchor="b"/>
+          <a:lstStyle>
+            <a:lvl1pPr algn="l">
+              <a:defRPr sz="4000" b="0" cap="none"/>
+            </a:lvl1pPr>
+          </a:lstStyle>
+          <a:p>
+            <a:r>
+              <a:rPr lang="en-GB"/>
+              <a:t>Click to edit Master title style</a:t>
+            </a:r>
+            <a:endParaRPr lang="en-US" dirty="0"/>
+          </a:p>
+        </p:txBody>
+      </p:sp>
+      <p:sp>
+        <p:nvSpPr>
+          <p:cNvPr id="3" name="Text Placeholder 2"/>
+          <p:cNvSpPr>
+            <a:spLocks noGrp="1"/>
+          </p:cNvSpPr>
+          <p:nvPr>
+            <p:ph type="body" idx="1"/>
+          </p:nvPr>
+        </p:nvSpPr>
+        <p:spPr>
+          <a:xfrm>
+            <a:off x="1154954" y="4777381"/>
+            <a:ext cx="8825659" cy="860400"/>
+          </a:xfrm>
+        </p:spPr>
+        <p:txBody>
+          <a:bodyPr anchor="t"/>
+          <a:lstStyle>
+            <a:lvl1pPr marL="0" indent="0" algn="l">
+              <a:buNone/>
+              <a:defRPr sz="2000" cap="none">
+                <a:solidFill>
+                  <a:schemeClr val="bg2">
+                    <a:lumMod val="40000"/>
+                    <a:lumOff val="60000"/>
+                  </a:schemeClr>
+                </a:solidFill>
+              </a:defRPr>
+            </a:lvl1pPr>
+            <a:lvl2pPr marL="457200" indent="0">
+              <a:buNone/>
+              <a:defRPr sz="1800">
+                <a:solidFill>
+                  <a:schemeClr val="tx1">
+                    <a:tint val="75000"/>
+                  </a:schemeClr>
+                </a:solidFill>
+              </a:defRPr>
+            </a:lvl2pPr>
+            <a:lvl3pPr marL="914400" indent="0">
+              <a:buNone/>
+              <a:defRPr sz="1600">
+                <a:solidFill>
+                  <a:schemeClr val="tx1">
+                    <a:tint val="75000"/>
+                  </a:schemeClr>
+                </a:solidFill>
+              </a:defRPr>
+            </a:lvl3pPr>
+            <a:lvl4pPr marL="1371600" indent="0">
+              <a:buNone/>
+              <a:defRPr sz="1400">
+                <a:solidFill>
+                  <a:schemeClr val="tx1">
+                    <a:tint val="75000"/>
+                  </a:schemeClr>
+                </a:solidFill>
+              </a:defRPr>
+            </a:lvl4pPr>
+            <a:lvl5pPr marL="1828800" indent="0">
+              <a:buNone/>
+              <a:defRPr sz="1400">
+                <a:solidFill>
+                  <a:schemeClr val="tx1">
+                    <a:tint val="75000"/>
+                  </a:schemeClr>
+                </a:solidFill>
+              </a:defRPr>
+            </a:lvl5pPr>
+            <a:lvl6pPr marL="2286000" indent="0">
+              <a:buNone/>
+              <a:defRPr sz="1400">
+                <a:solidFill>
+                  <a:schemeClr val="tx1">
+                    <a:tint val="75000"/>
+                  </a:schemeClr>
+                </a:solidFill>
+              </a:defRPr>
+            </a:lvl6pPr>
+            <a:lvl7pPr marL="2743200" indent="0">
+              <a:buNone/>
+              <a:defRPr sz="1400">
+                <a:solidFill>
+                  <a:schemeClr val="tx1">
+                    <a:tint val="75000"/>
+                  </a:schemeClr>
+                </a:solidFill>
+              </a:defRPr>
+            </a:lvl7pPr>
+            <a:lvl8pPr marL="3200400" indent="0">
+              <a:buNone/>
+              <a:defRPr sz="1400">
+                <a:solidFill>
+                  <a:schemeClr val="tx1">
+                    <a:tint val="75000"/>
+                  </a:schemeClr>
+                </a:solidFill>
+              </a:defRPr>
+            </a:lvl8pPr>
+            <a:lvl9pPr marL="3657600" indent="0">
+              <a:buNone/>
+              <a:defRPr sz="1400">
+                <a:solidFill>
+                  <a:schemeClr val="tx1">
+                    <a:tint val="75000"/>
+                  </a:schemeClr>
+                </a:solidFill>
+              </a:defRPr>
+            </a:lvl9pPr>
+          </a:lstStyle>
+          <a:p>
+            <a:pPr lvl="0"/>
+            <a:r>
+              <a:rPr lang="en-GB"/>
+              <a:t>Click to edit Master text styles</a:t>
+            </a:r>
+          </a:p>
+        </p:txBody>
+      </p:sp>
+      <p:sp>
+        <p:nvSpPr>
+          <p:cNvPr id="4" name="Date Placeholder 3"/>
+          <p:cNvSpPr>
+            <a:spLocks noGrp="1"/>
+          </p:cNvSpPr>
+          <p:nvPr>
+            <p:ph type="dt" sz="half" idx="10"/>
+          </p:nvPr>
+        </p:nvSpPr>
+        <p:spPr/>
+        <p:txBody>
+          <a:bodyPr/>
+          <a:lstStyle/>
+          <a:p>
+            <a:fld id="{A23C7EEE-1AD9-4CFE-8AFB-1041F302144F}" type="datetimeFigureOut">
+              <a:rPr lang="en-NZ" smtClean="0"/>
+              <a:t>10/09/2026</a:t>
+            </a:fld>
+            <a:endParaRPr lang="en-NZ"/>
+          </a:p>
+        </p:txBody>
+      </p:sp>
+      <p:sp>
+        <p:nvSpPr>
+          <p:cNvPr id="5" name="Footer Placeholder 4"/>
+          <p:cNvSpPr>
+            <a:spLocks noGrp="1"/>
+          </p:cNvSpPr>
+          <p:nvPr>
+            <p:ph type="ftr" sz="quarter" idx="11"/>
+          </p:nvPr>
+        </p:nvSpPr>
+        <p:spPr/>
+        <p:txBody>
+          <a:bodyPr/>
+          <a:lstStyle/>
+          <a:p>
+            <a:endParaRPr lang="en-NZ"/>
+          </a:p>
+        </p:txBody>
+      </p:sp>
+      <p:sp>
+        <p:nvSpPr>
+          <p:cNvPr id="6" name="Slide Number Placeholder 5"/>
+          <p:cNvSpPr>
+            <a:spLocks noGrp="1"/>
+          </p:cNvSpPr>
+          <p:nvPr>
+            <p:ph type="sldNum" sz="quarter" idx="12"/>
+          </p:nvPr>
+        </p:nvSpPr>
+        <p:spPr/>
+        <p:txBody>
+          <a:bodyPr/>
+          <a:lstStyle/>
+          <a:p>
+            <a:fld id="{4AE78319-C126-4CCF-AB9F-8D6DA74409B1}" type="slidenum">
+              <a:rPr lang="en-NZ" smtClean="0"/>
+              <a:t>‹#›</a:t>
+            </a:fld>
+            <a:endParaRPr lang="en-NZ"/>
+          </a:p>
+        </p:txBody>
+      </p:sp>
+    </p:spTree>
+    <p:extLst>
+      <p:ext uri="{BB962C8B-B14F-4D97-AF65-F5344CB8AC3E}">
+        <p14:creationId xmlns:p14="http://schemas.microsoft.com/office/powerpoint/2010/main" val="3712696378"/>
+      </p:ext>
+    </p:extLst>
+  </p:cSld>
+  <p:clrMapOvr>
+    <a:masterClrMapping/>
+  </p:clrMapOvr>
+</p:sldLayout>
+</file>
+
+<file path=ppt/slideLayouts/slideLayout14.xml><?xml version="1.0" encoding="utf-8"?>
+<p:sldLayout xmlns:a="http://schemas.openxmlformats.org/drawingml/2006/main" xmlns:r="http://schemas.openxmlformats.org/officeDocument/2006/relationships" xmlns:p="http://schemas.openxmlformats.org/presentationml/2006/main" preserve="1">
+  <p:cSld name="3 Column">
+    <p:spTree>
+      <p:nvGrpSpPr>
+        <p:cNvPr id="1" name=""/>
+        <p:cNvGrpSpPr/>
+        <p:nvPr/>
+      </p:nvGrpSpPr>
+      <p:grpSpPr>
+        <a:xfrm>
+          <a:off x="0" y="0"/>
+          <a:ext cx="0" cy="0"/>
+          <a:chOff x="0" y="0"/>
+          <a:chExt cx="0" cy="0"/>
+        </a:xfrm>
+      </p:grpSpPr>
+      <p:sp>
+        <p:nvSpPr>
+          <p:cNvPr id="2" name="Title 1"/>
+          <p:cNvSpPr>
+            <a:spLocks noGrp="1"/>
+          </p:cNvSpPr>
+          <p:nvPr>
+            <p:ph type="title"/>
+          </p:nvPr>
+        </p:nvSpPr>
+        <p:spPr/>
+        <p:txBody>
+          <a:bodyPr/>
+          <a:lstStyle>
+            <a:lvl1pPr>
+              <a:defRPr sz="4200"/>
+            </a:lvl1pPr>
+          </a:lstStyle>
+          <a:p>
+            <a:r>
+              <a:rPr lang="en-GB"/>
+              <a:t>Click to edit Master title style</a:t>
+            </a:r>
+            <a:endParaRPr lang="en-US" dirty="0"/>
+          </a:p>
+        </p:txBody>
+      </p:sp>
+      <p:sp>
+        <p:nvSpPr>
+          <p:cNvPr id="3" name="Text Placeholder 2"/>
+          <p:cNvSpPr>
+            <a:spLocks noGrp="1"/>
+          </p:cNvSpPr>
+          <p:nvPr>
+            <p:ph type="body" idx="1"/>
+          </p:nvPr>
+        </p:nvSpPr>
+        <p:spPr>
+          <a:xfrm>
+            <a:off x="632947" y="1981200"/>
+            <a:ext cx="2946866" cy="576262"/>
+          </a:xfrm>
+        </p:spPr>
+        <p:txBody>
+          <a:bodyPr anchor="b">
+            <a:noAutofit/>
+          </a:bodyPr>
+          <a:lstStyle>
+            <a:lvl1pPr marL="0" indent="0">
+              <a:buNone/>
+              <a:defRPr sz="2400" b="0">
+                <a:solidFill>
+                  <a:schemeClr val="bg2">
+                    <a:lumMod val="40000"/>
+                    <a:lumOff val="60000"/>
+                  </a:schemeClr>
+                </a:solidFill>
+              </a:defRPr>
+            </a:lvl1pPr>
+            <a:lvl2pPr marL="457200" indent="0">
+              <a:buNone/>
+              <a:defRPr sz="2000" b="1"/>
+            </a:lvl2pPr>
+            <a:lvl3pPr marL="914400" indent="0">
+              <a:buNone/>
+              <a:defRPr sz="1800" b="1"/>
+            </a:lvl3pPr>
+            <a:lvl4pPr marL="1371600" indent="0">
+              <a:buNone/>
+              <a:defRPr sz="1600" b="1"/>
+            </a:lvl4pPr>
+            <a:lvl5pPr marL="1828800" indent="0">
+              <a:buNone/>
+              <a:defRPr sz="1600" b="1"/>
+            </a:lvl5pPr>
+            <a:lvl6pPr marL="2286000" indent="0">
+              <a:buNone/>
+              <a:defRPr sz="1600" b="1"/>
+            </a:lvl6pPr>
+            <a:lvl7pPr marL="2743200" indent="0">
+              <a:buNone/>
+              <a:defRPr sz="1600" b="1"/>
+            </a:lvl7pPr>
+            <a:lvl8pPr marL="3200400" indent="0">
+              <a:buNone/>
+              <a:defRPr sz="1600" b="1"/>
+            </a:lvl8pPr>
+            <a:lvl9pPr marL="3657600" indent="0">
+              <a:buNone/>
+              <a:defRPr sz="1600" b="1"/>
+            </a:lvl9pPr>
+          </a:lstStyle>
+          <a:p>
+            <a:pPr lvl="0"/>
+            <a:r>
+              <a:rPr lang="en-GB"/>
+              <a:t>Click to edit Master text styles</a:t>
+            </a:r>
+          </a:p>
+        </p:txBody>
+      </p:sp>
+      <p:sp>
+        <p:nvSpPr>
+          <p:cNvPr id="16" name="Text Placeholder 3"/>
+          <p:cNvSpPr>
+            <a:spLocks noGrp="1"/>
+          </p:cNvSpPr>
+          <p:nvPr>
+            <p:ph type="body" sz="half" idx="15"/>
+          </p:nvPr>
+        </p:nvSpPr>
+        <p:spPr>
+          <a:xfrm>
+            <a:off x="652463" y="2667000"/>
+            <a:ext cx="2927350" cy="3589338"/>
+          </a:xfrm>
+        </p:spPr>
+        <p:txBody>
+          <a:bodyPr anchor="t">
+            <a:normAutofit/>
+          </a:bodyPr>
+          <a:lstStyle>
+            <a:lvl1pPr marL="0" indent="0">
+              <a:buNone/>
+              <a:defRPr sz="1400"/>
+            </a:lvl1pPr>
+            <a:lvl2pPr marL="457200" indent="0">
+              <a:buNone/>
+              <a:defRPr sz="1200"/>
+            </a:lvl2pPr>
+            <a:lvl3pPr marL="914400" indent="0">
+              <a:buNone/>
+              <a:defRPr sz="1000"/>
+            </a:lvl3pPr>
+            <a:lvl4pPr marL="1371600" indent="0">
+              <a:buNone/>
+              <a:defRPr sz="900"/>
+            </a:lvl4pPr>
+            <a:lvl5pPr marL="1828800" indent="0">
+              <a:buNone/>
+              <a:defRPr sz="900"/>
+            </a:lvl5pPr>
+            <a:lvl6pPr marL="2286000" indent="0">
+              <a:buNone/>
+              <a:defRPr sz="900"/>
+            </a:lvl6pPr>
+            <a:lvl7pPr marL="2743200" indent="0">
+              <a:buNone/>
+              <a:defRPr sz="900"/>
+            </a:lvl7pPr>
+            <a:lvl8pPr marL="3200400" indent="0">
+              <a:buNone/>
+              <a:defRPr sz="900"/>
+            </a:lvl8pPr>
+            <a:lvl9pPr marL="3657600" indent="0">
+              <a:buNone/>
+              <a:defRPr sz="900"/>
+            </a:lvl9pPr>
+          </a:lstStyle>
+          <a:p>
+            <a:pPr lvl="0"/>
+            <a:r>
+              <a:rPr lang="en-GB"/>
+              <a:t>Click to edit Master text styles</a:t>
+            </a:r>
+          </a:p>
+        </p:txBody>
+      </p:sp>
+      <p:sp>
+        <p:nvSpPr>
+          <p:cNvPr id="5" name="Text Placeholder 4"/>
+          <p:cNvSpPr>
+            <a:spLocks noGrp="1"/>
+          </p:cNvSpPr>
+          <p:nvPr>
+            <p:ph type="body" sz="quarter" idx="3"/>
+          </p:nvPr>
+        </p:nvSpPr>
+        <p:spPr>
+          <a:xfrm>
+            <a:off x="3883659" y="1981200"/>
+            <a:ext cx="2936241" cy="576262"/>
+          </a:xfrm>
+        </p:spPr>
+        <p:txBody>
+          <a:bodyPr anchor="b">
+            <a:noAutofit/>
+          </a:bodyPr>
+          <a:lstStyle>
+            <a:lvl1pPr marL="0" indent="0">
+              <a:buNone/>
+              <a:defRPr sz="2400" b="0">
+                <a:solidFill>
+                  <a:schemeClr val="bg2">
+                    <a:lumMod val="40000"/>
+                    <a:lumOff val="60000"/>
+                  </a:schemeClr>
+                </a:solidFill>
+              </a:defRPr>
+            </a:lvl1pPr>
+            <a:lvl2pPr marL="457200" indent="0">
+              <a:buNone/>
+              <a:defRPr sz="2000" b="1"/>
+            </a:lvl2pPr>
+            <a:lvl3pPr marL="914400" indent="0">
+              <a:buNone/>
+              <a:defRPr sz="1800" b="1"/>
+            </a:lvl3pPr>
+            <a:lvl4pPr marL="1371600" indent="0">
+              <a:buNone/>
+              <a:defRPr sz="1600" b="1"/>
+            </a:lvl4pPr>
+            <a:lvl5pPr marL="1828800" indent="0">
+              <a:buNone/>
+              <a:defRPr sz="1600" b="1"/>
+            </a:lvl5pPr>
+            <a:lvl6pPr marL="2286000" indent="0">
+              <a:buNone/>
+              <a:defRPr sz="1600" b="1"/>
+            </a:lvl6pPr>
+            <a:lvl7pPr marL="2743200" indent="0">
+              <a:buNone/>
+              <a:defRPr sz="1600" b="1"/>
+            </a:lvl7pPr>
+            <a:lvl8pPr marL="3200400" indent="0">
+              <a:buNone/>
+              <a:defRPr sz="1600" b="1"/>
+            </a:lvl8pPr>
+            <a:lvl9pPr marL="3657600" indent="0">
+              <a:buNone/>
+              <a:defRPr sz="1600" b="1"/>
+            </a:lvl9pPr>
+          </a:lstStyle>
+          <a:p>
+            <a:pPr lvl="0"/>
+            <a:r>
+              <a:rPr lang="en-GB"/>
+              <a:t>Click to edit Master text styles</a:t>
+            </a:r>
+          </a:p>
+        </p:txBody>
+      </p:sp>
+      <p:sp>
+        <p:nvSpPr>
+          <p:cNvPr id="19" name="Text Placeholder 3"/>
+          <p:cNvSpPr>
+            <a:spLocks noGrp="1"/>
+          </p:cNvSpPr>
+          <p:nvPr>
+            <p:ph type="body" sz="half" idx="16"/>
+          </p:nvPr>
+        </p:nvSpPr>
+        <p:spPr>
+          <a:xfrm>
+            <a:off x="3873106" y="2667000"/>
+            <a:ext cx="2946794" cy="3589338"/>
+          </a:xfrm>
+        </p:spPr>
+        <p:txBody>
+          <a:bodyPr anchor="t">
+            <a:normAutofit/>
+          </a:bodyPr>
+          <a:lstStyle>
+            <a:lvl1pPr marL="0" indent="0">
+              <a:buNone/>
+              <a:defRPr sz="1400"/>
+            </a:lvl1pPr>
+            <a:lvl2pPr marL="457200" indent="0">
+              <a:buNone/>
+              <a:defRPr sz="1200"/>
+            </a:lvl2pPr>
+            <a:lvl3pPr marL="914400" indent="0">
+              <a:buNone/>
+              <a:defRPr sz="1000"/>
+            </a:lvl3pPr>
+            <a:lvl4pPr marL="1371600" indent="0">
+              <a:buNone/>
+              <a:defRPr sz="900"/>
+            </a:lvl4pPr>
+            <a:lvl5pPr marL="1828800" indent="0">
+              <a:buNone/>
+              <a:defRPr sz="900"/>
+            </a:lvl5pPr>
+            <a:lvl6pPr marL="2286000" indent="0">
+              <a:buNone/>
+              <a:defRPr sz="900"/>
+            </a:lvl6pPr>
+            <a:lvl7pPr marL="2743200" indent="0">
+              <a:buNone/>
+              <a:defRPr sz="900"/>
+            </a:lvl7pPr>
+            <a:lvl8pPr marL="3200400" indent="0">
+              <a:buNone/>
+              <a:defRPr sz="900"/>
+            </a:lvl8pPr>
+            <a:lvl9pPr marL="3657600" indent="0">
+              <a:buNone/>
+              <a:defRPr sz="900"/>
+            </a:lvl9pPr>
+          </a:lstStyle>
+          <a:p>
+            <a:pPr lvl="0"/>
+            <a:r>
+              <a:rPr lang="en-GB"/>
+              <a:t>Click to edit Master text styles</a:t>
+            </a:r>
+          </a:p>
+        </p:txBody>
+      </p:sp>
+      <p:sp>
+        <p:nvSpPr>
+          <p:cNvPr id="14" name="Text Placeholder 4"/>
+          <p:cNvSpPr>
+            <a:spLocks noGrp="1"/>
+          </p:cNvSpPr>
+          <p:nvPr>
+            <p:ph type="body" sz="quarter" idx="13"/>
+          </p:nvPr>
+        </p:nvSpPr>
+        <p:spPr>
+          <a:xfrm>
+            <a:off x="7124700" y="1981200"/>
+            <a:ext cx="2932113" cy="576262"/>
+          </a:xfrm>
+        </p:spPr>
+        <p:txBody>
+          <a:bodyPr anchor="b">
+            <a:noAutofit/>
+          </a:bodyPr>
+          <a:lstStyle>
+            <a:lvl1pPr marL="0" indent="0">
+              <a:buNone/>
+              <a:defRPr sz="2400" b="0">
+                <a:solidFill>
+                  <a:schemeClr val="bg2">
+                    <a:lumMod val="40000"/>
+                    <a:lumOff val="60000"/>
+                  </a:schemeClr>
+                </a:solidFill>
+              </a:defRPr>
+            </a:lvl1pPr>
+            <a:lvl2pPr marL="457200" indent="0">
+              <a:buNone/>
+              <a:defRPr sz="2000" b="1"/>
+            </a:lvl2pPr>
+            <a:lvl3pPr marL="914400" indent="0">
+              <a:buNone/>
+              <a:defRPr sz="1800" b="1"/>
+            </a:lvl3pPr>
+            <a:lvl4pPr marL="1371600" indent="0">
+              <a:buNone/>
+              <a:defRPr sz="1600" b="1"/>
+            </a:lvl4pPr>
+            <a:lvl5pPr marL="1828800" indent="0">
+              <a:buNone/>
+              <a:defRPr sz="1600" b="1"/>
+            </a:lvl5pPr>
+            <a:lvl6pPr marL="2286000" indent="0">
+              <a:buNone/>
+              <a:defRPr sz="1600" b="1"/>
+            </a:lvl6pPr>
+            <a:lvl7pPr marL="2743200" indent="0">
+              <a:buNone/>
+              <a:defRPr sz="1600" b="1"/>
+            </a:lvl7pPr>
+            <a:lvl8pPr marL="3200400" indent="0">
+              <a:buNone/>
+              <a:defRPr sz="1600" b="1"/>
+            </a:lvl8pPr>
+            <a:lvl9pPr marL="3657600" indent="0">
+              <a:buNone/>
+              <a:defRPr sz="1600" b="1"/>
+            </a:lvl9pPr>
+          </a:lstStyle>
+          <a:p>
+            <a:pPr lvl="0"/>
+            <a:r>
+              <a:rPr lang="en-GB"/>
+              <a:t>Click to edit Master text styles</a:t>
+            </a:r>
+          </a:p>
+        </p:txBody>
+      </p:sp>
+      <p:sp>
+        <p:nvSpPr>
+          <p:cNvPr id="20" name="Text Placeholder 3"/>
+          <p:cNvSpPr>
+            <a:spLocks noGrp="1"/>
+          </p:cNvSpPr>
+          <p:nvPr>
+            <p:ph type="body" sz="half" idx="17"/>
+          </p:nvPr>
+        </p:nvSpPr>
+        <p:spPr>
+          <a:xfrm>
+            <a:off x="7124700" y="2667000"/>
+            <a:ext cx="2932113" cy="3589338"/>
+          </a:xfrm>
+        </p:spPr>
+        <p:txBody>
+          <a:bodyPr anchor="t">
+            <a:normAutofit/>
+          </a:bodyPr>
+          <a:lstStyle>
+            <a:lvl1pPr marL="0" indent="0">
+              <a:buNone/>
+              <a:defRPr sz="1400"/>
+            </a:lvl1pPr>
+            <a:lvl2pPr marL="457200" indent="0">
+              <a:buNone/>
+              <a:defRPr sz="1200"/>
+            </a:lvl2pPr>
+            <a:lvl3pPr marL="914400" indent="0">
+              <a:buNone/>
+              <a:defRPr sz="1000"/>
+            </a:lvl3pPr>
+            <a:lvl4pPr marL="1371600" indent="0">
+              <a:buNone/>
+              <a:defRPr sz="900"/>
+            </a:lvl4pPr>
+            <a:lvl5pPr marL="1828800" indent="0">
+              <a:buNone/>
+              <a:defRPr sz="900"/>
+            </a:lvl5pPr>
+            <a:lvl6pPr marL="2286000" indent="0">
+              <a:buNone/>
+              <a:defRPr sz="900"/>
+            </a:lvl6pPr>
+            <a:lvl7pPr marL="2743200" indent="0">
+              <a:buNone/>
+              <a:defRPr sz="900"/>
+            </a:lvl7pPr>
+            <a:lvl8pPr marL="3200400" indent="0">
+              <a:buNone/>
+              <a:defRPr sz="900"/>
+            </a:lvl8pPr>
+            <a:lvl9pPr marL="3657600" indent="0">
+              <a:buNone/>
+              <a:defRPr sz="900"/>
+            </a:lvl9pPr>
+          </a:lstStyle>
+          <a:p>
+            <a:pPr lvl="0"/>
+            <a:r>
+              <a:rPr lang="en-GB"/>
+              <a:t>Click to edit Master text styles</a:t>
+            </a:r>
+          </a:p>
+        </p:txBody>
+      </p:sp>
+      <p:cxnSp>
+        <p:nvCxnSpPr>
+          <p:cNvPr id="17" name="Straight Connector 16"/>
+          <p:cNvCxnSpPr/>
+          <p:nvPr/>
+        </p:nvCxnSpPr>
+        <p:spPr>
+          <a:xfrm>
+            <a:off x="3726142" y="2133600"/>
+            <a:ext cx="0" cy="3962400"/>
+          </a:xfrm>
+          <a:prstGeom prst="line">
+            <a:avLst/>
+          </a:prstGeom>
+          <a:ln w="12700" cmpd="sng">
+            <a:solidFill>
+              <a:schemeClr val="bg2">
+                <a:lumMod val="40000"/>
+                <a:lumOff val="60000"/>
+                <a:alpha val="40000"/>
+              </a:schemeClr>
+            </a:solidFill>
+          </a:ln>
+        </p:spPr>
+        <p:style>
+          <a:lnRef idx="2">
+            <a:schemeClr val="accent1"/>
+          </a:lnRef>
+          <a:fillRef idx="0">
+            <a:schemeClr val="accent1"/>
+          </a:fillRef>
+          <a:effectRef idx="1">
+            <a:schemeClr val="accent1"/>
+          </a:effectRef>
+          <a:fontRef idx="minor">
+            <a:schemeClr val="tx1"/>
+          </a:fontRef>
+        </p:style>
+      </p:cxnSp>
+      <p:cxnSp>
+        <p:nvCxnSpPr>
+          <p:cNvPr id="18" name="Straight Connector 17"/>
+          <p:cNvCxnSpPr/>
+          <p:nvPr/>
+        </p:nvCxnSpPr>
+        <p:spPr>
+          <a:xfrm>
+            <a:off x="6962227" y="2133600"/>
+            <a:ext cx="0" cy="3966882"/>
+          </a:xfrm>
+          <a:prstGeom prst="line">
+            <a:avLst/>
+          </a:prstGeom>
+          <a:ln w="12700" cmpd="sng">
+            <a:solidFill>
+              <a:schemeClr val="bg2">
+                <a:lumMod val="40000"/>
+                <a:lumOff val="60000"/>
+                <a:alpha val="40000"/>
+              </a:schemeClr>
+            </a:solidFill>
+          </a:ln>
+        </p:spPr>
+        <p:style>
+          <a:lnRef idx="2">
+            <a:schemeClr val="accent1"/>
+          </a:lnRef>
+          <a:fillRef idx="0">
+            <a:schemeClr val="accent1"/>
+          </a:fillRef>
+          <a:effectRef idx="1">
+            <a:schemeClr val="accent1"/>
+          </a:effectRef>
+          <a:fontRef idx="minor">
+            <a:schemeClr val="tx1"/>
+          </a:fontRef>
+        </p:style>
+      </p:cxnSp>
+      <p:sp>
+        <p:nvSpPr>
+          <p:cNvPr id="7" name="Date Placeholder 3"/>
+          <p:cNvSpPr>
+            <a:spLocks noGrp="1"/>
+          </p:cNvSpPr>
+          <p:nvPr>
+            <p:ph type="dt" sz="half" idx="10"/>
+          </p:nvPr>
+        </p:nvSpPr>
+        <p:spPr/>
+        <p:txBody>
+          <a:bodyPr/>
+          <a:lstStyle/>
+          <a:p>
+            <a:fld id="{A23C7EEE-1AD9-4CFE-8AFB-1041F302144F}" type="datetimeFigureOut">
+              <a:rPr lang="en-NZ" smtClean="0"/>
+              <a:t>10/09/2026</a:t>
+            </a:fld>
+            <a:endParaRPr lang="en-NZ"/>
+          </a:p>
+        </p:txBody>
+      </p:sp>
+      <p:sp>
+        <p:nvSpPr>
+          <p:cNvPr id="4" name="Footer Placeholder 4"/>
+          <p:cNvSpPr>
+            <a:spLocks noGrp="1"/>
+          </p:cNvSpPr>
+          <p:nvPr>
+            <p:ph type="ftr" sz="quarter" idx="11"/>
+          </p:nvPr>
+        </p:nvSpPr>
+        <p:spPr/>
+        <p:txBody>
+          <a:bodyPr/>
+          <a:lstStyle/>
+          <a:p>
+            <a:endParaRPr lang="en-NZ"/>
+          </a:p>
+        </p:txBody>
+      </p:sp>
+      <p:sp>
+        <p:nvSpPr>
+          <p:cNvPr id="6" name="Slide Number Placeholder 5"/>
+          <p:cNvSpPr>
+            <a:spLocks noGrp="1"/>
+          </p:cNvSpPr>
+          <p:nvPr>
+            <p:ph type="sldNum" sz="quarter" idx="12"/>
+          </p:nvPr>
+        </p:nvSpPr>
+        <p:spPr/>
+        <p:txBody>
+          <a:bodyPr/>
+          <a:lstStyle/>
+          <a:p>
+            <a:fld id="{4AE78319-C126-4CCF-AB9F-8D6DA74409B1}" type="slidenum">
+              <a:rPr lang="en-NZ" smtClean="0"/>
+              <a:t>‹#›</a:t>
+            </a:fld>
+            <a:endParaRPr lang="en-NZ"/>
+          </a:p>
+        </p:txBody>
+      </p:sp>
+    </p:spTree>
+    <p:extLst>
+      <p:ext uri="{BB962C8B-B14F-4D97-AF65-F5344CB8AC3E}">
+        <p14:creationId xmlns:p14="http://schemas.microsoft.com/office/powerpoint/2010/main" val="485030594"/>
+      </p:ext>
+    </p:extLst>
+  </p:cSld>
+  <p:clrMapOvr>
+    <a:masterClrMapping/>
+  </p:clrMapOvr>
+</p:sldLayout>
+</file>
+
+<file path=ppt/slideLayouts/slideLayout15.xml><?xml version="1.0" encoding="utf-8"?>
+<p:sldLayout xmlns:a="http://schemas.openxmlformats.org/drawingml/2006/main" xmlns:r="http://schemas.openxmlformats.org/officeDocument/2006/relationships" xmlns:p="http://schemas.openxmlformats.org/presentationml/2006/main" preserve="1">
+  <p:cSld name="3 Picture Column">
+    <p:spTree>
+      <p:nvGrpSpPr>
+        <p:cNvPr id="1" name=""/>
+        <p:cNvGrpSpPr/>
+        <p:nvPr/>
+      </p:nvGrpSpPr>
+      <p:grpSpPr>
+        <a:xfrm>
+          <a:off x="0" y="0"/>
+          <a:ext cx="0" cy="0"/>
+          <a:chOff x="0" y="0"/>
+          <a:chExt cx="0" cy="0"/>
+        </a:xfrm>
+      </p:grpSpPr>
+      <p:sp>
+        <p:nvSpPr>
+          <p:cNvPr id="2" name="Title 1"/>
+          <p:cNvSpPr>
+            <a:spLocks noGrp="1"/>
+          </p:cNvSpPr>
+          <p:nvPr>
+            <p:ph type="title"/>
+          </p:nvPr>
+        </p:nvSpPr>
+        <p:spPr/>
+        <p:txBody>
+          <a:bodyPr/>
+          <a:lstStyle>
+            <a:lvl1pPr>
+              <a:defRPr sz="4200"/>
+            </a:lvl1pPr>
+          </a:lstStyle>
+          <a:p>
+            <a:r>
+              <a:rPr lang="en-GB"/>
+              <a:t>Click to edit Master title style</a:t>
+            </a:r>
+            <a:endParaRPr lang="en-US" dirty="0"/>
+          </a:p>
+        </p:txBody>
+      </p:sp>
+      <p:sp>
+        <p:nvSpPr>
+          <p:cNvPr id="3" name="Text Placeholder 2"/>
+          <p:cNvSpPr>
+            <a:spLocks noGrp="1"/>
+          </p:cNvSpPr>
+          <p:nvPr>
+            <p:ph type="body" idx="1"/>
+          </p:nvPr>
+        </p:nvSpPr>
+        <p:spPr>
+          <a:xfrm>
+            <a:off x="652463" y="4250949"/>
+            <a:ext cx="2940050" cy="576262"/>
+          </a:xfrm>
+        </p:spPr>
+        <p:txBody>
+          <a:bodyPr anchor="b">
+            <a:noAutofit/>
+          </a:bodyPr>
+          <a:lstStyle>
+            <a:lvl1pPr marL="0" indent="0">
+              <a:buNone/>
+              <a:defRPr sz="2400" b="0">
+                <a:solidFill>
+                  <a:schemeClr val="bg2">
+                    <a:lumMod val="40000"/>
+                    <a:lumOff val="60000"/>
+                  </a:schemeClr>
+                </a:solidFill>
+              </a:defRPr>
+            </a:lvl1pPr>
+            <a:lvl2pPr marL="457200" indent="0">
+              <a:buNone/>
+              <a:defRPr sz="2000" b="1"/>
+            </a:lvl2pPr>
+            <a:lvl3pPr marL="914400" indent="0">
+              <a:buNone/>
+              <a:defRPr sz="1800" b="1"/>
+            </a:lvl3pPr>
+            <a:lvl4pPr marL="1371600" indent="0">
+              <a:buNone/>
+              <a:defRPr sz="1600" b="1"/>
+            </a:lvl4pPr>
+            <a:lvl5pPr marL="1828800" indent="0">
+              <a:buNone/>
+              <a:defRPr sz="1600" b="1"/>
+            </a:lvl5pPr>
+            <a:lvl6pPr marL="2286000" indent="0">
+              <a:buNone/>
+              <a:defRPr sz="1600" b="1"/>
+            </a:lvl6pPr>
+            <a:lvl7pPr marL="2743200" indent="0">
+              <a:buNone/>
+              <a:defRPr sz="1600" b="1"/>
+            </a:lvl7pPr>
+            <a:lvl8pPr marL="3200400" indent="0">
+              <a:buNone/>
+              <a:defRPr sz="1600" b="1"/>
+            </a:lvl8pPr>
+            <a:lvl9pPr marL="3657600" indent="0">
+              <a:buNone/>
+              <a:defRPr sz="1600" b="1"/>
+            </a:lvl9pPr>
+          </a:lstStyle>
+          <a:p>
+            <a:pPr lvl="0"/>
+            <a:r>
+              <a:rPr lang="en-GB"/>
+              <a:t>Click to edit Master text styles</a:t>
+            </a:r>
+          </a:p>
+        </p:txBody>
+      </p:sp>
+      <p:sp>
+        <p:nvSpPr>
+          <p:cNvPr id="29" name="Picture Placeholder 2"/>
+          <p:cNvSpPr>
+            <a:spLocks noGrp="1" noChangeAspect="1"/>
+          </p:cNvSpPr>
+          <p:nvPr>
+            <p:ph type="pic" idx="15"/>
+          </p:nvPr>
+        </p:nvSpPr>
+        <p:spPr>
+          <a:xfrm>
+            <a:off x="652463" y="2209800"/>
+            <a:ext cx="2940050" cy="1524000"/>
+          </a:xfrm>
+          <a:prstGeom prst="roundRect">
+            <a:avLst>
+              <a:gd name="adj" fmla="val 1858"/>
+            </a:avLst>
+          </a:prstGeom>
+          <a:effectLst>
+            <a:outerShdw blurRad="50800" dist="50800" dir="5400000" algn="tl" rotWithShape="0">
+              <a:srgbClr val="000000">
+                <a:alpha val="43000"/>
+              </a:srgbClr>
+            </a:outerShdw>
+          </a:effectLst>
+        </p:spPr>
+        <p:txBody>
+          <a:bodyPr anchor="t">
+            <a:normAutofit/>
+          </a:bodyPr>
+          <a:lstStyle>
+            <a:lvl1pPr marL="0" indent="0" algn="ctr">
+              <a:buNone/>
+              <a:defRPr sz="1600"/>
+            </a:lvl1pPr>
+            <a:lvl2pPr marL="457200" indent="0">
+              <a:buNone/>
+              <a:defRPr sz="1600"/>
+            </a:lvl2pPr>
+            <a:lvl3pPr marL="914400" indent="0">
+              <a:buNone/>
+              <a:defRPr sz="1600"/>
+            </a:lvl3pPr>
+            <a:lvl4pPr marL="1371600" indent="0">
+              <a:buNone/>
+              <a:defRPr sz="1600"/>
+            </a:lvl4pPr>
+            <a:lvl5pPr marL="1828800" indent="0">
+              <a:buNone/>
+              <a:defRPr sz="1600"/>
+            </a:lvl5pPr>
+            <a:lvl6pPr marL="2286000" indent="0">
+              <a:buNone/>
+              <a:defRPr sz="1600"/>
+            </a:lvl6pPr>
+            <a:lvl7pPr marL="2743200" indent="0">
+              <a:buNone/>
+              <a:defRPr sz="1600"/>
+            </a:lvl7pPr>
+            <a:lvl8pPr marL="3200400" indent="0">
+              <a:buNone/>
+              <a:defRPr sz="1600"/>
+            </a:lvl8pPr>
+            <a:lvl9pPr marL="3657600" indent="0">
+              <a:buNone/>
+              <a:defRPr sz="1600"/>
+            </a:lvl9pPr>
+          </a:lstStyle>
+          <a:p>
+            <a:r>
+              <a:rPr lang="en-GB"/>
+              <a:t>Click icon to add picture</a:t>
+            </a:r>
+            <a:endParaRPr lang="en-US" dirty="0"/>
+          </a:p>
+        </p:txBody>
+      </p:sp>
+      <p:sp>
+        <p:nvSpPr>
+          <p:cNvPr id="22" name="Text Placeholder 3"/>
+          <p:cNvSpPr>
+            <a:spLocks noGrp="1"/>
+          </p:cNvSpPr>
+          <p:nvPr>
+            <p:ph type="body" sz="half" idx="18"/>
+          </p:nvPr>
+        </p:nvSpPr>
+        <p:spPr>
+          <a:xfrm>
+            <a:off x="652463" y="4827211"/>
+            <a:ext cx="2940050" cy="659189"/>
+          </a:xfrm>
+        </p:spPr>
+        <p:txBody>
+          <a:bodyPr anchor="t">
+            <a:normAutofit/>
+          </a:bodyPr>
+          <a:lstStyle>
+            <a:lvl1pPr marL="0" indent="0">
+              <a:buNone/>
+              <a:defRPr sz="1400"/>
+            </a:lvl1pPr>
+            <a:lvl2pPr marL="457200" indent="0">
+              <a:buNone/>
+              <a:defRPr sz="1200"/>
+            </a:lvl2pPr>
+            <a:lvl3pPr marL="914400" indent="0">
+              <a:buNone/>
+              <a:defRPr sz="1000"/>
+            </a:lvl3pPr>
+            <a:lvl4pPr marL="1371600" indent="0">
+              <a:buNone/>
+              <a:defRPr sz="900"/>
+            </a:lvl4pPr>
+            <a:lvl5pPr marL="1828800" indent="0">
+              <a:buNone/>
+              <a:defRPr sz="900"/>
+            </a:lvl5pPr>
+            <a:lvl6pPr marL="2286000" indent="0">
+              <a:buNone/>
+              <a:defRPr sz="900"/>
+            </a:lvl6pPr>
+            <a:lvl7pPr marL="2743200" indent="0">
+              <a:buNone/>
+              <a:defRPr sz="900"/>
+            </a:lvl7pPr>
+            <a:lvl8pPr marL="3200400" indent="0">
+              <a:buNone/>
+              <a:defRPr sz="900"/>
+            </a:lvl8pPr>
+            <a:lvl9pPr marL="3657600" indent="0">
+              <a:buNone/>
+              <a:defRPr sz="900"/>
+            </a:lvl9pPr>
+          </a:lstStyle>
+          <a:p>
+            <a:pPr lvl="0"/>
+            <a:r>
+              <a:rPr lang="en-GB"/>
+              <a:t>Click to edit Master text styles</a:t>
+            </a:r>
+          </a:p>
+        </p:txBody>
+      </p:sp>
+      <p:sp>
+        <p:nvSpPr>
+          <p:cNvPr id="5" name="Text Placeholder 4"/>
+          <p:cNvSpPr>
+            <a:spLocks noGrp="1"/>
+          </p:cNvSpPr>
+          <p:nvPr>
+            <p:ph type="body" sz="quarter" idx="3"/>
+          </p:nvPr>
+        </p:nvSpPr>
+        <p:spPr>
+          <a:xfrm>
+            <a:off x="3889375" y="4250949"/>
+            <a:ext cx="2930525" cy="576262"/>
+          </a:xfrm>
+        </p:spPr>
+        <p:txBody>
+          <a:bodyPr anchor="b">
+            <a:noAutofit/>
+          </a:bodyPr>
+          <a:lstStyle>
+            <a:lvl1pPr marL="0" indent="0">
+              <a:buNone/>
+              <a:defRPr sz="2400" b="0">
+                <a:solidFill>
+                  <a:schemeClr val="bg2">
+                    <a:lumMod val="40000"/>
+                    <a:lumOff val="60000"/>
+                  </a:schemeClr>
+                </a:solidFill>
+              </a:defRPr>
+            </a:lvl1pPr>
+            <a:lvl2pPr marL="457200" indent="0">
+              <a:buNone/>
+              <a:defRPr sz="2000" b="1"/>
+            </a:lvl2pPr>
+            <a:lvl3pPr marL="914400" indent="0">
+              <a:buNone/>
+              <a:defRPr sz="1800" b="1"/>
+            </a:lvl3pPr>
+            <a:lvl4pPr marL="1371600" indent="0">
+              <a:buNone/>
+              <a:defRPr sz="1600" b="1"/>
+            </a:lvl4pPr>
+            <a:lvl5pPr marL="1828800" indent="0">
+              <a:buNone/>
+              <a:defRPr sz="1600" b="1"/>
+            </a:lvl5pPr>
+            <a:lvl6pPr marL="2286000" indent="0">
+              <a:buNone/>
+              <a:defRPr sz="1600" b="1"/>
+            </a:lvl6pPr>
+            <a:lvl7pPr marL="2743200" indent="0">
+              <a:buNone/>
+              <a:defRPr sz="1600" b="1"/>
+            </a:lvl7pPr>
+            <a:lvl8pPr marL="3200400" indent="0">
+              <a:buNone/>
+              <a:defRPr sz="1600" b="1"/>
+            </a:lvl8pPr>
+            <a:lvl9pPr marL="3657600" indent="0">
+              <a:buNone/>
+              <a:defRPr sz="1600" b="1"/>
+            </a:lvl9pPr>
+          </a:lstStyle>
+          <a:p>
+            <a:pPr lvl="0"/>
+            <a:r>
+              <a:rPr lang="en-GB"/>
+              <a:t>Click to edit Master text styles</a:t>
+            </a:r>
+          </a:p>
+        </p:txBody>
+      </p:sp>
+      <p:sp>
+        <p:nvSpPr>
+          <p:cNvPr id="30" name="Picture Placeholder 2"/>
+          <p:cNvSpPr>
+            <a:spLocks noGrp="1" noChangeAspect="1"/>
+          </p:cNvSpPr>
+          <p:nvPr>
+            <p:ph type="pic" idx="21"/>
+          </p:nvPr>
+        </p:nvSpPr>
+        <p:spPr>
+          <a:xfrm>
+            <a:off x="3889374" y="2209800"/>
+            <a:ext cx="2930525" cy="1524000"/>
+          </a:xfrm>
+          <a:prstGeom prst="roundRect">
+            <a:avLst>
+              <a:gd name="adj" fmla="val 1858"/>
+            </a:avLst>
+          </a:prstGeom>
+          <a:effectLst>
+            <a:outerShdw blurRad="50800" dist="50800" dir="5400000" algn="tl" rotWithShape="0">
+              <a:srgbClr val="000000">
+                <a:alpha val="43000"/>
+              </a:srgbClr>
+            </a:outerShdw>
+          </a:effectLst>
+        </p:spPr>
+        <p:txBody>
+          <a:bodyPr anchor="t">
+            <a:normAutofit/>
+          </a:bodyPr>
+          <a:lstStyle>
+            <a:lvl1pPr marL="0" indent="0" algn="ctr">
+              <a:buNone/>
+              <a:defRPr sz="1600"/>
+            </a:lvl1pPr>
+            <a:lvl2pPr marL="457200" indent="0">
+              <a:buNone/>
+              <a:defRPr sz="1600"/>
+            </a:lvl2pPr>
+            <a:lvl3pPr marL="914400" indent="0">
+              <a:buNone/>
+              <a:defRPr sz="1600"/>
+            </a:lvl3pPr>
+            <a:lvl4pPr marL="1371600" indent="0">
+              <a:buNone/>
+              <a:defRPr sz="1600"/>
+            </a:lvl4pPr>
+            <a:lvl5pPr marL="1828800" indent="0">
+              <a:buNone/>
+              <a:defRPr sz="1600"/>
+            </a:lvl5pPr>
+            <a:lvl6pPr marL="2286000" indent="0">
+              <a:buNone/>
+              <a:defRPr sz="1600"/>
+            </a:lvl6pPr>
+            <a:lvl7pPr marL="2743200" indent="0">
+              <a:buNone/>
+              <a:defRPr sz="1600"/>
+            </a:lvl7pPr>
+            <a:lvl8pPr marL="3200400" indent="0">
+              <a:buNone/>
+              <a:defRPr sz="1600"/>
+            </a:lvl8pPr>
+            <a:lvl9pPr marL="3657600" indent="0">
+              <a:buNone/>
+              <a:defRPr sz="1600"/>
+            </a:lvl9pPr>
+          </a:lstStyle>
+          <a:p>
+            <a:r>
+              <a:rPr lang="en-GB"/>
+              <a:t>Click icon to add picture</a:t>
+            </a:r>
+            <a:endParaRPr lang="en-US" dirty="0"/>
+          </a:p>
+        </p:txBody>
+      </p:sp>
+      <p:sp>
+        <p:nvSpPr>
+          <p:cNvPr id="23" name="Text Placeholder 3"/>
+          <p:cNvSpPr>
+            <a:spLocks noGrp="1"/>
+          </p:cNvSpPr>
+          <p:nvPr>
+            <p:ph type="body" sz="half" idx="19"/>
+          </p:nvPr>
+        </p:nvSpPr>
+        <p:spPr>
+          <a:xfrm>
+            <a:off x="3888022" y="4827210"/>
+            <a:ext cx="2934406" cy="659189"/>
+          </a:xfrm>
+        </p:spPr>
+        <p:txBody>
+          <a:bodyPr anchor="t">
+            <a:normAutofit/>
+          </a:bodyPr>
+          <a:lstStyle>
+            <a:lvl1pPr marL="0" indent="0">
+              <a:buNone/>
+              <a:defRPr sz="1400"/>
+            </a:lvl1pPr>
+            <a:lvl2pPr marL="457200" indent="0">
+              <a:buNone/>
+              <a:defRPr sz="1200"/>
+            </a:lvl2pPr>
+            <a:lvl3pPr marL="914400" indent="0">
+              <a:buNone/>
+              <a:defRPr sz="1000"/>
+            </a:lvl3pPr>
+            <a:lvl4pPr marL="1371600" indent="0">
+              <a:buNone/>
+              <a:defRPr sz="900"/>
+            </a:lvl4pPr>
+            <a:lvl5pPr marL="1828800" indent="0">
+              <a:buNone/>
+              <a:defRPr sz="900"/>
+            </a:lvl5pPr>
+            <a:lvl6pPr marL="2286000" indent="0">
+              <a:buNone/>
+              <a:defRPr sz="900"/>
+            </a:lvl6pPr>
+            <a:lvl7pPr marL="2743200" indent="0">
+              <a:buNone/>
+              <a:defRPr sz="900"/>
+            </a:lvl7pPr>
+            <a:lvl8pPr marL="3200400" indent="0">
+              <a:buNone/>
+              <a:defRPr sz="900"/>
+            </a:lvl8pPr>
+            <a:lvl9pPr marL="3657600" indent="0">
+              <a:buNone/>
+              <a:defRPr sz="900"/>
+            </a:lvl9pPr>
+          </a:lstStyle>
+          <a:p>
+            <a:pPr lvl="0"/>
+            <a:r>
+              <a:rPr lang="en-GB"/>
+              <a:t>Click to edit Master text styles</a:t>
+            </a:r>
+          </a:p>
+        </p:txBody>
+      </p:sp>
+      <p:sp>
+        <p:nvSpPr>
+          <p:cNvPr id="14" name="Text Placeholder 4"/>
+          <p:cNvSpPr>
+            <a:spLocks noGrp="1"/>
+          </p:cNvSpPr>
+          <p:nvPr>
+            <p:ph type="body" sz="quarter" idx="13"/>
+          </p:nvPr>
+        </p:nvSpPr>
+        <p:spPr>
+          <a:xfrm>
+            <a:off x="7124700" y="4250949"/>
+            <a:ext cx="2932113" cy="576262"/>
+          </a:xfrm>
+        </p:spPr>
+        <p:txBody>
+          <a:bodyPr anchor="b">
+            <a:noAutofit/>
+          </a:bodyPr>
+          <a:lstStyle>
+            <a:lvl1pPr marL="0" indent="0">
+              <a:buNone/>
+              <a:defRPr sz="2400" b="0">
+                <a:solidFill>
+                  <a:schemeClr val="bg2">
+                    <a:lumMod val="40000"/>
+                    <a:lumOff val="60000"/>
+                  </a:schemeClr>
+                </a:solidFill>
+              </a:defRPr>
+            </a:lvl1pPr>
+            <a:lvl2pPr marL="457200" indent="0">
+              <a:buNone/>
+              <a:defRPr sz="2000" b="1"/>
+            </a:lvl2pPr>
+            <a:lvl3pPr marL="914400" indent="0">
+              <a:buNone/>
+              <a:defRPr sz="1800" b="1"/>
+            </a:lvl3pPr>
+            <a:lvl4pPr marL="1371600" indent="0">
+              <a:buNone/>
+              <a:defRPr sz="1600" b="1"/>
+            </a:lvl4pPr>
+            <a:lvl5pPr marL="1828800" indent="0">
+              <a:buNone/>
+              <a:defRPr sz="1600" b="1"/>
+            </a:lvl5pPr>
+            <a:lvl6pPr marL="2286000" indent="0">
+              <a:buNone/>
+              <a:defRPr sz="1600" b="1"/>
+            </a:lvl6pPr>
+            <a:lvl7pPr marL="2743200" indent="0">
+              <a:buNone/>
+              <a:defRPr sz="1600" b="1"/>
+            </a:lvl7pPr>
+            <a:lvl8pPr marL="3200400" indent="0">
+              <a:buNone/>
+              <a:defRPr sz="1600" b="1"/>
+            </a:lvl8pPr>
+            <a:lvl9pPr marL="3657600" indent="0">
+              <a:buNone/>
+              <a:defRPr sz="1600" b="1"/>
+            </a:lvl9pPr>
+          </a:lstStyle>
+          <a:p>
+            <a:pPr lvl="0"/>
+            <a:r>
+              <a:rPr lang="en-GB"/>
+              <a:t>Click to edit Master text styles</a:t>
+            </a:r>
+          </a:p>
+        </p:txBody>
+      </p:sp>
+      <p:sp>
+        <p:nvSpPr>
+          <p:cNvPr id="31" name="Picture Placeholder 2"/>
+          <p:cNvSpPr>
+            <a:spLocks noGrp="1" noChangeAspect="1"/>
+          </p:cNvSpPr>
+          <p:nvPr>
+            <p:ph type="pic" idx="22"/>
+          </p:nvPr>
+        </p:nvSpPr>
+        <p:spPr>
+          <a:xfrm>
+            <a:off x="7124699" y="2209800"/>
+            <a:ext cx="2932113" cy="1524000"/>
+          </a:xfrm>
+          <a:prstGeom prst="roundRect">
+            <a:avLst>
+              <a:gd name="adj" fmla="val 1858"/>
+            </a:avLst>
+          </a:prstGeom>
+          <a:effectLst>
+            <a:outerShdw blurRad="50800" dist="50800" dir="5400000" algn="tl" rotWithShape="0">
+              <a:srgbClr val="000000">
+                <a:alpha val="43000"/>
+              </a:srgbClr>
+            </a:outerShdw>
+          </a:effectLst>
+        </p:spPr>
+        <p:txBody>
+          <a:bodyPr anchor="t">
+            <a:normAutofit/>
+          </a:bodyPr>
+          <a:lstStyle>
+            <a:lvl1pPr marL="0" indent="0" algn="ctr">
+              <a:buNone/>
+              <a:defRPr sz="1600"/>
+            </a:lvl1pPr>
+            <a:lvl2pPr marL="457200" indent="0">
+              <a:buNone/>
+              <a:defRPr sz="1600"/>
+            </a:lvl2pPr>
+            <a:lvl3pPr marL="914400" indent="0">
+              <a:buNone/>
+              <a:defRPr sz="1600"/>
+            </a:lvl3pPr>
+            <a:lvl4pPr marL="1371600" indent="0">
+              <a:buNone/>
+              <a:defRPr sz="1600"/>
+            </a:lvl4pPr>
+            <a:lvl5pPr marL="1828800" indent="0">
+              <a:buNone/>
+              <a:defRPr sz="1600"/>
+            </a:lvl5pPr>
+            <a:lvl6pPr marL="2286000" indent="0">
+              <a:buNone/>
+              <a:defRPr sz="1600"/>
+            </a:lvl6pPr>
+            <a:lvl7pPr marL="2743200" indent="0">
+              <a:buNone/>
+              <a:defRPr sz="1600"/>
+            </a:lvl7pPr>
+            <a:lvl8pPr marL="3200400" indent="0">
+              <a:buNone/>
+              <a:defRPr sz="1600"/>
+            </a:lvl8pPr>
+            <a:lvl9pPr marL="3657600" indent="0">
+              <a:buNone/>
+              <a:defRPr sz="1600"/>
+            </a:lvl9pPr>
+          </a:lstStyle>
+          <a:p>
+            <a:r>
+              <a:rPr lang="en-GB"/>
+              <a:t>Click icon to add picture</a:t>
+            </a:r>
+            <a:endParaRPr lang="en-US" dirty="0"/>
+          </a:p>
+        </p:txBody>
+      </p:sp>
+      <p:sp>
+        <p:nvSpPr>
+          <p:cNvPr id="24" name="Text Placeholder 3"/>
+          <p:cNvSpPr>
+            <a:spLocks noGrp="1"/>
+          </p:cNvSpPr>
+          <p:nvPr>
+            <p:ph type="body" sz="half" idx="20"/>
+          </p:nvPr>
+        </p:nvSpPr>
+        <p:spPr>
+          <a:xfrm>
+            <a:off x="7124575" y="4827208"/>
+            <a:ext cx="2935997" cy="659189"/>
+          </a:xfrm>
+        </p:spPr>
+        <p:txBody>
+          <a:bodyPr anchor="t">
+            <a:normAutofit/>
+          </a:bodyPr>
+          <a:lstStyle>
+            <a:lvl1pPr marL="0" indent="0">
+              <a:buNone/>
+              <a:defRPr sz="1400"/>
+            </a:lvl1pPr>
+            <a:lvl2pPr marL="457200" indent="0">
+              <a:buNone/>
+              <a:defRPr sz="1200"/>
+            </a:lvl2pPr>
+            <a:lvl3pPr marL="914400" indent="0">
+              <a:buNone/>
+              <a:defRPr sz="1000"/>
+            </a:lvl3pPr>
+            <a:lvl4pPr marL="1371600" indent="0">
+              <a:buNone/>
+              <a:defRPr sz="900"/>
+            </a:lvl4pPr>
+            <a:lvl5pPr marL="1828800" indent="0">
+              <a:buNone/>
+              <a:defRPr sz="900"/>
+            </a:lvl5pPr>
+            <a:lvl6pPr marL="2286000" indent="0">
+              <a:buNone/>
+              <a:defRPr sz="900"/>
+            </a:lvl6pPr>
+            <a:lvl7pPr marL="2743200" indent="0">
+              <a:buNone/>
+              <a:defRPr sz="900"/>
+            </a:lvl7pPr>
+            <a:lvl8pPr marL="3200400" indent="0">
+              <a:buNone/>
+              <a:defRPr sz="900"/>
+            </a:lvl8pPr>
+            <a:lvl9pPr marL="3657600" indent="0">
+              <a:buNone/>
+              <a:defRPr sz="900"/>
+            </a:lvl9pPr>
+          </a:lstStyle>
+          <a:p>
+            <a:pPr lvl="0"/>
+            <a:r>
+              <a:rPr lang="en-GB"/>
+              <a:t>Click to edit Master text styles</a:t>
+            </a:r>
+          </a:p>
+        </p:txBody>
+      </p:sp>
+      <p:cxnSp>
+        <p:nvCxnSpPr>
+          <p:cNvPr id="19" name="Straight Connector 18"/>
+          <p:cNvCxnSpPr/>
+          <p:nvPr/>
+        </p:nvCxnSpPr>
+        <p:spPr>
+          <a:xfrm>
+            <a:off x="3726142" y="2133600"/>
+            <a:ext cx="0" cy="3962400"/>
+          </a:xfrm>
+          <a:prstGeom prst="line">
+            <a:avLst/>
+          </a:prstGeom>
+          <a:ln w="12700" cmpd="sng">
+            <a:solidFill>
+              <a:schemeClr val="bg2">
+                <a:lumMod val="40000"/>
+                <a:lumOff val="60000"/>
+                <a:alpha val="40000"/>
+              </a:schemeClr>
+            </a:solidFill>
+          </a:ln>
+        </p:spPr>
+        <p:style>
+          <a:lnRef idx="2">
+            <a:schemeClr val="accent1"/>
+          </a:lnRef>
+          <a:fillRef idx="0">
+            <a:schemeClr val="accent1"/>
+          </a:fillRef>
+          <a:effectRef idx="1">
+            <a:schemeClr val="accent1"/>
+          </a:effectRef>
+          <a:fontRef idx="minor">
+            <a:schemeClr val="tx1"/>
+          </a:fontRef>
+        </p:style>
+      </p:cxnSp>
+      <p:cxnSp>
+        <p:nvCxnSpPr>
+          <p:cNvPr id="20" name="Straight Connector 19"/>
+          <p:cNvCxnSpPr/>
+          <p:nvPr/>
+        </p:nvCxnSpPr>
+        <p:spPr>
+          <a:xfrm>
+            <a:off x="6962227" y="2133600"/>
+            <a:ext cx="0" cy="3966882"/>
+          </a:xfrm>
+          <a:prstGeom prst="line">
+            <a:avLst/>
+          </a:prstGeom>
+          <a:ln w="12700" cmpd="sng">
+            <a:solidFill>
+              <a:schemeClr val="bg2">
+                <a:lumMod val="40000"/>
+                <a:lumOff val="60000"/>
+                <a:alpha val="40000"/>
+              </a:schemeClr>
+            </a:solidFill>
+          </a:ln>
+        </p:spPr>
+        <p:style>
+          <a:lnRef idx="2">
+            <a:schemeClr val="accent1"/>
+          </a:lnRef>
+          <a:fillRef idx="0">
+            <a:schemeClr val="accent1"/>
+          </a:fillRef>
+          <a:effectRef idx="1">
+            <a:schemeClr val="accent1"/>
+          </a:effectRef>
+          <a:fontRef idx="minor">
+            <a:schemeClr val="tx1"/>
+          </a:fontRef>
+        </p:style>
+      </p:cxnSp>
+      <p:sp>
+        <p:nvSpPr>
+          <p:cNvPr id="7" name="Date Placeholder 3"/>
+          <p:cNvSpPr>
+            <a:spLocks noGrp="1"/>
+          </p:cNvSpPr>
+          <p:nvPr>
+            <p:ph type="dt" sz="half" idx="10"/>
+          </p:nvPr>
+        </p:nvSpPr>
+        <p:spPr/>
+        <p:txBody>
+          <a:bodyPr/>
+          <a:lstStyle/>
+          <a:p>
+            <a:fld id="{A23C7EEE-1AD9-4CFE-8AFB-1041F302144F}" type="datetimeFigureOut">
+              <a:rPr lang="en-NZ" smtClean="0"/>
+              <a:t>10/09/2026</a:t>
+            </a:fld>
+            <a:endParaRPr lang="en-NZ"/>
+          </a:p>
+        </p:txBody>
+      </p:sp>
+      <p:sp>
+        <p:nvSpPr>
+          <p:cNvPr id="4" name="Footer Placeholder 4"/>
+          <p:cNvSpPr>
+            <a:spLocks noGrp="1"/>
+          </p:cNvSpPr>
+          <p:nvPr>
+            <p:ph type="ftr" sz="quarter" idx="11"/>
+          </p:nvPr>
+        </p:nvSpPr>
+        <p:spPr/>
+        <p:txBody>
+          <a:bodyPr/>
+          <a:lstStyle/>
+          <a:p>
+            <a:endParaRPr lang="en-NZ"/>
+          </a:p>
+        </p:txBody>
+      </p:sp>
+      <p:sp>
+        <p:nvSpPr>
+          <p:cNvPr id="6" name="Slide Number Placeholder 5"/>
+          <p:cNvSpPr>
+            <a:spLocks noGrp="1"/>
+          </p:cNvSpPr>
+          <p:nvPr>
+            <p:ph type="sldNum" sz="quarter" idx="12"/>
+          </p:nvPr>
+        </p:nvSpPr>
+        <p:spPr/>
+        <p:txBody>
+          <a:bodyPr/>
+          <a:lstStyle/>
+          <a:p>
+            <a:fld id="{4AE78319-C126-4CCF-AB9F-8D6DA74409B1}" type="slidenum">
+              <a:rPr lang="en-NZ" smtClean="0"/>
+              <a:t>‹#›</a:t>
+            </a:fld>
+            <a:endParaRPr lang="en-NZ"/>
+          </a:p>
+        </p:txBody>
+      </p:sp>
+    </p:spTree>
+    <p:extLst>
+      <p:ext uri="{BB962C8B-B14F-4D97-AF65-F5344CB8AC3E}">
+        <p14:creationId xmlns:p14="http://schemas.microsoft.com/office/powerpoint/2010/main" val="596545729"/>
+      </p:ext>
+    </p:extLst>
+  </p:cSld>
+  <p:clrMapOvr>
+    <a:masterClrMapping/>
+  </p:clrMapOvr>
+</p:sldLayout>
+</file>
+
+<file path=ppt/slideLayouts/slideLayout16.xml><?xml version="1.0" encoding="utf-8"?>
 <p:sldLayout xmlns:a="http://schemas.openxmlformats.org/drawingml/2006/main" xmlns:r="http://schemas.openxmlformats.org/officeDocument/2006/relationships" xmlns:p="http://schemas.openxmlformats.org/presentationml/2006/main" type="vertTx" preserve="1">
   <p:cSld name="Title and Vertical Text">
     <p:spTree>
@@ -493,13 +3269,7 @@
       </p:grpSpPr>
       <p:sp>
         <p:nvSpPr>
-          <p:cNvPr id="2" name="Title 1">
-            <a:extLst>
-              <a:ext uri="{FF2B5EF4-FFF2-40B4-BE49-F238E27FC236}">
-                <a16:creationId xmlns:a16="http://schemas.microsoft.com/office/drawing/2014/main" id="{8D8FD204-371F-5421-4266-F54150DDF082}"/>
-              </a:ext>
-            </a:extLst>
-          </p:cNvPr>
+          <p:cNvPr id="2" name="Title 1"/>
           <p:cNvSpPr>
             <a:spLocks noGrp="1"/>
           </p:cNvSpPr>
@@ -516,19 +3286,13 @@
               <a:rPr lang="en-GB"/>
               <a:t>Click to edit Master title style</a:t>
             </a:r>
-            <a:endParaRPr lang="en-NZ"/>
-          </a:p>
-        </p:txBody>
-      </p:sp>
-      <p:sp>
-        <p:nvSpPr>
-          <p:cNvPr id="3" name="Vertical Text Placeholder 2">
-            <a:extLst>
-              <a:ext uri="{FF2B5EF4-FFF2-40B4-BE49-F238E27FC236}">
-                <a16:creationId xmlns:a16="http://schemas.microsoft.com/office/drawing/2014/main" id="{1CDC5EB8-6B60-D74F-12E2-A5D2933D21E4}"/>
-              </a:ext>
-            </a:extLst>
-          </p:cNvPr>
+            <a:endParaRPr lang="en-US" dirty="0"/>
+          </a:p>
+        </p:txBody>
+      </p:sp>
+      <p:sp>
+        <p:nvSpPr>
+          <p:cNvPr id="3" name="Vertical Text Placeholder 2"/>
           <p:cNvSpPr>
             <a:spLocks noGrp="1"/>
           </p:cNvSpPr>
@@ -538,7 +3302,7 @@
         </p:nvSpPr>
         <p:spPr/>
         <p:txBody>
-          <a:bodyPr vert="eaVert"/>
+          <a:bodyPr vert="eaVert" anchor="t" anchorCtr="0"/>
           <a:lstStyle/>
           <a:p>
             <a:pPr lvl="0"/>
@@ -574,19 +3338,13 @@
               <a:rPr lang="en-GB"/>
               <a:t>Fifth level</a:t>
             </a:r>
-            <a:endParaRPr lang="en-NZ"/>
-          </a:p>
-        </p:txBody>
-      </p:sp>
-      <p:sp>
-        <p:nvSpPr>
-          <p:cNvPr id="4" name="Date Placeholder 3">
-            <a:extLst>
-              <a:ext uri="{FF2B5EF4-FFF2-40B4-BE49-F238E27FC236}">
-                <a16:creationId xmlns:a16="http://schemas.microsoft.com/office/drawing/2014/main" id="{E4F6648F-DCE9-CCFD-217A-3B9468C007B4}"/>
-              </a:ext>
-            </a:extLst>
-          </p:cNvPr>
+            <a:endParaRPr lang="en-US" dirty="0"/>
+          </a:p>
+        </p:txBody>
+      </p:sp>
+      <p:sp>
+        <p:nvSpPr>
+          <p:cNvPr id="4" name="Date Placeholder 3"/>
           <p:cNvSpPr>
             <a:spLocks noGrp="1"/>
           </p:cNvSpPr>
@@ -601,7 +3359,7 @@
           <a:p>
             <a:fld id="{A23C7EEE-1AD9-4CFE-8AFB-1041F302144F}" type="datetimeFigureOut">
               <a:rPr lang="en-NZ" smtClean="0"/>
-              <a:t>8/09/2026</a:t>
+              <a:t>10/09/2026</a:t>
             </a:fld>
             <a:endParaRPr lang="en-NZ"/>
           </a:p>
@@ -609,13 +3367,7 @@
       </p:sp>
       <p:sp>
         <p:nvSpPr>
-          <p:cNvPr id="5" name="Footer Placeholder 4">
-            <a:extLst>
-              <a:ext uri="{FF2B5EF4-FFF2-40B4-BE49-F238E27FC236}">
-                <a16:creationId xmlns:a16="http://schemas.microsoft.com/office/drawing/2014/main" id="{3CFCAB16-067A-30BE-F2C3-EB40E2BCDE96}"/>
-              </a:ext>
-            </a:extLst>
-          </p:cNvPr>
+          <p:cNvPr id="5" name="Footer Placeholder 4"/>
           <p:cNvSpPr>
             <a:spLocks noGrp="1"/>
           </p:cNvSpPr>
@@ -634,13 +3386,7 @@
       </p:sp>
       <p:sp>
         <p:nvSpPr>
-          <p:cNvPr id="6" name="Slide Number Placeholder 5">
-            <a:extLst>
-              <a:ext uri="{FF2B5EF4-FFF2-40B4-BE49-F238E27FC236}">
-                <a16:creationId xmlns:a16="http://schemas.microsoft.com/office/drawing/2014/main" id="{E005AC8C-E3C9-2D53-654E-43211B34E94D}"/>
-              </a:ext>
-            </a:extLst>
-          </p:cNvPr>
+          <p:cNvPr id="6" name="Slide Number Placeholder 5"/>
           <p:cNvSpPr>
             <a:spLocks noGrp="1"/>
           </p:cNvSpPr>
@@ -664,7 +3410,7 @@
     </p:spTree>
     <p:extLst>
       <p:ext uri="{BB962C8B-B14F-4D97-AF65-F5344CB8AC3E}">
-        <p14:creationId xmlns:p14="http://schemas.microsoft.com/office/powerpoint/2010/main" val="2434380845"/>
+        <p14:creationId xmlns:p14="http://schemas.microsoft.com/office/powerpoint/2010/main" val="329272005"/>
       </p:ext>
     </p:extLst>
   </p:cSld>
@@ -674,7 +3420,7 @@
 </p:sldLayout>
 </file>
 
-<file path=ppt/slideLayouts/slideLayout11.xml><?xml version="1.0" encoding="utf-8"?>
+<file path=ppt/slideLayouts/slideLayout17.xml><?xml version="1.0" encoding="utf-8"?>
 <p:sldLayout xmlns:a="http://schemas.openxmlformats.org/drawingml/2006/main" xmlns:r="http://schemas.openxmlformats.org/officeDocument/2006/relationships" xmlns:p="http://schemas.openxmlformats.org/presentationml/2006/main" type="vertTitleAndTx" preserve="1">
   <p:cSld name="Vertical Title and Text">
     <p:spTree>
@@ -693,13 +3439,7 @@
       </p:grpSpPr>
       <p:sp>
         <p:nvSpPr>
-          <p:cNvPr id="2" name="Vertical Title 1">
-            <a:extLst>
-              <a:ext uri="{FF2B5EF4-FFF2-40B4-BE49-F238E27FC236}">
-                <a16:creationId xmlns:a16="http://schemas.microsoft.com/office/drawing/2014/main" id="{F1A36BFF-35D4-41D2-4714-E236AED6563F}"/>
-              </a:ext>
-            </a:extLst>
-          </p:cNvPr>
+          <p:cNvPr id="2" name="Vertical Title 1"/>
           <p:cNvSpPr>
             <a:spLocks noGrp="1"/>
           </p:cNvSpPr>
@@ -709,48 +3449,42 @@
         </p:nvSpPr>
         <p:spPr>
           <a:xfrm>
-            <a:off x="8724900" y="365125"/>
-            <a:ext cx="2628900" cy="5811838"/>
+            <a:off x="8304212" y="430213"/>
+            <a:ext cx="1752601" cy="5826125"/>
           </a:xfrm>
         </p:spPr>
         <p:txBody>
+          <a:bodyPr vert="eaVert" anchor="b" anchorCtr="0"/>
+          <a:lstStyle/>
+          <a:p>
+            <a:r>
+              <a:rPr lang="en-GB"/>
+              <a:t>Click to edit Master title style</a:t>
+            </a:r>
+            <a:endParaRPr lang="en-US" dirty="0"/>
+          </a:p>
+        </p:txBody>
+      </p:sp>
+      <p:sp>
+        <p:nvSpPr>
+          <p:cNvPr id="3" name="Vertical Text Placeholder 2"/>
+          <p:cNvSpPr>
+            <a:spLocks noGrp="1"/>
+          </p:cNvSpPr>
+          <p:nvPr>
+            <p:ph type="body" orient="vert" idx="1"/>
+          </p:nvPr>
+        </p:nvSpPr>
+        <p:spPr>
+          <a:xfrm>
+            <a:off x="652463" y="887414"/>
+            <a:ext cx="7423149" cy="5368924"/>
+          </a:xfrm>
+        </p:spPr>
+        <p:txBody>
           <a:bodyPr vert="eaVert"/>
           <a:lstStyle/>
           <a:p>
-            <a:r>
-              <a:rPr lang="en-GB"/>
-              <a:t>Click to edit Master title style</a:t>
-            </a:r>
-            <a:endParaRPr lang="en-NZ"/>
-          </a:p>
-        </p:txBody>
-      </p:sp>
-      <p:sp>
-        <p:nvSpPr>
-          <p:cNvPr id="3" name="Vertical Text Placeholder 2">
-            <a:extLst>
-              <a:ext uri="{FF2B5EF4-FFF2-40B4-BE49-F238E27FC236}">
-                <a16:creationId xmlns:a16="http://schemas.microsoft.com/office/drawing/2014/main" id="{2884263A-B8D4-B0A5-5713-B9F4897FE04C}"/>
-              </a:ext>
-            </a:extLst>
-          </p:cNvPr>
-          <p:cNvSpPr>
-            <a:spLocks noGrp="1"/>
-          </p:cNvSpPr>
-          <p:nvPr>
-            <p:ph type="body" orient="vert" idx="1"/>
-          </p:nvPr>
-        </p:nvSpPr>
-        <p:spPr>
-          <a:xfrm>
-            <a:off x="838200" y="365125"/>
-            <a:ext cx="7734300" cy="5811838"/>
-          </a:xfrm>
-        </p:spPr>
-        <p:txBody>
-          <a:bodyPr vert="eaVert"/>
-          <a:lstStyle/>
-          <a:p>
             <a:pPr lvl="0"/>
             <a:r>
               <a:rPr lang="en-GB"/>
@@ -784,19 +3518,13 @@
               <a:rPr lang="en-GB"/>
               <a:t>Fifth level</a:t>
             </a:r>
-            <a:endParaRPr lang="en-NZ"/>
-          </a:p>
-        </p:txBody>
-      </p:sp>
-      <p:sp>
-        <p:nvSpPr>
-          <p:cNvPr id="4" name="Date Placeholder 3">
-            <a:extLst>
-              <a:ext uri="{FF2B5EF4-FFF2-40B4-BE49-F238E27FC236}">
-                <a16:creationId xmlns:a16="http://schemas.microsoft.com/office/drawing/2014/main" id="{1EAB7DD4-2C5E-4217-CD9B-4B52EF8BBC0B}"/>
-              </a:ext>
-            </a:extLst>
-          </p:cNvPr>
+            <a:endParaRPr lang="en-US" dirty="0"/>
+          </a:p>
+        </p:txBody>
+      </p:sp>
+      <p:sp>
+        <p:nvSpPr>
+          <p:cNvPr id="4" name="Date Placeholder 3"/>
           <p:cNvSpPr>
             <a:spLocks noGrp="1"/>
           </p:cNvSpPr>
@@ -811,7 +3539,7 @@
           <a:p>
             <a:fld id="{A23C7EEE-1AD9-4CFE-8AFB-1041F302144F}" type="datetimeFigureOut">
               <a:rPr lang="en-NZ" smtClean="0"/>
-              <a:t>8/09/2026</a:t>
+              <a:t>10/09/2026</a:t>
             </a:fld>
             <a:endParaRPr lang="en-NZ"/>
           </a:p>
@@ -819,13 +3547,7 @@
       </p:sp>
       <p:sp>
         <p:nvSpPr>
-          <p:cNvPr id="5" name="Footer Placeholder 4">
-            <a:extLst>
-              <a:ext uri="{FF2B5EF4-FFF2-40B4-BE49-F238E27FC236}">
-                <a16:creationId xmlns:a16="http://schemas.microsoft.com/office/drawing/2014/main" id="{6E839D55-82F3-5837-EAD1-D0A705B09D25}"/>
-              </a:ext>
-            </a:extLst>
-          </p:cNvPr>
+          <p:cNvPr id="5" name="Footer Placeholder 4"/>
           <p:cNvSpPr>
             <a:spLocks noGrp="1"/>
           </p:cNvSpPr>
@@ -844,13 +3566,7 @@
       </p:sp>
       <p:sp>
         <p:nvSpPr>
-          <p:cNvPr id="6" name="Slide Number Placeholder 5">
-            <a:extLst>
-              <a:ext uri="{FF2B5EF4-FFF2-40B4-BE49-F238E27FC236}">
-                <a16:creationId xmlns:a16="http://schemas.microsoft.com/office/drawing/2014/main" id="{10902F3E-145E-81F7-5B47-00E9377CB859}"/>
-              </a:ext>
-            </a:extLst>
-          </p:cNvPr>
+          <p:cNvPr id="6" name="Slide Number Placeholder 5"/>
           <p:cNvSpPr>
             <a:spLocks noGrp="1"/>
           </p:cNvSpPr>
@@ -874,7 +3590,7 @@
     </p:spTree>
     <p:extLst>
       <p:ext uri="{BB962C8B-B14F-4D97-AF65-F5344CB8AC3E}">
-        <p14:creationId xmlns:p14="http://schemas.microsoft.com/office/powerpoint/2010/main" val="2261978888"/>
+        <p14:creationId xmlns:p14="http://schemas.microsoft.com/office/powerpoint/2010/main" val="3896514303"/>
       </p:ext>
     </p:extLst>
   </p:cSld>
@@ -903,13 +3619,7 @@
       </p:grpSpPr>
       <p:sp>
         <p:nvSpPr>
-          <p:cNvPr id="2" name="Title 1">
-            <a:extLst>
-              <a:ext uri="{FF2B5EF4-FFF2-40B4-BE49-F238E27FC236}">
-                <a16:creationId xmlns:a16="http://schemas.microsoft.com/office/drawing/2014/main" id="{00100D8B-4B98-5126-E63B-9C7E78D7350A}"/>
-              </a:ext>
-            </a:extLst>
-          </p:cNvPr>
+          <p:cNvPr id="2" name="Title 1"/>
           <p:cNvSpPr>
             <a:spLocks noGrp="1"/>
           </p:cNvSpPr>
@@ -926,19 +3636,13 @@
               <a:rPr lang="en-GB"/>
               <a:t>Click to edit Master title style</a:t>
             </a:r>
-            <a:endParaRPr lang="en-NZ"/>
-          </a:p>
-        </p:txBody>
-      </p:sp>
-      <p:sp>
-        <p:nvSpPr>
-          <p:cNvPr id="3" name="Content Placeholder 2">
-            <a:extLst>
-              <a:ext uri="{FF2B5EF4-FFF2-40B4-BE49-F238E27FC236}">
-                <a16:creationId xmlns:a16="http://schemas.microsoft.com/office/drawing/2014/main" id="{28E4455D-883E-DD4D-0703-D6B8917A91F9}"/>
-              </a:ext>
-            </a:extLst>
-          </p:cNvPr>
+            <a:endParaRPr lang="en-US" dirty="0"/>
+          </a:p>
+        </p:txBody>
+      </p:sp>
+      <p:sp>
+        <p:nvSpPr>
+          <p:cNvPr id="3" name="Content Placeholder 2"/>
           <p:cNvSpPr>
             <a:spLocks noGrp="1"/>
           </p:cNvSpPr>
@@ -984,19 +3688,13 @@
               <a:rPr lang="en-GB"/>
               <a:t>Fifth level</a:t>
             </a:r>
-            <a:endParaRPr lang="en-NZ"/>
-          </a:p>
-        </p:txBody>
-      </p:sp>
-      <p:sp>
-        <p:nvSpPr>
-          <p:cNvPr id="4" name="Date Placeholder 3">
-            <a:extLst>
-              <a:ext uri="{FF2B5EF4-FFF2-40B4-BE49-F238E27FC236}">
-                <a16:creationId xmlns:a16="http://schemas.microsoft.com/office/drawing/2014/main" id="{82F57AD2-4B42-E1A2-A103-2081E789FFFD}"/>
-              </a:ext>
-            </a:extLst>
-          </p:cNvPr>
+            <a:endParaRPr lang="en-US" dirty="0"/>
+          </a:p>
+        </p:txBody>
+      </p:sp>
+      <p:sp>
+        <p:nvSpPr>
+          <p:cNvPr id="7" name="Date Placeholder 3"/>
           <p:cNvSpPr>
             <a:spLocks noGrp="1"/>
           </p:cNvSpPr>
@@ -1011,7 +3709,7 @@
           <a:p>
             <a:fld id="{A23C7EEE-1AD9-4CFE-8AFB-1041F302144F}" type="datetimeFigureOut">
               <a:rPr lang="en-NZ" smtClean="0"/>
-              <a:t>8/09/2026</a:t>
+              <a:t>10/09/2026</a:t>
             </a:fld>
             <a:endParaRPr lang="en-NZ"/>
           </a:p>
@@ -1019,13 +3717,7 @@
       </p:sp>
       <p:sp>
         <p:nvSpPr>
-          <p:cNvPr id="5" name="Footer Placeholder 4">
-            <a:extLst>
-              <a:ext uri="{FF2B5EF4-FFF2-40B4-BE49-F238E27FC236}">
-                <a16:creationId xmlns:a16="http://schemas.microsoft.com/office/drawing/2014/main" id="{276362B2-E580-A83F-4751-F13816E1512D}"/>
-              </a:ext>
-            </a:extLst>
-          </p:cNvPr>
+          <p:cNvPr id="5" name="Footer Placeholder 4"/>
           <p:cNvSpPr>
             <a:spLocks noGrp="1"/>
           </p:cNvSpPr>
@@ -1044,13 +3736,7 @@
       </p:sp>
       <p:sp>
         <p:nvSpPr>
-          <p:cNvPr id="6" name="Slide Number Placeholder 5">
-            <a:extLst>
-              <a:ext uri="{FF2B5EF4-FFF2-40B4-BE49-F238E27FC236}">
-                <a16:creationId xmlns:a16="http://schemas.microsoft.com/office/drawing/2014/main" id="{FC1A8300-FF74-9B16-5DA7-0AC0C6EB48A3}"/>
-              </a:ext>
-            </a:extLst>
-          </p:cNvPr>
+          <p:cNvPr id="6" name="Slide Number Placeholder 5"/>
           <p:cNvSpPr>
             <a:spLocks noGrp="1"/>
           </p:cNvSpPr>
@@ -1074,7 +3760,7 @@
     </p:spTree>
     <p:extLst>
       <p:ext uri="{BB962C8B-B14F-4D97-AF65-F5344CB8AC3E}">
-        <p14:creationId xmlns:p14="http://schemas.microsoft.com/office/powerpoint/2010/main" val="3859958947"/>
+        <p14:creationId xmlns:p14="http://schemas.microsoft.com/office/powerpoint/2010/main" val="2313395362"/>
       </p:ext>
     </p:extLst>
   </p:cSld>
@@ -1103,13 +3789,7 @@
       </p:grpSpPr>
       <p:sp>
         <p:nvSpPr>
-          <p:cNvPr id="2" name="Title 1">
-            <a:extLst>
-              <a:ext uri="{FF2B5EF4-FFF2-40B4-BE49-F238E27FC236}">
-                <a16:creationId xmlns:a16="http://schemas.microsoft.com/office/drawing/2014/main" id="{198E0490-2926-D48F-9967-6E0A448425D1}"/>
-              </a:ext>
-            </a:extLst>
-          </p:cNvPr>
+          <p:cNvPr id="2" name="Title 1"/>
           <p:cNvSpPr>
             <a:spLocks noGrp="1"/>
           </p:cNvSpPr>
@@ -1119,15 +3799,15 @@
         </p:nvSpPr>
         <p:spPr>
           <a:xfrm>
-            <a:off x="831850" y="1709738"/>
-            <a:ext cx="10515600" cy="2852737"/>
+            <a:off x="1154956" y="2861733"/>
+            <a:ext cx="8825657" cy="1915647"/>
           </a:xfrm>
         </p:spPr>
         <p:txBody>
           <a:bodyPr anchor="b"/>
           <a:lstStyle>
-            <a:lvl1pPr>
-              <a:defRPr sz="6000"/>
+            <a:lvl1pPr algn="l">
+              <a:defRPr sz="4000" b="0" cap="none"/>
             </a:lvl1pPr>
           </a:lstStyle>
           <a:p>
@@ -1135,19 +3815,13 @@
               <a:rPr lang="en-GB"/>
               <a:t>Click to edit Master title style</a:t>
             </a:r>
-            <a:endParaRPr lang="en-NZ"/>
-          </a:p>
-        </p:txBody>
-      </p:sp>
-      <p:sp>
-        <p:nvSpPr>
-          <p:cNvPr id="3" name="Text Placeholder 2">
-            <a:extLst>
-              <a:ext uri="{FF2B5EF4-FFF2-40B4-BE49-F238E27FC236}">
-                <a16:creationId xmlns:a16="http://schemas.microsoft.com/office/drawing/2014/main" id="{7D71605A-7A08-FD9C-A225-7D374A370142}"/>
-              </a:ext>
-            </a:extLst>
-          </p:cNvPr>
+            <a:endParaRPr lang="en-US" dirty="0"/>
+          </a:p>
+        </p:txBody>
+      </p:sp>
+      <p:sp>
+        <p:nvSpPr>
+          <p:cNvPr id="3" name="Text Placeholder 2"/>
           <p:cNvSpPr>
             <a:spLocks noGrp="1"/>
           </p:cNvSpPr>
@@ -1157,99 +3831,100 @@
         </p:nvSpPr>
         <p:spPr>
           <a:xfrm>
-            <a:off x="831850" y="4589463"/>
-            <a:ext cx="10515600" cy="1500187"/>
+            <a:off x="1154955" y="4777381"/>
+            <a:ext cx="8825658" cy="860400"/>
           </a:xfrm>
         </p:spPr>
         <p:txBody>
-          <a:bodyPr/>
+          <a:bodyPr anchor="t"/>
           <a:lstStyle>
-            <a:lvl1pPr marL="0" indent="0">
-              <a:buNone/>
-              <a:defRPr sz="2400">
+            <a:lvl1pPr marL="0" indent="0" algn="l">
+              <a:buNone/>
+              <a:defRPr sz="2000" cap="all">
                 <a:solidFill>
-                  <a:schemeClr val="tx1">
-                    <a:tint val="82000"/>
+                  <a:schemeClr val="bg2">
+                    <a:lumMod val="40000"/>
+                    <a:lumOff val="60000"/>
                   </a:schemeClr>
                 </a:solidFill>
               </a:defRPr>
             </a:lvl1pPr>
             <a:lvl2pPr marL="457200" indent="0">
               <a:buNone/>
-              <a:defRPr sz="2000">
+              <a:defRPr sz="1800">
                 <a:solidFill>
                   <a:schemeClr val="tx1">
-                    <a:tint val="82000"/>
+                    <a:tint val="75000"/>
                   </a:schemeClr>
                 </a:solidFill>
               </a:defRPr>
             </a:lvl2pPr>
             <a:lvl3pPr marL="914400" indent="0">
               <a:buNone/>
-              <a:defRPr sz="1800">
+              <a:defRPr sz="1600">
                 <a:solidFill>
                   <a:schemeClr val="tx1">
-                    <a:tint val="82000"/>
+                    <a:tint val="75000"/>
                   </a:schemeClr>
                 </a:solidFill>
               </a:defRPr>
             </a:lvl3pPr>
             <a:lvl4pPr marL="1371600" indent="0">
               <a:buNone/>
-              <a:defRPr sz="1600">
+              <a:defRPr sz="1400">
                 <a:solidFill>
                   <a:schemeClr val="tx1">
-                    <a:tint val="82000"/>
+                    <a:tint val="75000"/>
                   </a:schemeClr>
                 </a:solidFill>
               </a:defRPr>
             </a:lvl4pPr>
             <a:lvl5pPr marL="1828800" indent="0">
               <a:buNone/>
-              <a:defRPr sz="1600">
+              <a:defRPr sz="1400">
                 <a:solidFill>
                   <a:schemeClr val="tx1">
-                    <a:tint val="82000"/>
+                    <a:tint val="75000"/>
                   </a:schemeClr>
                 </a:solidFill>
               </a:defRPr>
             </a:lvl5pPr>
             <a:lvl6pPr marL="2286000" indent="0">
               <a:buNone/>
-              <a:defRPr sz="1600">
+              <a:defRPr sz="1400">
                 <a:solidFill>
                   <a:schemeClr val="tx1">
-                    <a:tint val="82000"/>
+                    <a:tint val="75000"/>
                   </a:schemeClr>
                 </a:solidFill>
               </a:defRPr>
             </a:lvl6pPr>
             <a:lvl7pPr marL="2743200" indent="0">
               <a:buNone/>
-              <a:defRPr sz="1600">
+              <a:defRPr sz="1400">
                 <a:solidFill>
                   <a:schemeClr val="tx1">
-                    <a:tint val="82000"/>
+                    <a:tint val="75000"/>
                   </a:schemeClr>
                 </a:solidFill>
               </a:defRPr>
             </a:lvl7pPr>
             <a:lvl8pPr marL="3200400" indent="0">
               <a:buNone/>
-              <a:defRPr sz="1600">
+              <a:defRPr sz="1400">
                 <a:solidFill>
                   <a:schemeClr val="tx1">
-                    <a:tint val="82000"/>
+                    <a:tint val="75000"/>
                   </a:schemeClr>
                 </a:solidFill>
               </a:defRPr>
             </a:lvl8pPr>
             <a:lvl9pPr marL="3657600" indent="0">
               <a:buNone/>
-              <a:defRPr sz="1600">
+              <a:defRPr sz="1400">
                 <a:solidFill>
                   <a:schemeClr val="tx1">
-                    <a:tint val="82000"/>
+                    <a:tint val="75000"/>
                   </a:schemeClr>
                 </a:solidFill>
               </a:defRPr>
@@ -1266,13 +3941,7 @@
       </p:sp>
       <p:sp>
         <p:nvSpPr>
-          <p:cNvPr id="4" name="Date Placeholder 3">
-            <a:extLst>
-              <a:ext uri="{FF2B5EF4-FFF2-40B4-BE49-F238E27FC236}">
-                <a16:creationId xmlns:a16="http://schemas.microsoft.com/office/drawing/2014/main" id="{9F82584D-ACB0-AF8E-0C3F-EDD1DCC9DE5A}"/>
-              </a:ext>
-            </a:extLst>
-          </p:cNvPr>
+          <p:cNvPr id="4" name="Date Placeholder 3"/>
           <p:cNvSpPr>
             <a:spLocks noGrp="1"/>
           </p:cNvSpPr>
@@ -1287,7 +3956,7 @@
           <a:p>
             <a:fld id="{A23C7EEE-1AD9-4CFE-8AFB-1041F302144F}" type="datetimeFigureOut">
               <a:rPr lang="en-NZ" smtClean="0"/>
-              <a:t>8/09/2026</a:t>
+              <a:t>10/09/2026</a:t>
             </a:fld>
             <a:endParaRPr lang="en-NZ"/>
           </a:p>
@@ -1295,13 +3964,7 @@
       </p:sp>
       <p:sp>
         <p:nvSpPr>
-          <p:cNvPr id="5" name="Footer Placeholder 4">
-            <a:extLst>
-              <a:ext uri="{FF2B5EF4-FFF2-40B4-BE49-F238E27FC236}">
-                <a16:creationId xmlns:a16="http://schemas.microsoft.com/office/drawing/2014/main" id="{9B595146-1933-F6E0-0E53-152CB43F659B}"/>
-              </a:ext>
-            </a:extLst>
-          </p:cNvPr>
+          <p:cNvPr id="5" name="Footer Placeholder 4"/>
           <p:cNvSpPr>
             <a:spLocks noGrp="1"/>
           </p:cNvSpPr>
@@ -1320,13 +3983,7 @@
       </p:sp>
       <p:sp>
         <p:nvSpPr>
-          <p:cNvPr id="6" name="Slide Number Placeholder 5">
-            <a:extLst>
-              <a:ext uri="{FF2B5EF4-FFF2-40B4-BE49-F238E27FC236}">
-                <a16:creationId xmlns:a16="http://schemas.microsoft.com/office/drawing/2014/main" id="{41369F63-5BDB-4DF0-936F-808C19201092}"/>
-              </a:ext>
-            </a:extLst>
-          </p:cNvPr>
+          <p:cNvPr id="6" name="Slide Number Placeholder 5"/>
           <p:cNvSpPr>
             <a:spLocks noGrp="1"/>
           </p:cNvSpPr>
@@ -1350,7 +4007,7 @@
     </p:spTree>
     <p:extLst>
       <p:ext uri="{BB962C8B-B14F-4D97-AF65-F5344CB8AC3E}">
-        <p14:creationId xmlns:p14="http://schemas.microsoft.com/office/powerpoint/2010/main" val="830321942"/>
+        <p14:creationId xmlns:p14="http://schemas.microsoft.com/office/powerpoint/2010/main" val="1250239107"/>
       </p:ext>
     </p:extLst>
   </p:cSld>
@@ -1379,13 +4036,7 @@
       </p:grpSpPr>
       <p:sp>
         <p:nvSpPr>
-          <p:cNvPr id="2" name="Title 1">
-            <a:extLst>
-              <a:ext uri="{FF2B5EF4-FFF2-40B4-BE49-F238E27FC236}">
-                <a16:creationId xmlns:a16="http://schemas.microsoft.com/office/drawing/2014/main" id="{EAA9A810-B9E3-8918-8AF3-D0B5432905CA}"/>
-              </a:ext>
-            </a:extLst>
-          </p:cNvPr>
+          <p:cNvPr id="2" name="Title 1"/>
           <p:cNvSpPr>
             <a:spLocks noGrp="1"/>
           </p:cNvSpPr>
@@ -1402,19 +4053,13 @@
               <a:rPr lang="en-GB"/>
               <a:t>Click to edit Master title style</a:t>
             </a:r>
-            <a:endParaRPr lang="en-NZ"/>
-          </a:p>
-        </p:txBody>
-      </p:sp>
-      <p:sp>
-        <p:nvSpPr>
-          <p:cNvPr id="3" name="Content Placeholder 2">
-            <a:extLst>
-              <a:ext uri="{FF2B5EF4-FFF2-40B4-BE49-F238E27FC236}">
-                <a16:creationId xmlns:a16="http://schemas.microsoft.com/office/drawing/2014/main" id="{33371308-00AE-9DB6-7582-4B4628A73B87}"/>
-              </a:ext>
-            </a:extLst>
-          </p:cNvPr>
+            <a:endParaRPr lang="en-US" dirty="0"/>
+          </a:p>
+        </p:txBody>
+      </p:sp>
+      <p:sp>
+        <p:nvSpPr>
+          <p:cNvPr id="3" name="Content Placeholder 2"/>
           <p:cNvSpPr>
             <a:spLocks noGrp="1"/>
           </p:cNvSpPr>
@@ -1424,177 +4069,213 @@
         </p:nvSpPr>
         <p:spPr>
           <a:xfrm>
-            <a:off x="838200" y="1825625"/>
-            <a:ext cx="5181600" cy="4351338"/>
+            <a:off x="1103312" y="2060575"/>
+            <a:ext cx="4396339" cy="4195763"/>
           </a:xfrm>
         </p:spPr>
         <p:txBody>
+          <a:bodyPr>
+            <a:normAutofit/>
+          </a:bodyPr>
+          <a:lstStyle>
+            <a:lvl1pPr>
+              <a:defRPr sz="1800"/>
+            </a:lvl1pPr>
+            <a:lvl2pPr>
+              <a:defRPr sz="1600"/>
+            </a:lvl2pPr>
+            <a:lvl3pPr>
+              <a:defRPr sz="1400"/>
+            </a:lvl3pPr>
+            <a:lvl4pPr>
+              <a:defRPr sz="1200"/>
+            </a:lvl4pPr>
+            <a:lvl5pPr>
+              <a:defRPr sz="1200"/>
+            </a:lvl5pPr>
+            <a:lvl6pPr>
+              <a:defRPr sz="1200"/>
+            </a:lvl6pPr>
+            <a:lvl7pPr>
+              <a:defRPr sz="1200"/>
+            </a:lvl7pPr>
+            <a:lvl8pPr>
+              <a:defRPr sz="1200"/>
+            </a:lvl8pPr>
+            <a:lvl9pPr>
+              <a:defRPr sz="1200"/>
+            </a:lvl9pPr>
+          </a:lstStyle>
+          <a:p>
+            <a:pPr lvl="0"/>
+            <a:r>
+              <a:rPr lang="en-GB"/>
+              <a:t>Click to edit Master text styles</a:t>
+            </a:r>
+          </a:p>
+          <a:p>
+            <a:pPr lvl="1"/>
+            <a:r>
+              <a:rPr lang="en-GB"/>
+              <a:t>Second level</a:t>
+            </a:r>
+          </a:p>
+          <a:p>
+            <a:pPr lvl="2"/>
+            <a:r>
+              <a:rPr lang="en-GB"/>
+              <a:t>Third level</a:t>
+            </a:r>
+          </a:p>
+          <a:p>
+            <a:pPr lvl="3"/>
+            <a:r>
+              <a:rPr lang="en-GB"/>
+              <a:t>Fourth level</a:t>
+            </a:r>
+          </a:p>
+          <a:p>
+            <a:pPr lvl="4"/>
+            <a:r>
+              <a:rPr lang="en-GB"/>
+              <a:t>Fifth level</a:t>
+            </a:r>
+            <a:endParaRPr lang="en-US" dirty="0"/>
+          </a:p>
+        </p:txBody>
+      </p:sp>
+      <p:sp>
+        <p:nvSpPr>
+          <p:cNvPr id="4" name="Content Placeholder 3"/>
+          <p:cNvSpPr>
+            <a:spLocks noGrp="1"/>
+          </p:cNvSpPr>
+          <p:nvPr>
+            <p:ph sz="half" idx="2"/>
+          </p:nvPr>
+        </p:nvSpPr>
+        <p:spPr>
+          <a:xfrm>
+            <a:off x="5654493" y="2056092"/>
+            <a:ext cx="4396341" cy="4200245"/>
+          </a:xfrm>
+        </p:spPr>
+        <p:txBody>
+          <a:bodyPr>
+            <a:normAutofit/>
+          </a:bodyPr>
+          <a:lstStyle>
+            <a:lvl1pPr>
+              <a:defRPr sz="1800"/>
+            </a:lvl1pPr>
+            <a:lvl2pPr>
+              <a:defRPr sz="1600"/>
+            </a:lvl2pPr>
+            <a:lvl3pPr>
+              <a:defRPr sz="1400"/>
+            </a:lvl3pPr>
+            <a:lvl4pPr>
+              <a:defRPr sz="1200"/>
+            </a:lvl4pPr>
+            <a:lvl5pPr>
+              <a:defRPr sz="1200"/>
+            </a:lvl5pPr>
+            <a:lvl6pPr>
+              <a:defRPr sz="1200"/>
+            </a:lvl6pPr>
+            <a:lvl7pPr>
+              <a:defRPr sz="1200"/>
+            </a:lvl7pPr>
+            <a:lvl8pPr>
+              <a:defRPr sz="1200"/>
+            </a:lvl8pPr>
+            <a:lvl9pPr>
+              <a:defRPr sz="1200"/>
+            </a:lvl9pPr>
+          </a:lstStyle>
+          <a:p>
+            <a:pPr lvl="0"/>
+            <a:r>
+              <a:rPr lang="en-GB"/>
+              <a:t>Click to edit Master text styles</a:t>
+            </a:r>
+          </a:p>
+          <a:p>
+            <a:pPr lvl="1"/>
+            <a:r>
+              <a:rPr lang="en-GB"/>
+              <a:t>Second level</a:t>
+            </a:r>
+          </a:p>
+          <a:p>
+            <a:pPr lvl="2"/>
+            <a:r>
+              <a:rPr lang="en-GB"/>
+              <a:t>Third level</a:t>
+            </a:r>
+          </a:p>
+          <a:p>
+            <a:pPr lvl="3"/>
+            <a:r>
+              <a:rPr lang="en-GB"/>
+              <a:t>Fourth level</a:t>
+            </a:r>
+          </a:p>
+          <a:p>
+            <a:pPr lvl="4"/>
+            <a:r>
+              <a:rPr lang="en-GB"/>
+              <a:t>Fifth level</a:t>
+            </a:r>
+            <a:endParaRPr lang="en-US" dirty="0"/>
+          </a:p>
+        </p:txBody>
+      </p:sp>
+      <p:sp>
+        <p:nvSpPr>
+          <p:cNvPr id="5" name="Date Placeholder 4"/>
+          <p:cNvSpPr>
+            <a:spLocks noGrp="1"/>
+          </p:cNvSpPr>
+          <p:nvPr>
+            <p:ph type="dt" sz="half" idx="10"/>
+          </p:nvPr>
+        </p:nvSpPr>
+        <p:spPr/>
+        <p:txBody>
           <a:bodyPr/>
           <a:lstStyle/>
           <a:p>
-            <a:pPr lvl="0"/>
-            <a:r>
-              <a:rPr lang="en-GB"/>
-              <a:t>Click to edit Master text styles</a:t>
-            </a:r>
-          </a:p>
-          <a:p>
-            <a:pPr lvl="1"/>
-            <a:r>
-              <a:rPr lang="en-GB"/>
-              <a:t>Second level</a:t>
-            </a:r>
-          </a:p>
-          <a:p>
-            <a:pPr lvl="2"/>
-            <a:r>
-              <a:rPr lang="en-GB"/>
-              <a:t>Third level</a:t>
-            </a:r>
-          </a:p>
-          <a:p>
-            <a:pPr lvl="3"/>
-            <a:r>
-              <a:rPr lang="en-GB"/>
-              <a:t>Fourth level</a:t>
-            </a:r>
-          </a:p>
-          <a:p>
-            <a:pPr lvl="4"/>
-            <a:r>
-              <a:rPr lang="en-GB"/>
-              <a:t>Fifth level</a:t>
-            </a:r>
+            <a:fld id="{A23C7EEE-1AD9-4CFE-8AFB-1041F302144F}" type="datetimeFigureOut">
+              <a:rPr lang="en-NZ" smtClean="0"/>
+              <a:t>10/09/2026</a:t>
+            </a:fld>
             <a:endParaRPr lang="en-NZ"/>
           </a:p>
         </p:txBody>
       </p:sp>
       <p:sp>
         <p:nvSpPr>
-          <p:cNvPr id="4" name="Content Placeholder 3">
-            <a:extLst>
-              <a:ext uri="{FF2B5EF4-FFF2-40B4-BE49-F238E27FC236}">
-                <a16:creationId xmlns:a16="http://schemas.microsoft.com/office/drawing/2014/main" id="{E8235BFC-F703-46E4-2551-9D7C655D26C8}"/>
-              </a:ext>
-            </a:extLst>
-          </p:cNvPr>
-          <p:cNvSpPr>
-            <a:spLocks noGrp="1"/>
-          </p:cNvSpPr>
-          <p:nvPr>
-            <p:ph sz="half" idx="2"/>
-          </p:nvPr>
-        </p:nvSpPr>
-        <p:spPr>
-          <a:xfrm>
-            <a:off x="6172200" y="1825625"/>
-            <a:ext cx="5181600" cy="4351338"/>
-          </a:xfrm>
-        </p:spPr>
+          <p:cNvPr id="6" name="Footer Placeholder 5"/>
+          <p:cNvSpPr>
+            <a:spLocks noGrp="1"/>
+          </p:cNvSpPr>
+          <p:nvPr>
+            <p:ph type="ftr" sz="quarter" idx="11"/>
+          </p:nvPr>
+        </p:nvSpPr>
+        <p:spPr/>
         <p:txBody>
           <a:bodyPr/>
           <a:lstStyle/>
           <a:p>
-            <a:pPr lvl="0"/>
-            <a:r>
-              <a:rPr lang="en-GB"/>
-              <a:t>Click to edit Master text styles</a:t>
-            </a:r>
-          </a:p>
-          <a:p>
-            <a:pPr lvl="1"/>
-            <a:r>
-              <a:rPr lang="en-GB"/>
-              <a:t>Second level</a:t>
-            </a:r>
-          </a:p>
-          <a:p>
-            <a:pPr lvl="2"/>
-            <a:r>
-              <a:rPr lang="en-GB"/>
-              <a:t>Third level</a:t>
-            </a:r>
-          </a:p>
-          <a:p>
-            <a:pPr lvl="3"/>
-            <a:r>
-              <a:rPr lang="en-GB"/>
-              <a:t>Fourth level</a:t>
-            </a:r>
-          </a:p>
-          <a:p>
-            <a:pPr lvl="4"/>
-            <a:r>
-              <a:rPr lang="en-GB"/>
-              <a:t>Fifth level</a:t>
-            </a:r>
             <a:endParaRPr lang="en-NZ"/>
           </a:p>
         </p:txBody>
       </p:sp>
       <p:sp>
         <p:nvSpPr>
-          <p:cNvPr id="5" name="Date Placeholder 4">
-            <a:extLst>
-              <a:ext uri="{FF2B5EF4-FFF2-40B4-BE49-F238E27FC236}">
-                <a16:creationId xmlns:a16="http://schemas.microsoft.com/office/drawing/2014/main" id="{8D0EC211-B8A4-6B8C-C937-A8A54E98D553}"/>
-              </a:ext>
-            </a:extLst>
-          </p:cNvPr>
-          <p:cNvSpPr>
-            <a:spLocks noGrp="1"/>
-          </p:cNvSpPr>
-          <p:nvPr>
-            <p:ph type="dt" sz="half" idx="10"/>
-          </p:nvPr>
-        </p:nvSpPr>
-        <p:spPr/>
-        <p:txBody>
-          <a:bodyPr/>
-          <a:lstStyle/>
-          <a:p>
-            <a:fld id="{A23C7EEE-1AD9-4CFE-8AFB-1041F302144F}" type="datetimeFigureOut">
-              <a:rPr lang="en-NZ" smtClean="0"/>
-              <a:t>8/09/2026</a:t>
-            </a:fld>
-            <a:endParaRPr lang="en-NZ"/>
-          </a:p>
-        </p:txBody>
-      </p:sp>
-      <p:sp>
-        <p:nvSpPr>
-          <p:cNvPr id="6" name="Footer Placeholder 5">
-            <a:extLst>
-              <a:ext uri="{FF2B5EF4-FFF2-40B4-BE49-F238E27FC236}">
-                <a16:creationId xmlns:a16="http://schemas.microsoft.com/office/drawing/2014/main" id="{5EAB2F88-C63A-BE15-CB9A-603E9184CE09}"/>
-              </a:ext>
-            </a:extLst>
-          </p:cNvPr>
-          <p:cNvSpPr>
-            <a:spLocks noGrp="1"/>
-          </p:cNvSpPr>
-          <p:nvPr>
-            <p:ph type="ftr" sz="quarter" idx="11"/>
-          </p:nvPr>
-        </p:nvSpPr>
-        <p:spPr/>
-        <p:txBody>
-          <a:bodyPr/>
-          <a:lstStyle/>
-          <a:p>
-            <a:endParaRPr lang="en-NZ"/>
-          </a:p>
-        </p:txBody>
-      </p:sp>
-      <p:sp>
-        <p:nvSpPr>
-          <p:cNvPr id="7" name="Slide Number Placeholder 6">
-            <a:extLst>
-              <a:ext uri="{FF2B5EF4-FFF2-40B4-BE49-F238E27FC236}">
-                <a16:creationId xmlns:a16="http://schemas.microsoft.com/office/drawing/2014/main" id="{23BA983D-0C16-AE42-28FD-432B056943F7}"/>
-              </a:ext>
-            </a:extLst>
-          </p:cNvPr>
+          <p:cNvPr id="7" name="Slide Number Placeholder 6"/>
           <p:cNvSpPr>
             <a:spLocks noGrp="1"/>
           </p:cNvSpPr>
@@ -1618,7 +4299,7 @@
     </p:spTree>
     <p:extLst>
       <p:ext uri="{BB962C8B-B14F-4D97-AF65-F5344CB8AC3E}">
-        <p14:creationId xmlns:p14="http://schemas.microsoft.com/office/powerpoint/2010/main" val="2308697493"/>
+        <p14:creationId xmlns:p14="http://schemas.microsoft.com/office/powerpoint/2010/main" val="508190833"/>
       </p:ext>
     </p:extLst>
   </p:cSld>
@@ -1647,66 +4328,62 @@
       </p:grpSpPr>
       <p:sp>
         <p:nvSpPr>
-          <p:cNvPr id="2" name="Title 1">
-            <a:extLst>
-              <a:ext uri="{FF2B5EF4-FFF2-40B4-BE49-F238E27FC236}">
-                <a16:creationId xmlns:a16="http://schemas.microsoft.com/office/drawing/2014/main" id="{FEF77A5A-3D95-8C1F-69F6-E1424E161093}"/>
-              </a:ext>
-            </a:extLst>
-          </p:cNvPr>
+          <p:cNvPr id="2" name="Title 1"/>
           <p:cNvSpPr>
             <a:spLocks noGrp="1"/>
           </p:cNvSpPr>
           <p:nvPr>
             <p:ph type="title"/>
+          </p:nvPr>
+        </p:nvSpPr>
+        <p:spPr/>
+        <p:txBody>
+          <a:bodyPr/>
+          <a:lstStyle>
+            <a:lvl1pPr>
+              <a:defRPr/>
+            </a:lvl1pPr>
+          </a:lstStyle>
+          <a:p>
+            <a:r>
+              <a:rPr lang="en-GB"/>
+              <a:t>Click to edit Master title style</a:t>
+            </a:r>
+            <a:endParaRPr lang="en-US" dirty="0"/>
+          </a:p>
+        </p:txBody>
+      </p:sp>
+      <p:sp>
+        <p:nvSpPr>
+          <p:cNvPr id="3" name="Text Placeholder 2"/>
+          <p:cNvSpPr>
+            <a:spLocks noGrp="1"/>
+          </p:cNvSpPr>
+          <p:nvPr>
+            <p:ph type="body" idx="1"/>
           </p:nvPr>
         </p:nvSpPr>
         <p:spPr>
           <a:xfrm>
-            <a:off x="839788" y="365125"/>
-            <a:ext cx="10515600" cy="1325563"/>
+            <a:off x="1103313" y="1905000"/>
+            <a:ext cx="4396338" cy="576262"/>
           </a:xfrm>
         </p:spPr>
         <p:txBody>
-          <a:bodyPr/>
-          <a:lstStyle/>
-          <a:p>
-            <a:r>
-              <a:rPr lang="en-GB"/>
-              <a:t>Click to edit Master title style</a:t>
-            </a:r>
-            <a:endParaRPr lang="en-NZ"/>
-          </a:p>
-        </p:txBody>
-      </p:sp>
-      <p:sp>
-        <p:nvSpPr>
-          <p:cNvPr id="3" name="Text Placeholder 2">
-            <a:extLst>
-              <a:ext uri="{FF2B5EF4-FFF2-40B4-BE49-F238E27FC236}">
-                <a16:creationId xmlns:a16="http://schemas.microsoft.com/office/drawing/2014/main" id="{074F99E2-7D88-65E1-ECE2-64479017B03B}"/>
-              </a:ext>
-            </a:extLst>
-          </p:cNvPr>
-          <p:cNvSpPr>
-            <a:spLocks noGrp="1"/>
-          </p:cNvSpPr>
-          <p:nvPr>
-            <p:ph type="body" idx="1"/>
-          </p:nvPr>
-        </p:nvSpPr>
-        <p:spPr>
-          <a:xfrm>
-            <a:off x="839788" y="1681163"/>
-            <a:ext cx="5157787" cy="823912"/>
-          </a:xfrm>
-        </p:spPr>
-        <p:txBody>
-          <a:bodyPr anchor="b"/>
+          <a:bodyPr anchor="b">
+            <a:noAutofit/>
+          </a:bodyPr>
           <a:lstStyle>
             <a:lvl1pPr marL="0" indent="0">
               <a:buNone/>
-              <a:defRPr sz="2400" b="1"/>
+              <a:defRPr sz="2400" b="0">
+                <a:solidFill>
+                  <a:schemeClr val="bg2">
+                    <a:lumMod val="40000"/>
+                    <a:lumOff val="60000"/>
+                  </a:schemeClr>
+                </a:solidFill>
+              </a:defRPr>
             </a:lvl1pPr>
             <a:lvl2pPr marL="457200" indent="0">
               <a:buNone/>
@@ -1752,13 +4429,7 @@
       </p:sp>
       <p:sp>
         <p:nvSpPr>
-          <p:cNvPr id="4" name="Content Placeholder 3">
-            <a:extLst>
-              <a:ext uri="{FF2B5EF4-FFF2-40B4-BE49-F238E27FC236}">
-                <a16:creationId xmlns:a16="http://schemas.microsoft.com/office/drawing/2014/main" id="{DA9F4BFD-D195-14E2-A82B-60BFE0610F60}"/>
-              </a:ext>
-            </a:extLst>
-          </p:cNvPr>
+          <p:cNvPr id="4" name="Content Placeholder 3"/>
           <p:cNvSpPr>
             <a:spLocks noGrp="1"/>
           </p:cNvSpPr>
@@ -1768,13 +4439,43 @@
         </p:nvSpPr>
         <p:spPr>
           <a:xfrm>
-            <a:off x="839788" y="2505075"/>
-            <a:ext cx="5157787" cy="3684588"/>
+            <a:off x="1103312" y="2514600"/>
+            <a:ext cx="4396339" cy="3741738"/>
           </a:xfrm>
         </p:spPr>
         <p:txBody>
-          <a:bodyPr/>
-          <a:lstStyle/>
+          <a:bodyPr>
+            <a:normAutofit/>
+          </a:bodyPr>
+          <a:lstStyle>
+            <a:lvl1pPr>
+              <a:defRPr sz="1800"/>
+            </a:lvl1pPr>
+            <a:lvl2pPr>
+              <a:defRPr sz="1600"/>
+            </a:lvl2pPr>
+            <a:lvl3pPr>
+              <a:defRPr sz="1400"/>
+            </a:lvl3pPr>
+            <a:lvl4pPr>
+              <a:defRPr sz="1200"/>
+            </a:lvl4pPr>
+            <a:lvl5pPr>
+              <a:defRPr sz="1200"/>
+            </a:lvl5pPr>
+            <a:lvl6pPr>
+              <a:defRPr sz="1200"/>
+            </a:lvl6pPr>
+            <a:lvl7pPr>
+              <a:defRPr sz="1200"/>
+            </a:lvl7pPr>
+            <a:lvl8pPr>
+              <a:defRPr sz="1200"/>
+            </a:lvl8pPr>
+            <a:lvl9pPr>
+              <a:defRPr sz="1200"/>
+            </a:lvl9pPr>
+          </a:lstStyle>
           <a:p>
             <a:pPr lvl="0"/>
             <a:r>
@@ -1809,19 +4510,13 @@
               <a:rPr lang="en-GB"/>
               <a:t>Fifth level</a:t>
             </a:r>
-            <a:endParaRPr lang="en-NZ"/>
-          </a:p>
-        </p:txBody>
-      </p:sp>
-      <p:sp>
-        <p:nvSpPr>
-          <p:cNvPr id="5" name="Text Placeholder 4">
-            <a:extLst>
-              <a:ext uri="{FF2B5EF4-FFF2-40B4-BE49-F238E27FC236}">
-                <a16:creationId xmlns:a16="http://schemas.microsoft.com/office/drawing/2014/main" id="{35AC96F5-9398-9658-5493-0BF9B04C9576}"/>
-              </a:ext>
-            </a:extLst>
-          </p:cNvPr>
+            <a:endParaRPr lang="en-US" dirty="0"/>
+          </a:p>
+        </p:txBody>
+      </p:sp>
+      <p:sp>
+        <p:nvSpPr>
+          <p:cNvPr id="5" name="Text Placeholder 4"/>
           <p:cNvSpPr>
             <a:spLocks noGrp="1"/>
           </p:cNvSpPr>
@@ -1831,16 +4526,25 @@
         </p:nvSpPr>
         <p:spPr>
           <a:xfrm>
-            <a:off x="6172200" y="1681163"/>
-            <a:ext cx="5183188" cy="823912"/>
+            <a:off x="5654495" y="1905000"/>
+            <a:ext cx="4396339" cy="576262"/>
           </a:xfrm>
         </p:spPr>
         <p:txBody>
-          <a:bodyPr anchor="b"/>
+          <a:bodyPr anchor="b">
+            <a:noAutofit/>
+          </a:bodyPr>
           <a:lstStyle>
             <a:lvl1pPr marL="0" indent="0">
               <a:buNone/>
-              <a:defRPr sz="2400" b="1"/>
+              <a:defRPr sz="2400" b="0">
+                <a:solidFill>
+                  <a:schemeClr val="bg2">
+                    <a:lumMod val="40000"/>
+                    <a:lumOff val="60000"/>
+                  </a:schemeClr>
+                </a:solidFill>
+              </a:defRPr>
             </a:lvl1pPr>
             <a:lvl2pPr marL="457200" indent="0">
               <a:buNone/>
@@ -1886,13 +4590,7 @@
       </p:sp>
       <p:sp>
         <p:nvSpPr>
-          <p:cNvPr id="6" name="Content Placeholder 5">
-            <a:extLst>
-              <a:ext uri="{FF2B5EF4-FFF2-40B4-BE49-F238E27FC236}">
-                <a16:creationId xmlns:a16="http://schemas.microsoft.com/office/drawing/2014/main" id="{85F0F4C3-5080-CC2E-6878-5E6487404751}"/>
-              </a:ext>
-            </a:extLst>
-          </p:cNvPr>
+          <p:cNvPr id="6" name="Content Placeholder 5"/>
           <p:cNvSpPr>
             <a:spLocks noGrp="1"/>
           </p:cNvSpPr>
@@ -1902,65 +4600,112 @@
         </p:nvSpPr>
         <p:spPr>
           <a:xfrm>
-            <a:off x="6172200" y="2505075"/>
-            <a:ext cx="5183188" cy="3684588"/>
+            <a:off x="5654495" y="2514600"/>
+            <a:ext cx="4396339" cy="3741738"/>
           </a:xfrm>
         </p:spPr>
         <p:txBody>
+          <a:bodyPr>
+            <a:normAutofit/>
+          </a:bodyPr>
+          <a:lstStyle>
+            <a:lvl1pPr>
+              <a:defRPr sz="1800"/>
+            </a:lvl1pPr>
+            <a:lvl2pPr>
+              <a:defRPr sz="1600"/>
+            </a:lvl2pPr>
+            <a:lvl3pPr>
+              <a:defRPr sz="1400"/>
+            </a:lvl3pPr>
+            <a:lvl4pPr>
+              <a:defRPr sz="1200"/>
+            </a:lvl4pPr>
+            <a:lvl5pPr>
+              <a:defRPr sz="1200"/>
+            </a:lvl5pPr>
+            <a:lvl6pPr>
+              <a:defRPr sz="1200"/>
+            </a:lvl6pPr>
+            <a:lvl7pPr>
+              <a:defRPr sz="1200"/>
+            </a:lvl7pPr>
+            <a:lvl8pPr>
+              <a:defRPr sz="1200"/>
+            </a:lvl8pPr>
+            <a:lvl9pPr>
+              <a:defRPr sz="1200"/>
+            </a:lvl9pPr>
+          </a:lstStyle>
+          <a:p>
+            <a:pPr lvl="0"/>
+            <a:r>
+              <a:rPr lang="en-GB"/>
+              <a:t>Click to edit Master text styles</a:t>
+            </a:r>
+          </a:p>
+          <a:p>
+            <a:pPr lvl="1"/>
+            <a:r>
+              <a:rPr lang="en-GB"/>
+              <a:t>Second level</a:t>
+            </a:r>
+          </a:p>
+          <a:p>
+            <a:pPr lvl="2"/>
+            <a:r>
+              <a:rPr lang="en-GB"/>
+              <a:t>Third level</a:t>
+            </a:r>
+          </a:p>
+          <a:p>
+            <a:pPr lvl="3"/>
+            <a:r>
+              <a:rPr lang="en-GB"/>
+              <a:t>Fourth level</a:t>
+            </a:r>
+          </a:p>
+          <a:p>
+            <a:pPr lvl="4"/>
+            <a:r>
+              <a:rPr lang="en-GB"/>
+              <a:t>Fifth level</a:t>
+            </a:r>
+            <a:endParaRPr lang="en-US" dirty="0"/>
+          </a:p>
+        </p:txBody>
+      </p:sp>
+      <p:sp>
+        <p:nvSpPr>
+          <p:cNvPr id="7" name="Date Placeholder 6"/>
+          <p:cNvSpPr>
+            <a:spLocks noGrp="1"/>
+          </p:cNvSpPr>
+          <p:nvPr>
+            <p:ph type="dt" sz="half" idx="10"/>
+          </p:nvPr>
+        </p:nvSpPr>
+        <p:spPr/>
+        <p:txBody>
           <a:bodyPr/>
           <a:lstStyle/>
           <a:p>
-            <a:pPr lvl="0"/>
-            <a:r>
-              <a:rPr lang="en-GB"/>
-              <a:t>Click to edit Master text styles</a:t>
-            </a:r>
-          </a:p>
-          <a:p>
-            <a:pPr lvl="1"/>
-            <a:r>
-              <a:rPr lang="en-GB"/>
-              <a:t>Second level</a:t>
-            </a:r>
-          </a:p>
-          <a:p>
-            <a:pPr lvl="2"/>
-            <a:r>
-              <a:rPr lang="en-GB"/>
-              <a:t>Third level</a:t>
-            </a:r>
-          </a:p>
-          <a:p>
-            <a:pPr lvl="3"/>
-            <a:r>
-              <a:rPr lang="en-GB"/>
-              <a:t>Fourth level</a:t>
-            </a:r>
-          </a:p>
-          <a:p>
-            <a:pPr lvl="4"/>
-            <a:r>
-              <a:rPr lang="en-GB"/>
-              <a:t>Fifth level</a:t>
-            </a:r>
+            <a:fld id="{A23C7EEE-1AD9-4CFE-8AFB-1041F302144F}" type="datetimeFigureOut">
+              <a:rPr lang="en-NZ" smtClean="0"/>
+              <a:t>10/09/2026</a:t>
+            </a:fld>
             <a:endParaRPr lang="en-NZ"/>
           </a:p>
         </p:txBody>
       </p:sp>
       <p:sp>
         <p:nvSpPr>
-          <p:cNvPr id="7" name="Date Placeholder 6">
-            <a:extLst>
-              <a:ext uri="{FF2B5EF4-FFF2-40B4-BE49-F238E27FC236}">
-                <a16:creationId xmlns:a16="http://schemas.microsoft.com/office/drawing/2014/main" id="{8319984B-F3EA-1532-81BE-29CB803F042A}"/>
-              </a:ext>
-            </a:extLst>
-          </p:cNvPr>
-          <p:cNvSpPr>
-            <a:spLocks noGrp="1"/>
-          </p:cNvSpPr>
-          <p:nvPr>
-            <p:ph type="dt" sz="half" idx="10"/>
+          <p:cNvPr id="8" name="Footer Placeholder 7"/>
+          <p:cNvSpPr>
+            <a:spLocks noGrp="1"/>
+          </p:cNvSpPr>
+          <p:nvPr>
+            <p:ph type="ftr" sz="quarter" idx="11"/>
           </p:nvPr>
         </p:nvSpPr>
         <p:spPr/>
@@ -1968,48 +4713,13 @@
           <a:bodyPr/>
           <a:lstStyle/>
           <a:p>
-            <a:fld id="{A23C7EEE-1AD9-4CFE-8AFB-1041F302144F}" type="datetimeFigureOut">
-              <a:rPr lang="en-NZ" smtClean="0"/>
-              <a:t>8/09/2026</a:t>
-            </a:fld>
             <a:endParaRPr lang="en-NZ"/>
           </a:p>
         </p:txBody>
       </p:sp>
       <p:sp>
         <p:nvSpPr>
-          <p:cNvPr id="8" name="Footer Placeholder 7">
-            <a:extLst>
-              <a:ext uri="{FF2B5EF4-FFF2-40B4-BE49-F238E27FC236}">
-                <a16:creationId xmlns:a16="http://schemas.microsoft.com/office/drawing/2014/main" id="{3F8DC423-9F84-9BDD-4638-AD948287CE5E}"/>
-              </a:ext>
-            </a:extLst>
-          </p:cNvPr>
-          <p:cNvSpPr>
-            <a:spLocks noGrp="1"/>
-          </p:cNvSpPr>
-          <p:nvPr>
-            <p:ph type="ftr" sz="quarter" idx="11"/>
-          </p:nvPr>
-        </p:nvSpPr>
-        <p:spPr/>
-        <p:txBody>
-          <a:bodyPr/>
-          <a:lstStyle/>
-          <a:p>
-            <a:endParaRPr lang="en-NZ"/>
-          </a:p>
-        </p:txBody>
-      </p:sp>
-      <p:sp>
-        <p:nvSpPr>
-          <p:cNvPr id="9" name="Slide Number Placeholder 8">
-            <a:extLst>
-              <a:ext uri="{FF2B5EF4-FFF2-40B4-BE49-F238E27FC236}">
-                <a16:creationId xmlns:a16="http://schemas.microsoft.com/office/drawing/2014/main" id="{F53F99C6-F194-743C-2C8D-FA579173A58A}"/>
-              </a:ext>
-            </a:extLst>
-          </p:cNvPr>
+          <p:cNvPr id="9" name="Slide Number Placeholder 8"/>
           <p:cNvSpPr>
             <a:spLocks noGrp="1"/>
           </p:cNvSpPr>
@@ -2033,7 +4743,7 @@
     </p:spTree>
     <p:extLst>
       <p:ext uri="{BB962C8B-B14F-4D97-AF65-F5344CB8AC3E}">
-        <p14:creationId xmlns:p14="http://schemas.microsoft.com/office/powerpoint/2010/main" val="2919038085"/>
+        <p14:creationId xmlns:p14="http://schemas.microsoft.com/office/powerpoint/2010/main" val="3019143758"/>
       </p:ext>
     </p:extLst>
   </p:cSld>
@@ -2062,13 +4772,7 @@
       </p:grpSpPr>
       <p:sp>
         <p:nvSpPr>
-          <p:cNvPr id="2" name="Title 1">
-            <a:extLst>
-              <a:ext uri="{FF2B5EF4-FFF2-40B4-BE49-F238E27FC236}">
-                <a16:creationId xmlns:a16="http://schemas.microsoft.com/office/drawing/2014/main" id="{1DA7BFCA-8032-27F8-8367-493147B6C2BA}"/>
-              </a:ext>
-            </a:extLst>
-          </p:cNvPr>
+          <p:cNvPr id="2" name="Title 1"/>
           <p:cNvSpPr>
             <a:spLocks noGrp="1"/>
           </p:cNvSpPr>
@@ -2085,19 +4789,13 @@
               <a:rPr lang="en-GB"/>
               <a:t>Click to edit Master title style</a:t>
             </a:r>
-            <a:endParaRPr lang="en-NZ"/>
-          </a:p>
-        </p:txBody>
-      </p:sp>
-      <p:sp>
-        <p:nvSpPr>
-          <p:cNvPr id="3" name="Date Placeholder 2">
-            <a:extLst>
-              <a:ext uri="{FF2B5EF4-FFF2-40B4-BE49-F238E27FC236}">
-                <a16:creationId xmlns:a16="http://schemas.microsoft.com/office/drawing/2014/main" id="{01026F61-BE58-1AD3-BB48-257627B73AB3}"/>
-              </a:ext>
-            </a:extLst>
-          </p:cNvPr>
+            <a:endParaRPr lang="en-US" dirty="0"/>
+          </a:p>
+        </p:txBody>
+      </p:sp>
+      <p:sp>
+        <p:nvSpPr>
+          <p:cNvPr id="7" name="Date Placeholder 2"/>
           <p:cNvSpPr>
             <a:spLocks noGrp="1"/>
           </p:cNvSpPr>
@@ -2112,7 +4810,7 @@
           <a:p>
             <a:fld id="{A23C7EEE-1AD9-4CFE-8AFB-1041F302144F}" type="datetimeFigureOut">
               <a:rPr lang="en-NZ" smtClean="0"/>
-              <a:t>8/09/2026</a:t>
+              <a:t>10/09/2026</a:t>
             </a:fld>
             <a:endParaRPr lang="en-NZ"/>
           </a:p>
@@ -2120,13 +4818,7 @@
       </p:sp>
       <p:sp>
         <p:nvSpPr>
-          <p:cNvPr id="4" name="Footer Placeholder 3">
-            <a:extLst>
-              <a:ext uri="{FF2B5EF4-FFF2-40B4-BE49-F238E27FC236}">
-                <a16:creationId xmlns:a16="http://schemas.microsoft.com/office/drawing/2014/main" id="{5BD21D76-9664-BC37-EAB3-226864BF0826}"/>
-              </a:ext>
-            </a:extLst>
-          </p:cNvPr>
+          <p:cNvPr id="5" name="Footer Placeholder 3"/>
           <p:cNvSpPr>
             <a:spLocks noGrp="1"/>
           </p:cNvSpPr>
@@ -2145,13 +4837,7 @@
       </p:sp>
       <p:sp>
         <p:nvSpPr>
-          <p:cNvPr id="5" name="Slide Number Placeholder 4">
-            <a:extLst>
-              <a:ext uri="{FF2B5EF4-FFF2-40B4-BE49-F238E27FC236}">
-                <a16:creationId xmlns:a16="http://schemas.microsoft.com/office/drawing/2014/main" id="{335C4C82-BE4D-0C7B-E004-65B27AC5312A}"/>
-              </a:ext>
-            </a:extLst>
-          </p:cNvPr>
+          <p:cNvPr id="6" name="Slide Number Placeholder 4"/>
           <p:cNvSpPr>
             <a:spLocks noGrp="1"/>
           </p:cNvSpPr>
@@ -2175,7 +4861,7 @@
     </p:spTree>
     <p:extLst>
       <p:ext uri="{BB962C8B-B14F-4D97-AF65-F5344CB8AC3E}">
-        <p14:creationId xmlns:p14="http://schemas.microsoft.com/office/powerpoint/2010/main" val="2831631060"/>
+        <p14:creationId xmlns:p14="http://schemas.microsoft.com/office/powerpoint/2010/main" val="600997191"/>
       </p:ext>
     </p:extLst>
   </p:cSld>
@@ -2204,13 +4890,7 @@
       </p:grpSpPr>
       <p:sp>
         <p:nvSpPr>
-          <p:cNvPr id="2" name="Date Placeholder 1">
-            <a:extLst>
-              <a:ext uri="{FF2B5EF4-FFF2-40B4-BE49-F238E27FC236}">
-                <a16:creationId xmlns:a16="http://schemas.microsoft.com/office/drawing/2014/main" id="{373A912C-AB5A-7A30-9A8B-AEE3AEC6BC9F}"/>
-              </a:ext>
-            </a:extLst>
-          </p:cNvPr>
+          <p:cNvPr id="7" name="Date Placeholder 1"/>
           <p:cNvSpPr>
             <a:spLocks noGrp="1"/>
           </p:cNvSpPr>
@@ -2225,7 +4905,7 @@
           <a:p>
             <a:fld id="{A23C7EEE-1AD9-4CFE-8AFB-1041F302144F}" type="datetimeFigureOut">
               <a:rPr lang="en-NZ" smtClean="0"/>
-              <a:t>8/09/2026</a:t>
+              <a:t>10/09/2026</a:t>
             </a:fld>
             <a:endParaRPr lang="en-NZ"/>
           </a:p>
@@ -2233,13 +4913,7 @@
       </p:sp>
       <p:sp>
         <p:nvSpPr>
-          <p:cNvPr id="3" name="Footer Placeholder 2">
-            <a:extLst>
-              <a:ext uri="{FF2B5EF4-FFF2-40B4-BE49-F238E27FC236}">
-                <a16:creationId xmlns:a16="http://schemas.microsoft.com/office/drawing/2014/main" id="{338D8574-897E-E551-0406-765E0AC4AEE8}"/>
-              </a:ext>
-            </a:extLst>
-          </p:cNvPr>
+          <p:cNvPr id="5" name="Footer Placeholder 2"/>
           <p:cNvSpPr>
             <a:spLocks noGrp="1"/>
           </p:cNvSpPr>
@@ -2258,13 +4932,7 @@
       </p:sp>
       <p:sp>
         <p:nvSpPr>
-          <p:cNvPr id="4" name="Slide Number Placeholder 3">
-            <a:extLst>
-              <a:ext uri="{FF2B5EF4-FFF2-40B4-BE49-F238E27FC236}">
-                <a16:creationId xmlns:a16="http://schemas.microsoft.com/office/drawing/2014/main" id="{22EDB7D7-85FA-C9DB-7230-51A0E857655A}"/>
-              </a:ext>
-            </a:extLst>
-          </p:cNvPr>
+          <p:cNvPr id="6" name="Slide Number Placeholder 3"/>
           <p:cNvSpPr>
             <a:spLocks noGrp="1"/>
           </p:cNvSpPr>
@@ -2288,7 +4956,7 @@
     </p:spTree>
     <p:extLst>
       <p:ext uri="{BB962C8B-B14F-4D97-AF65-F5344CB8AC3E}">
-        <p14:creationId xmlns:p14="http://schemas.microsoft.com/office/powerpoint/2010/main" val="374894423"/>
+        <p14:creationId xmlns:p14="http://schemas.microsoft.com/office/powerpoint/2010/main" val="671718376"/>
       </p:ext>
     </p:extLst>
   </p:cSld>
@@ -2317,13 +4985,7 @@
       </p:grpSpPr>
       <p:sp>
         <p:nvSpPr>
-          <p:cNvPr id="2" name="Title 1">
-            <a:extLst>
-              <a:ext uri="{FF2B5EF4-FFF2-40B4-BE49-F238E27FC236}">
-                <a16:creationId xmlns:a16="http://schemas.microsoft.com/office/drawing/2014/main" id="{6A2C5335-8E9F-6253-EE0F-70552A388F87}"/>
-              </a:ext>
-            </a:extLst>
-          </p:cNvPr>
+          <p:cNvPr id="2" name="Title 1"/>
           <p:cNvSpPr>
             <a:spLocks noGrp="1"/>
           </p:cNvSpPr>
@@ -2333,15 +4995,15 @@
         </p:nvSpPr>
         <p:spPr>
           <a:xfrm>
-            <a:off x="839788" y="457200"/>
-            <a:ext cx="3932237" cy="1600200"/>
+            <a:off x="1154953" y="1447800"/>
+            <a:ext cx="3401064" cy="1447800"/>
           </a:xfrm>
         </p:spPr>
         <p:txBody>
           <a:bodyPr anchor="b"/>
           <a:lstStyle>
-            <a:lvl1pPr>
-              <a:defRPr sz="3200"/>
+            <a:lvl1pPr algn="l">
+              <a:defRPr sz="2400" b="0"/>
             </a:lvl1pPr>
           </a:lstStyle>
           <a:p>
@@ -2349,19 +5011,13 @@
               <a:rPr lang="en-GB"/>
               <a:t>Click to edit Master title style</a:t>
             </a:r>
-            <a:endParaRPr lang="en-NZ"/>
-          </a:p>
-        </p:txBody>
-      </p:sp>
-      <p:sp>
-        <p:nvSpPr>
-          <p:cNvPr id="3" name="Content Placeholder 2">
-            <a:extLst>
-              <a:ext uri="{FF2B5EF4-FFF2-40B4-BE49-F238E27FC236}">
-                <a16:creationId xmlns:a16="http://schemas.microsoft.com/office/drawing/2014/main" id="{2C4E0281-F50F-1970-3F9B-407E476A3F4E}"/>
-              </a:ext>
-            </a:extLst>
-          </p:cNvPr>
+            <a:endParaRPr lang="en-US" dirty="0"/>
+          </a:p>
+        </p:txBody>
+      </p:sp>
+      <p:sp>
+        <p:nvSpPr>
+          <p:cNvPr id="3" name="Content Placeholder 2"/>
           <p:cNvSpPr>
             <a:spLocks noGrp="1"/>
           </p:cNvSpPr>
@@ -2371,39 +5027,41 @@
         </p:nvSpPr>
         <p:spPr>
           <a:xfrm>
-            <a:off x="5183188" y="987425"/>
-            <a:ext cx="6172200" cy="4873625"/>
+            <a:off x="4784616" y="1447800"/>
+            <a:ext cx="5195997" cy="4572000"/>
           </a:xfrm>
         </p:spPr>
         <p:txBody>
-          <a:bodyPr/>
+          <a:bodyPr anchor="ctr">
+            <a:normAutofit/>
+          </a:bodyPr>
           <a:lstStyle>
             <a:lvl1pPr>
-              <a:defRPr sz="3200"/>
+              <a:defRPr sz="2000"/>
             </a:lvl1pPr>
             <a:lvl2pPr>
-              <a:defRPr sz="2800"/>
+              <a:defRPr sz="1800"/>
             </a:lvl2pPr>
             <a:lvl3pPr>
-              <a:defRPr sz="2400"/>
+              <a:defRPr sz="1600"/>
             </a:lvl3pPr>
             <a:lvl4pPr>
-              <a:defRPr sz="2000"/>
+              <a:defRPr sz="1400"/>
             </a:lvl4pPr>
             <a:lvl5pPr>
-              <a:defRPr sz="2000"/>
+              <a:defRPr sz="1400"/>
             </a:lvl5pPr>
             <a:lvl6pPr>
-              <a:defRPr sz="2000"/>
+              <a:defRPr sz="1400"/>
             </a:lvl6pPr>
             <a:lvl7pPr>
-              <a:defRPr sz="2000"/>
+              <a:defRPr sz="1400"/>
             </a:lvl7pPr>
             <a:lvl8pPr>
-              <a:defRPr sz="2000"/>
+              <a:defRPr sz="1400"/>
             </a:lvl8pPr>
             <a:lvl9pPr>
-              <a:defRPr sz="2000"/>
+              <a:defRPr sz="1400"/>
             </a:lvl9pPr>
           </a:lstStyle>
           <a:p>
@@ -2440,19 +5098,13 @@
               <a:rPr lang="en-GB"/>
               <a:t>Fifth level</a:t>
             </a:r>
-            <a:endParaRPr lang="en-NZ"/>
-          </a:p>
-        </p:txBody>
-      </p:sp>
-      <p:sp>
-        <p:nvSpPr>
-          <p:cNvPr id="4" name="Text Placeholder 3">
-            <a:extLst>
-              <a:ext uri="{FF2B5EF4-FFF2-40B4-BE49-F238E27FC236}">
-                <a16:creationId xmlns:a16="http://schemas.microsoft.com/office/drawing/2014/main" id="{B9F44658-C953-F2EB-52B3-0242AAE0B18B}"/>
-              </a:ext>
-            </a:extLst>
-          </p:cNvPr>
+            <a:endParaRPr lang="en-US" dirty="0"/>
+          </a:p>
+        </p:txBody>
+      </p:sp>
+      <p:sp>
+        <p:nvSpPr>
+          <p:cNvPr id="4" name="Text Placeholder 3"/>
           <p:cNvSpPr>
             <a:spLocks noGrp="1"/>
           </p:cNvSpPr>
@@ -2462,8 +5114,8 @@
         </p:nvSpPr>
         <p:spPr>
           <a:xfrm>
-            <a:off x="839788" y="2057400"/>
-            <a:ext cx="3932237" cy="3811588"/>
+            <a:off x="1154953" y="3129280"/>
+            <a:ext cx="3401063" cy="2895599"/>
           </a:xfrm>
         </p:spPr>
         <p:txBody>
@@ -2471,39 +5123,39 @@
           <a:lstStyle>
             <a:lvl1pPr marL="0" indent="0">
               <a:buNone/>
-              <a:defRPr sz="1600"/>
+              <a:defRPr sz="1400"/>
             </a:lvl1pPr>
             <a:lvl2pPr marL="457200" indent="0">
               <a:buNone/>
-              <a:defRPr sz="1400"/>
+              <a:defRPr sz="1200"/>
             </a:lvl2pPr>
             <a:lvl3pPr marL="914400" indent="0">
               <a:buNone/>
-              <a:defRPr sz="1200"/>
+              <a:defRPr sz="1000"/>
             </a:lvl3pPr>
             <a:lvl4pPr marL="1371600" indent="0">
               <a:buNone/>
-              <a:defRPr sz="1000"/>
+              <a:defRPr sz="900"/>
             </a:lvl4pPr>
             <a:lvl5pPr marL="1828800" indent="0">
               <a:buNone/>
-              <a:defRPr sz="1000"/>
+              <a:defRPr sz="900"/>
             </a:lvl5pPr>
             <a:lvl6pPr marL="2286000" indent="0">
               <a:buNone/>
-              <a:defRPr sz="1000"/>
+              <a:defRPr sz="900"/>
             </a:lvl6pPr>
             <a:lvl7pPr marL="2743200" indent="0">
               <a:buNone/>
-              <a:defRPr sz="1000"/>
+              <a:defRPr sz="900"/>
             </a:lvl7pPr>
             <a:lvl8pPr marL="3200400" indent="0">
               <a:buNone/>
-              <a:defRPr sz="1000"/>
+              <a:defRPr sz="900"/>
             </a:lvl8pPr>
             <a:lvl9pPr marL="3657600" indent="0">
               <a:buNone/>
-              <a:defRPr sz="1000"/>
+              <a:defRPr sz="900"/>
             </a:lvl9pPr>
           </a:lstStyle>
           <a:p>
@@ -2517,13 +5169,7 @@
       </p:sp>
       <p:sp>
         <p:nvSpPr>
-          <p:cNvPr id="5" name="Date Placeholder 4">
-            <a:extLst>
-              <a:ext uri="{FF2B5EF4-FFF2-40B4-BE49-F238E27FC236}">
-                <a16:creationId xmlns:a16="http://schemas.microsoft.com/office/drawing/2014/main" id="{AA6C25D9-BDA7-FC15-4922-985BCE70F45C}"/>
-              </a:ext>
-            </a:extLst>
-          </p:cNvPr>
+          <p:cNvPr id="7" name="Date Placeholder 4"/>
           <p:cNvSpPr>
             <a:spLocks noGrp="1"/>
           </p:cNvSpPr>
@@ -2538,7 +5184,7 @@
           <a:p>
             <a:fld id="{A23C7EEE-1AD9-4CFE-8AFB-1041F302144F}" type="datetimeFigureOut">
               <a:rPr lang="en-NZ" smtClean="0"/>
-              <a:t>8/09/2026</a:t>
+              <a:t>10/09/2026</a:t>
             </a:fld>
             <a:endParaRPr lang="en-NZ"/>
           </a:p>
@@ -2546,13 +5192,7 @@
       </p:sp>
       <p:sp>
         <p:nvSpPr>
-          <p:cNvPr id="6" name="Footer Placeholder 5">
-            <a:extLst>
-              <a:ext uri="{FF2B5EF4-FFF2-40B4-BE49-F238E27FC236}">
-                <a16:creationId xmlns:a16="http://schemas.microsoft.com/office/drawing/2014/main" id="{555E2281-3D71-1AEF-3DB8-5989A3FFA492}"/>
-              </a:ext>
-            </a:extLst>
-          </p:cNvPr>
+          <p:cNvPr id="5" name="Footer Placeholder 5"/>
           <p:cNvSpPr>
             <a:spLocks noGrp="1"/>
           </p:cNvSpPr>
@@ -2571,13 +5211,7 @@
       </p:sp>
       <p:sp>
         <p:nvSpPr>
-          <p:cNvPr id="7" name="Slide Number Placeholder 6">
-            <a:extLst>
-              <a:ext uri="{FF2B5EF4-FFF2-40B4-BE49-F238E27FC236}">
-                <a16:creationId xmlns:a16="http://schemas.microsoft.com/office/drawing/2014/main" id="{401F4307-0434-40DD-FE7D-9B82B34F0997}"/>
-              </a:ext>
-            </a:extLst>
-          </p:cNvPr>
+          <p:cNvPr id="6" name="Slide Number Placeholder 6"/>
           <p:cNvSpPr>
             <a:spLocks noGrp="1"/>
           </p:cNvSpPr>
@@ -2601,7 +5235,7 @@
     </p:spTree>
     <p:extLst>
       <p:ext uri="{BB962C8B-B14F-4D97-AF65-F5344CB8AC3E}">
-        <p14:creationId xmlns:p14="http://schemas.microsoft.com/office/powerpoint/2010/main" val="1884132149"/>
+        <p14:creationId xmlns:p14="http://schemas.microsoft.com/office/powerpoint/2010/main" val="1046841268"/>
       </p:ext>
     </p:extLst>
   </p:cSld>
@@ -2630,13 +5264,7 @@
       </p:grpSpPr>
       <p:sp>
         <p:nvSpPr>
-          <p:cNvPr id="2" name="Title 1">
-            <a:extLst>
-              <a:ext uri="{FF2B5EF4-FFF2-40B4-BE49-F238E27FC236}">
-                <a16:creationId xmlns:a16="http://schemas.microsoft.com/office/drawing/2014/main" id="{0E5B6215-96BC-BCBD-599D-8573C059AF45}"/>
-              </a:ext>
-            </a:extLst>
-          </p:cNvPr>
+          <p:cNvPr id="2" name="Title 1"/>
           <p:cNvSpPr>
             <a:spLocks noGrp="1"/>
           </p:cNvSpPr>
@@ -2646,15 +5274,17 @@
         </p:nvSpPr>
         <p:spPr>
           <a:xfrm>
-            <a:off x="839788" y="457200"/>
-            <a:ext cx="3932237" cy="1600200"/>
+            <a:off x="1153907" y="1854192"/>
+            <a:ext cx="5092906" cy="1574808"/>
           </a:xfrm>
         </p:spPr>
         <p:txBody>
-          <a:bodyPr anchor="b"/>
+          <a:bodyPr anchor="b">
+            <a:normAutofit/>
+          </a:bodyPr>
           <a:lstStyle>
-            <a:lvl1pPr>
-              <a:defRPr sz="3200"/>
+            <a:lvl1pPr algn="l">
+              <a:defRPr sz="3600" b="0"/>
             </a:lvl1pPr>
           </a:lstStyle>
           <a:p>
@@ -2662,21 +5292,15 @@
               <a:rPr lang="en-GB"/>
               <a:t>Click to edit Master title style</a:t>
             </a:r>
-            <a:endParaRPr lang="en-NZ"/>
-          </a:p>
-        </p:txBody>
-      </p:sp>
-      <p:sp>
-        <p:nvSpPr>
-          <p:cNvPr id="3" name="Picture Placeholder 2">
-            <a:extLst>
-              <a:ext uri="{FF2B5EF4-FFF2-40B4-BE49-F238E27FC236}">
-                <a16:creationId xmlns:a16="http://schemas.microsoft.com/office/drawing/2014/main" id="{AF3B036F-F7CE-FF18-E6A3-9D6894D70713}"/>
-              </a:ext>
-            </a:extLst>
-          </p:cNvPr>
-          <p:cNvSpPr>
-            <a:spLocks noGrp="1"/>
+            <a:endParaRPr lang="en-US" dirty="0"/>
+          </a:p>
+        </p:txBody>
+      </p:sp>
+      <p:sp>
+        <p:nvSpPr>
+          <p:cNvPr id="3" name="Picture Placeholder 2"/>
+          <p:cNvSpPr>
+            <a:spLocks noGrp="1" noChangeAspect="1"/>
           </p:cNvSpPr>
           <p:nvPr>
             <p:ph type="pic" idx="1"/>
@@ -2684,118 +5308,132 @@
         </p:nvSpPr>
         <p:spPr>
           <a:xfrm>
-            <a:off x="5183188" y="987425"/>
-            <a:ext cx="6172200" cy="4873625"/>
+            <a:off x="6949546" y="1143000"/>
+            <a:ext cx="3200400" cy="4572000"/>
           </a:xfrm>
+          <a:prstGeom prst="roundRect">
+            <a:avLst>
+              <a:gd name="adj" fmla="val 1858"/>
+            </a:avLst>
+          </a:prstGeom>
+          <a:effectLst>
+            <a:outerShdw blurRad="50800" dist="50800" dir="5400000" algn="tl" rotWithShape="0">
+              <a:srgbClr val="000000">
+                <a:alpha val="43000"/>
+              </a:srgbClr>
+            </a:outerShdw>
+          </a:effectLst>
         </p:spPr>
         <p:txBody>
-          <a:bodyPr/>
+          <a:bodyPr anchor="t">
+            <a:normAutofit/>
+          </a:bodyPr>
           <a:lstStyle>
-            <a:lvl1pPr marL="0" indent="0">
-              <a:buNone/>
-              <a:defRPr sz="3200"/>
-            </a:lvl1pPr>
-            <a:lvl2pPr marL="457200" indent="0">
-              <a:buNone/>
-              <a:defRPr sz="2800"/>
-            </a:lvl2pPr>
-            <a:lvl3pPr marL="914400" indent="0">
-              <a:buNone/>
-              <a:defRPr sz="2400"/>
-            </a:lvl3pPr>
-            <a:lvl4pPr marL="1371600" indent="0">
-              <a:buNone/>
-              <a:defRPr sz="2000"/>
-            </a:lvl4pPr>
-            <a:lvl5pPr marL="1828800" indent="0">
-              <a:buNone/>
-              <a:defRPr sz="2000"/>
-            </a:lvl5pPr>
-            <a:lvl6pPr marL="2286000" indent="0">
-              <a:buNone/>
-              <a:defRPr sz="2000"/>
-            </a:lvl6pPr>
-            <a:lvl7pPr marL="2743200" indent="0">
-              <a:buNone/>
-              <a:defRPr sz="2000"/>
-            </a:lvl7pPr>
-            <a:lvl8pPr marL="3200400" indent="0">
-              <a:buNone/>
-              <a:defRPr sz="2000"/>
-            </a:lvl8pPr>
-            <a:lvl9pPr marL="3657600" indent="0">
-              <a:buNone/>
-              <a:defRPr sz="2000"/>
-            </a:lvl9pPr>
-          </a:lstStyle>
-          <a:p>
-            <a:endParaRPr lang="en-NZ"/>
-          </a:p>
-        </p:txBody>
-      </p:sp>
-      <p:sp>
-        <p:nvSpPr>
-          <p:cNvPr id="4" name="Text Placeholder 3">
-            <a:extLst>
-              <a:ext uri="{FF2B5EF4-FFF2-40B4-BE49-F238E27FC236}">
-                <a16:creationId xmlns:a16="http://schemas.microsoft.com/office/drawing/2014/main" id="{FADA4F50-F2F4-2A63-583B-BC2390879D02}"/>
-              </a:ext>
-            </a:extLst>
-          </p:cNvPr>
-          <p:cNvSpPr>
-            <a:spLocks noGrp="1"/>
-          </p:cNvSpPr>
-          <p:nvPr>
-            <p:ph type="body" sz="half" idx="2"/>
-          </p:nvPr>
-        </p:nvSpPr>
-        <p:spPr>
-          <a:xfrm>
-            <a:off x="839788" y="2057400"/>
-            <a:ext cx="3932237" cy="3811588"/>
-          </a:xfrm>
-        </p:spPr>
-        <p:txBody>
-          <a:bodyPr/>
-          <a:lstStyle>
-            <a:lvl1pPr marL="0" indent="0">
+            <a:lvl1pPr marL="0" indent="0" algn="ctr">
               <a:buNone/>
               <a:defRPr sz="1600"/>
             </a:lvl1pPr>
             <a:lvl2pPr marL="457200" indent="0">
               <a:buNone/>
-              <a:defRPr sz="1400"/>
+              <a:defRPr sz="1600"/>
             </a:lvl2pPr>
             <a:lvl3pPr marL="914400" indent="0">
               <a:buNone/>
-              <a:defRPr sz="1200"/>
+              <a:defRPr sz="1600"/>
             </a:lvl3pPr>
             <a:lvl4pPr marL="1371600" indent="0">
               <a:buNone/>
-              <a:defRPr sz="1000"/>
+              <a:defRPr sz="1600"/>
             </a:lvl4pPr>
             <a:lvl5pPr marL="1828800" indent="0">
               <a:buNone/>
-              <a:defRPr sz="1000"/>
+              <a:defRPr sz="1600"/>
             </a:lvl5pPr>
             <a:lvl6pPr marL="2286000" indent="0">
               <a:buNone/>
-              <a:defRPr sz="1000"/>
+              <a:defRPr sz="1600"/>
             </a:lvl6pPr>
             <a:lvl7pPr marL="2743200" indent="0">
               <a:buNone/>
-              <a:defRPr sz="1000"/>
+              <a:defRPr sz="1600"/>
             </a:lvl7pPr>
             <a:lvl8pPr marL="3200400" indent="0">
               <a:buNone/>
-              <a:defRPr sz="1000"/>
+              <a:defRPr sz="1600"/>
             </a:lvl8pPr>
             <a:lvl9pPr marL="3657600" indent="0">
               <a:buNone/>
-              <a:defRPr sz="1000"/>
+              <a:defRPr sz="1600"/>
             </a:lvl9pPr>
           </a:lstStyle>
           <a:p>
+            <a:r>
+              <a:rPr lang="en-GB"/>
+              <a:t>Click icon to add picture</a:t>
+            </a:r>
+            <a:endParaRPr lang="en-US" dirty="0"/>
+          </a:p>
+        </p:txBody>
+      </p:sp>
+      <p:sp>
+        <p:nvSpPr>
+          <p:cNvPr id="4" name="Text Placeholder 3"/>
+          <p:cNvSpPr>
+            <a:spLocks noGrp="1"/>
+          </p:cNvSpPr>
+          <p:nvPr>
+            <p:ph type="body" sz="half" idx="2"/>
+          </p:nvPr>
+        </p:nvSpPr>
+        <p:spPr>
+          <a:xfrm>
+            <a:off x="1154954" y="3657600"/>
+            <a:ext cx="5084979" cy="1371600"/>
+          </a:xfrm>
+        </p:spPr>
+        <p:txBody>
+          <a:bodyPr>
+            <a:normAutofit/>
+          </a:bodyPr>
+          <a:lstStyle>
+            <a:lvl1pPr marL="0" indent="0">
+              <a:buNone/>
+              <a:defRPr sz="1400"/>
+            </a:lvl1pPr>
+            <a:lvl2pPr marL="457200" indent="0">
+              <a:buNone/>
+              <a:defRPr sz="1200"/>
+            </a:lvl2pPr>
+            <a:lvl3pPr marL="914400" indent="0">
+              <a:buNone/>
+              <a:defRPr sz="1000"/>
+            </a:lvl3pPr>
+            <a:lvl4pPr marL="1371600" indent="0">
+              <a:buNone/>
+              <a:defRPr sz="900"/>
+            </a:lvl4pPr>
+            <a:lvl5pPr marL="1828800" indent="0">
+              <a:buNone/>
+              <a:defRPr sz="900"/>
+            </a:lvl5pPr>
+            <a:lvl6pPr marL="2286000" indent="0">
+              <a:buNone/>
+              <a:defRPr sz="900"/>
+            </a:lvl6pPr>
+            <a:lvl7pPr marL="2743200" indent="0">
+              <a:buNone/>
+              <a:defRPr sz="900"/>
+            </a:lvl7pPr>
+            <a:lvl8pPr marL="3200400" indent="0">
+              <a:buNone/>
+              <a:defRPr sz="900"/>
+            </a:lvl8pPr>
+            <a:lvl9pPr marL="3657600" indent="0">
+              <a:buNone/>
+              <a:defRPr sz="900"/>
+            </a:lvl9pPr>
+          </a:lstStyle>
+          <a:p>
             <a:pPr lvl="0"/>
             <a:r>
               <a:rPr lang="en-GB"/>
@@ -2806,13 +5444,7 @@
       </p:sp>
       <p:sp>
         <p:nvSpPr>
-          <p:cNvPr id="5" name="Date Placeholder 4">
-            <a:extLst>
-              <a:ext uri="{FF2B5EF4-FFF2-40B4-BE49-F238E27FC236}">
-                <a16:creationId xmlns:a16="http://schemas.microsoft.com/office/drawing/2014/main" id="{09C30E14-7115-1289-63C1-6CC8E82B102C}"/>
-              </a:ext>
-            </a:extLst>
-          </p:cNvPr>
+          <p:cNvPr id="5" name="Date Placeholder 4"/>
           <p:cNvSpPr>
             <a:spLocks noGrp="1"/>
           </p:cNvSpPr>
@@ -2827,7 +5459,7 @@
           <a:p>
             <a:fld id="{A23C7EEE-1AD9-4CFE-8AFB-1041F302144F}" type="datetimeFigureOut">
               <a:rPr lang="en-NZ" smtClean="0"/>
-              <a:t>8/09/2026</a:t>
+              <a:t>10/09/2026</a:t>
             </a:fld>
             <a:endParaRPr lang="en-NZ"/>
           </a:p>
@@ -2835,13 +5467,7 @@
       </p:sp>
       <p:sp>
         <p:nvSpPr>
-          <p:cNvPr id="6" name="Footer Placeholder 5">
-            <a:extLst>
-              <a:ext uri="{FF2B5EF4-FFF2-40B4-BE49-F238E27FC236}">
-                <a16:creationId xmlns:a16="http://schemas.microsoft.com/office/drawing/2014/main" id="{C7BA2384-6FD8-61A3-4C32-3693D8EB259A}"/>
-              </a:ext>
-            </a:extLst>
-          </p:cNvPr>
+          <p:cNvPr id="6" name="Footer Placeholder 5"/>
           <p:cNvSpPr>
             <a:spLocks noGrp="1"/>
           </p:cNvSpPr>
@@ -2860,13 +5486,7 @@
       </p:sp>
       <p:sp>
         <p:nvSpPr>
-          <p:cNvPr id="7" name="Slide Number Placeholder 6">
-            <a:extLst>
-              <a:ext uri="{FF2B5EF4-FFF2-40B4-BE49-F238E27FC236}">
-                <a16:creationId xmlns:a16="http://schemas.microsoft.com/office/drawing/2014/main" id="{1844E3EF-BB44-5D67-1F97-432382A0FECF}"/>
-              </a:ext>
-            </a:extLst>
-          </p:cNvPr>
+          <p:cNvPr id="7" name="Slide Number Placeholder 6"/>
           <p:cNvSpPr>
             <a:spLocks noGrp="1"/>
           </p:cNvSpPr>
@@ -2890,7 +5510,7 @@
     </p:spTree>
     <p:extLst>
       <p:ext uri="{BB962C8B-B14F-4D97-AF65-F5344CB8AC3E}">
-        <p14:creationId xmlns:p14="http://schemas.microsoft.com/office/powerpoint/2010/main" val="1799470457"/>
+        <p14:creationId xmlns:p14="http://schemas.microsoft.com/office/powerpoint/2010/main" val="3529243228"/>
       </p:ext>
     </p:extLst>
   </p:cSld>
@@ -2904,8 +5524,8 @@
 <p:sldMaster xmlns:a="http://schemas.openxmlformats.org/drawingml/2006/main" xmlns:r="http://schemas.openxmlformats.org/officeDocument/2006/relationships" xmlns:p="http://schemas.openxmlformats.org/presentationml/2006/main">
   <p:cSld>
     <p:bg>
-      <p:bgRef idx="1001">
-        <a:schemeClr val="bg1"/>
+      <p:bgRef idx="1003">
+        <a:schemeClr val="bg2"/>
       </p:bgRef>
     </p:bg>
     <p:spTree>
@@ -2922,146 +5542,344 @@
           <a:chExt cx="0" cy="0"/>
         </a:xfrm>
       </p:grpSpPr>
-      <p:sp>
-        <p:nvSpPr>
-          <p:cNvPr id="2" name="Title Placeholder 1">
+      <p:pic>
+        <p:nvPicPr>
+          <p:cNvPr id="8" name="Picture 7"/>
+          <p:cNvPicPr>
+            <a:picLocks noChangeAspect="1"/>
+          </p:cNvPicPr>
+          <p:nvPr/>
+        </p:nvPicPr>
+        <p:blipFill rotWithShape="1">
+          <a:blip r:embed="rId19">
             <a:extLst>
-              <a:ext uri="{FF2B5EF4-FFF2-40B4-BE49-F238E27FC236}">
-                <a16:creationId xmlns:a16="http://schemas.microsoft.com/office/drawing/2014/main" id="{B94D1693-AD3B-3C09-35A5-FC00B171B78A}"/>
+              <a:ext uri="{28A0092B-C50C-407E-A947-70E740481C1C}">
+                <a14:useLocalDpi xmlns:a14="http://schemas.microsoft.com/office/drawing/2010/main" val="0"/>
               </a:ext>
             </a:extLst>
-          </p:cNvPr>
-          <p:cNvSpPr>
-            <a:spLocks noGrp="1"/>
-          </p:cNvSpPr>
-          <p:nvPr>
-            <p:ph type="title"/>
-          </p:nvPr>
-        </p:nvSpPr>
+          </a:blip>
+          <a:srcRect l="3613"/>
+          <a:stretch/>
+        </p:blipFill>
         <p:spPr>
           <a:xfrm>
-            <a:off x="838200" y="365125"/>
-            <a:ext cx="10515600" cy="1325563"/>
+            <a:off x="0" y="2669685"/>
+            <a:ext cx="4037012" cy="4188315"/>
           </a:xfrm>
           <a:prstGeom prst="rect">
             <a:avLst/>
           </a:prstGeom>
         </p:spPr>
-        <p:txBody>
-          <a:bodyPr vert="horz" lIns="91440" tIns="45720" rIns="91440" bIns="45720" rtlCol="0" anchor="ctr">
-            <a:normAutofit/>
-          </a:bodyPr>
-          <a:lstStyle/>
-          <a:p>
-            <a:r>
-              <a:rPr lang="en-GB"/>
-              <a:t>Click to edit Master title style</a:t>
-            </a:r>
-            <a:endParaRPr lang="en-NZ"/>
-          </a:p>
-        </p:txBody>
-      </p:sp>
-      <p:sp>
-        <p:nvSpPr>
-          <p:cNvPr id="3" name="Text Placeholder 2">
+      </p:pic>
+      <p:pic>
+        <p:nvPicPr>
+          <p:cNvPr id="7" name="Picture 6"/>
+          <p:cNvPicPr>
+            <a:picLocks noChangeAspect="1"/>
+          </p:cNvPicPr>
+          <p:nvPr/>
+        </p:nvPicPr>
+        <p:blipFill rotWithShape="1">
+          <a:blip r:embed="rId20">
             <a:extLst>
-              <a:ext uri="{FF2B5EF4-FFF2-40B4-BE49-F238E27FC236}">
-                <a16:creationId xmlns:a16="http://schemas.microsoft.com/office/drawing/2014/main" id="{95BDD769-7438-947B-35DD-F1843257DA47}"/>
+              <a:ext uri="{28A0092B-C50C-407E-A947-70E740481C1C}">
+                <a14:useLocalDpi xmlns:a14="http://schemas.microsoft.com/office/drawing/2010/main" val="0"/>
               </a:ext>
             </a:extLst>
-          </p:cNvPr>
-          <p:cNvSpPr>
-            <a:spLocks noGrp="1"/>
-          </p:cNvSpPr>
-          <p:nvPr>
-            <p:ph type="body" idx="1"/>
-          </p:nvPr>
-        </p:nvSpPr>
+          </a:blip>
+          <a:srcRect l="35640"/>
+          <a:stretch/>
+        </p:blipFill>
         <p:spPr>
           <a:xfrm>
-            <a:off x="838200" y="1825625"/>
-            <a:ext cx="10515600" cy="4351338"/>
+            <a:off x="0" y="2892347"/>
+            <a:ext cx="1522412" cy="2365453"/>
           </a:xfrm>
           <a:prstGeom prst="rect">
             <a:avLst/>
           </a:prstGeom>
         </p:spPr>
-        <p:txBody>
-          <a:bodyPr vert="horz" lIns="91440" tIns="45720" rIns="91440" bIns="45720" rtlCol="0">
-            <a:normAutofit/>
-          </a:bodyPr>
-          <a:lstStyle/>
-          <a:p>
-            <a:pPr lvl="0"/>
-            <a:r>
-              <a:rPr lang="en-GB"/>
-              <a:t>Click to edit Master text styles</a:t>
-            </a:r>
-          </a:p>
-          <a:p>
-            <a:pPr lvl="1"/>
-            <a:r>
-              <a:rPr lang="en-GB"/>
-              <a:t>Second level</a:t>
-            </a:r>
-          </a:p>
-          <a:p>
-            <a:pPr lvl="2"/>
-            <a:r>
-              <a:rPr lang="en-GB"/>
-              <a:t>Third level</a:t>
-            </a:r>
-          </a:p>
-          <a:p>
-            <a:pPr lvl="3"/>
-            <a:r>
-              <a:rPr lang="en-GB"/>
-              <a:t>Fourth level</a:t>
-            </a:r>
-          </a:p>
-          <a:p>
-            <a:pPr lvl="4"/>
-            <a:r>
-              <a:rPr lang="en-GB"/>
-              <a:t>Fifth level</a:t>
-            </a:r>
-            <a:endParaRPr lang="en-NZ"/>
-          </a:p>
-        </p:txBody>
-      </p:sp>
-      <p:sp>
-        <p:nvSpPr>
-          <p:cNvPr id="4" name="Date Placeholder 3">
+      </p:pic>
+      <p:sp>
+        <p:nvSpPr>
+          <p:cNvPr id="16" name="Oval 15"/>
+          <p:cNvSpPr/>
+          <p:nvPr/>
+        </p:nvSpPr>
+        <p:spPr>
+          <a:xfrm>
+            <a:off x="8609012" y="1676400"/>
+            <a:ext cx="2819400" cy="2819400"/>
+          </a:xfrm>
+          <a:prstGeom prst="ellipse">
+            <a:avLst/>
+          </a:prstGeom>
+          <a:gradFill flip="none" rotWithShape="1">
+            <a:gsLst>
+              <a:gs pos="0">
+                <a:schemeClr val="bg2">
+                  <a:lumMod val="60000"/>
+                  <a:lumOff val="40000"/>
+                  <a:alpha val="7000"/>
+                </a:schemeClr>
+              </a:gs>
+              <a:gs pos="69000">
+                <a:schemeClr val="bg2">
+                  <a:lumMod val="60000"/>
+                  <a:lumOff val="40000"/>
+                  <a:alpha val="0"/>
+                </a:schemeClr>
+              </a:gs>
+              <a:gs pos="36000">
+                <a:schemeClr val="bg2">
+                  <a:lumMod val="60000"/>
+                  <a:lumOff val="40000"/>
+                  <a:alpha val="6000"/>
+                </a:schemeClr>
+              </a:gs>
+            </a:gsLst>
+            <a:path path="circle">
+              <a:fillToRect l="50000" t="50000" r="50000" b="50000"/>
+            </a:path>
+            <a:tileRect/>
+          </a:gradFill>
+          <a:ln>
+            <a:noFill/>
+          </a:ln>
+          <a:effectLst/>
+        </p:spPr>
+        <p:style>
+          <a:lnRef idx="1">
+            <a:schemeClr val="accent1"/>
+          </a:lnRef>
+          <a:fillRef idx="3">
+            <a:schemeClr val="accent1"/>
+          </a:fillRef>
+          <a:effectRef idx="2">
+            <a:schemeClr val="accent1"/>
+          </a:effectRef>
+          <a:fontRef idx="minor">
+            <a:schemeClr val="lt1"/>
+          </a:fontRef>
+        </p:style>
+      </p:sp>
+      <p:pic>
+        <p:nvPicPr>
+          <p:cNvPr id="9" name="Picture 8"/>
+          <p:cNvPicPr>
+            <a:picLocks noChangeAspect="1"/>
+          </p:cNvPicPr>
+          <p:nvPr/>
+        </p:nvPicPr>
+        <p:blipFill rotWithShape="1">
+          <a:blip r:embed="rId21">
             <a:extLst>
-              <a:ext uri="{FF2B5EF4-FFF2-40B4-BE49-F238E27FC236}">
-                <a16:creationId xmlns:a16="http://schemas.microsoft.com/office/drawing/2014/main" id="{83F50D7D-8D22-0D8B-C699-B1C5E52DD39B}"/>
+              <a:ext uri="{28A0092B-C50C-407E-A947-70E740481C1C}">
+                <a14:useLocalDpi xmlns:a14="http://schemas.microsoft.com/office/drawing/2010/main" val="0"/>
               </a:ext>
             </a:extLst>
-          </p:cNvPr>
-          <p:cNvSpPr>
-            <a:spLocks noGrp="1"/>
-          </p:cNvSpPr>
-          <p:nvPr>
-            <p:ph type="dt" sz="half" idx="2"/>
-          </p:nvPr>
-        </p:nvSpPr>
+          </a:blip>
+          <a:srcRect t="28813"/>
+          <a:stretch/>
+        </p:blipFill>
         <p:spPr>
           <a:xfrm>
-            <a:off x="838200" y="6356350"/>
-            <a:ext cx="2743200" cy="365125"/>
+            <a:off x="7999412" y="0"/>
+            <a:ext cx="1603387" cy="1141407"/>
           </a:xfrm>
           <a:prstGeom prst="rect">
             <a:avLst/>
           </a:prstGeom>
         </p:spPr>
-        <p:txBody>
-          <a:bodyPr vert="horz" lIns="91440" tIns="45720" rIns="91440" bIns="45720" rtlCol="0" anchor="ctr"/>
+      </p:pic>
+      <p:pic>
+        <p:nvPicPr>
+          <p:cNvPr id="10" name="Picture 9"/>
+          <p:cNvPicPr>
+            <a:picLocks noChangeAspect="1"/>
+          </p:cNvPicPr>
+          <p:nvPr/>
+        </p:nvPicPr>
+        <p:blipFill rotWithShape="1">
+          <a:blip r:embed="rId22">
+            <a:extLst>
+              <a:ext uri="{28A0092B-C50C-407E-A947-70E740481C1C}">
+                <a14:useLocalDpi xmlns:a14="http://schemas.microsoft.com/office/drawing/2010/main" val="0"/>
+              </a:ext>
+            </a:extLst>
+          </a:blip>
+          <a:srcRect b="23320"/>
+          <a:stretch/>
+        </p:blipFill>
+        <p:spPr>
+          <a:xfrm>
+            <a:off x="8605878" y="6096000"/>
+            <a:ext cx="993734" cy="762000"/>
+          </a:xfrm>
+          <a:prstGeom prst="rect">
+            <a:avLst/>
+          </a:prstGeom>
+        </p:spPr>
+      </p:pic>
+      <p:sp>
+        <p:nvSpPr>
+          <p:cNvPr id="14" name="Rectangle 13"/>
+          <p:cNvSpPr/>
+          <p:nvPr/>
+        </p:nvSpPr>
+        <p:spPr>
+          <a:xfrm>
+            <a:off x="10437812" y="0"/>
+            <a:ext cx="685800" cy="1143000"/>
+          </a:xfrm>
+          <a:prstGeom prst="rect">
+            <a:avLst/>
+          </a:prstGeom>
+          <a:solidFill>
+            <a:schemeClr val="accent1"/>
+          </a:solidFill>
+          <a:ln>
+            <a:noFill/>
+          </a:ln>
+        </p:spPr>
+        <p:style>
+          <a:lnRef idx="1">
+            <a:schemeClr val="accent1"/>
+          </a:lnRef>
+          <a:fillRef idx="3">
+            <a:schemeClr val="accent1"/>
+          </a:fillRef>
+          <a:effectRef idx="2">
+            <a:schemeClr val="accent1"/>
+          </a:effectRef>
+          <a:fontRef idx="minor">
+            <a:schemeClr val="lt1"/>
+          </a:fontRef>
+        </p:style>
+      </p:sp>
+      <p:sp>
+        <p:nvSpPr>
+          <p:cNvPr id="2" name="Title Placeholder 1"/>
+          <p:cNvSpPr>
+            <a:spLocks noGrp="1"/>
+          </p:cNvSpPr>
+          <p:nvPr>
+            <p:ph type="title"/>
+          </p:nvPr>
+        </p:nvSpPr>
+        <p:spPr>
+          <a:xfrm>
+            <a:off x="646111" y="452718"/>
+            <a:ext cx="9404723" cy="1400530"/>
+          </a:xfrm>
+          <a:prstGeom prst="rect">
+            <a:avLst/>
+          </a:prstGeom>
+        </p:spPr>
+        <p:txBody>
+          <a:bodyPr vert="horz" lIns="91440" tIns="45720" rIns="91440" bIns="45720" rtlCol="0" anchor="t">
+            <a:noAutofit/>
+          </a:bodyPr>
+          <a:lstStyle/>
+          <a:p>
+            <a:r>
+              <a:rPr lang="en-GB"/>
+              <a:t>Click to edit Master title style</a:t>
+            </a:r>
+            <a:endParaRPr lang="en-US" dirty="0"/>
+          </a:p>
+        </p:txBody>
+      </p:sp>
+      <p:sp>
+        <p:nvSpPr>
+          <p:cNvPr id="3" name="Text Placeholder 2"/>
+          <p:cNvSpPr>
+            <a:spLocks noGrp="1"/>
+          </p:cNvSpPr>
+          <p:nvPr>
+            <p:ph type="body" idx="1"/>
+          </p:nvPr>
+        </p:nvSpPr>
+        <p:spPr>
+          <a:xfrm>
+            <a:off x="1103312" y="2052918"/>
+            <a:ext cx="8946541" cy="4195481"/>
+          </a:xfrm>
+          <a:prstGeom prst="rect">
+            <a:avLst/>
+          </a:prstGeom>
+        </p:spPr>
+        <p:txBody>
+          <a:bodyPr vert="horz" lIns="91440" tIns="45720" rIns="91440" bIns="45720" rtlCol="0">
+            <a:normAutofit/>
+          </a:bodyPr>
+          <a:lstStyle/>
+          <a:p>
+            <a:pPr lvl="0"/>
+            <a:r>
+              <a:rPr lang="en-GB"/>
+              <a:t>Click to edit Master text styles</a:t>
+            </a:r>
+          </a:p>
+          <a:p>
+            <a:pPr lvl="1"/>
+            <a:r>
+              <a:rPr lang="en-GB"/>
+              <a:t>Second level</a:t>
+            </a:r>
+          </a:p>
+          <a:p>
+            <a:pPr lvl="2"/>
+            <a:r>
+              <a:rPr lang="en-GB"/>
+              <a:t>Third level</a:t>
+            </a:r>
+          </a:p>
+          <a:p>
+            <a:pPr lvl="3"/>
+            <a:r>
+              <a:rPr lang="en-GB"/>
+              <a:t>Fourth level</a:t>
+            </a:r>
+          </a:p>
+          <a:p>
+            <a:pPr lvl="4"/>
+            <a:r>
+              <a:rPr lang="en-GB"/>
+              <a:t>Fifth level</a:t>
+            </a:r>
+            <a:endParaRPr lang="en-US" dirty="0"/>
+          </a:p>
+        </p:txBody>
+      </p:sp>
+      <p:sp>
+        <p:nvSpPr>
+          <p:cNvPr id="4" name="Date Placeholder 3"/>
+          <p:cNvSpPr>
+            <a:spLocks noGrp="1"/>
+          </p:cNvSpPr>
+          <p:nvPr>
+            <p:ph type="dt" sz="half" idx="2"/>
+          </p:nvPr>
+        </p:nvSpPr>
+        <p:spPr>
+          <a:xfrm rot="5400000">
+            <a:off x="10155639" y="1790701"/>
+            <a:ext cx="990599" cy="304799"/>
+          </a:xfrm>
+          <a:prstGeom prst="rect">
+            <a:avLst/>
+          </a:prstGeom>
+        </p:spPr>
+        <p:txBody>
+          <a:bodyPr vert="horz" lIns="91440" tIns="45720" rIns="91440" bIns="45720" rtlCol="0" anchor="t"/>
           <a:lstStyle>
             <a:lvl1pPr algn="l">
-              <a:defRPr sz="1200">
+              <a:defRPr sz="1100" b="0" i="0">
                 <a:solidFill>
                   <a:schemeClr val="tx1">
-                    <a:tint val="82000"/>
+                    <a:tint val="75000"/>
+                    <a:alpha val="60000"/>
                   </a:schemeClr>
                 </a:solidFill>
               </a:defRPr>
@@ -3070,7 +5888,7 @@
           <a:p>
             <a:fld id="{A23C7EEE-1AD9-4CFE-8AFB-1041F302144F}" type="datetimeFigureOut">
               <a:rPr lang="en-NZ" smtClean="0"/>
-              <a:t>8/09/2026</a:t>
+              <a:t>10/09/2026</a:t>
             </a:fld>
             <a:endParaRPr lang="en-NZ"/>
           </a:p>
@@ -3078,13 +5896,7 @@
       </p:sp>
       <p:sp>
         <p:nvSpPr>
-          <p:cNvPr id="5" name="Footer Placeholder 4">
-            <a:extLst>
-              <a:ext uri="{FF2B5EF4-FFF2-40B4-BE49-F238E27FC236}">
-                <a16:creationId xmlns:a16="http://schemas.microsoft.com/office/drawing/2014/main" id="{16C15E78-48AD-6C0F-1790-3873F1557404}"/>
-              </a:ext>
-            </a:extLst>
-          </p:cNvPr>
+          <p:cNvPr id="5" name="Footer Placeholder 4"/>
           <p:cNvSpPr>
             <a:spLocks noGrp="1"/>
           </p:cNvSpPr>
@@ -3093,22 +5905,23 @@
           </p:nvPr>
         </p:nvSpPr>
         <p:spPr>
-          <a:xfrm>
-            <a:off x="4038600" y="6356350"/>
-            <a:ext cx="4114800" cy="365125"/>
+          <a:xfrm rot="5400000">
+            <a:off x="8951573" y="3225297"/>
+            <a:ext cx="3859795" cy="304801"/>
           </a:xfrm>
           <a:prstGeom prst="rect">
             <a:avLst/>
           </a:prstGeom>
         </p:spPr>
         <p:txBody>
-          <a:bodyPr vert="horz" lIns="91440" tIns="45720" rIns="91440" bIns="45720" rtlCol="0" anchor="ctr"/>
+          <a:bodyPr vert="horz" lIns="91440" tIns="45720" rIns="91440" bIns="45720" rtlCol="0" anchor="b"/>
           <a:lstStyle>
-            <a:lvl1pPr algn="ctr">
-              <a:defRPr sz="1200">
+            <a:lvl1pPr algn="l">
+              <a:defRPr sz="1100" b="0" i="0">
                 <a:solidFill>
                   <a:schemeClr val="tx1">
-                    <a:tint val="82000"/>
+                    <a:tint val="75000"/>
+                    <a:alpha val="60000"/>
                   </a:schemeClr>
                 </a:solidFill>
               </a:defRPr>
@@ -3121,13 +5934,7 @@
       </p:sp>
       <p:sp>
         <p:nvSpPr>
-          <p:cNvPr id="6" name="Slide Number Placeholder 5">
-            <a:extLst>
-              <a:ext uri="{FF2B5EF4-FFF2-40B4-BE49-F238E27FC236}">
-                <a16:creationId xmlns:a16="http://schemas.microsoft.com/office/drawing/2014/main" id="{CD147A3A-77AB-3EBF-91C1-780189AAD59A}"/>
-              </a:ext>
-            </a:extLst>
-          </p:cNvPr>
+          <p:cNvPr id="6" name="Slide Number Placeholder 5"/>
           <p:cNvSpPr>
             <a:spLocks noGrp="1"/>
           </p:cNvSpPr>
@@ -3135,23 +5942,23 @@
             <p:ph type="sldNum" sz="quarter" idx="4"/>
           </p:nvPr>
         </p:nvSpPr>
-        <p:spPr>
+        <p:spPr bwMode="gray">
           <a:xfrm>
-            <a:off x="8610600" y="6356350"/>
-            <a:ext cx="2743200" cy="365125"/>
+            <a:off x="10352540" y="295729"/>
+            <a:ext cx="838199" cy="767687"/>
           </a:xfrm>
           <a:prstGeom prst="rect">
             <a:avLst/>
           </a:prstGeom>
         </p:spPr>
         <p:txBody>
-          <a:bodyPr vert="horz" lIns="91440" tIns="45720" rIns="91440" bIns="45720" rtlCol="0" anchor="ctr"/>
+          <a:bodyPr vert="horz" lIns="91440" tIns="45720" rIns="91440" bIns="45720" rtlCol="0" anchor="b"/>
           <a:lstStyle>
-            <a:lvl1pPr algn="r">
-              <a:defRPr sz="1200">
+            <a:lvl1pPr algn="ctr">
+              <a:defRPr sz="2800" b="0" i="0">
                 <a:solidFill>
                   <a:schemeClr val="tx1">
-                    <a:tint val="82000"/>
+                    <a:tint val="75000"/>
                   </a:schemeClr>
                 </a:solidFill>
               </a:defRPr>
@@ -3169,35 +5976,121 @@
     </p:spTree>
     <p:extLst>
       <p:ext uri="{BB962C8B-B14F-4D97-AF65-F5344CB8AC3E}">
-        <p14:creationId xmlns:p14="http://schemas.microsoft.com/office/powerpoint/2010/main" val="374490428"/>
+        <p14:creationId xmlns:p14="http://schemas.microsoft.com/office/powerpoint/2010/main" val="3632862688"/>
       </p:ext>
     </p:extLst>
   </p:cSld>
-  <p:clrMap bg1="lt1" tx1="dk1" bg2="lt2" tx2="dk2" accent1="accent1" accent2="accent2" accent3="accent3" accent4="accent4" accent5="accent5" accent6="accent6" hlink="hlink" folHlink="folHlink"/>
+  <p:clrMap bg1="dk1" tx1="lt1" bg2="dk2" tx2="lt2" accent1="accent1" accent2="accent2" accent3="accent3" accent4="accent4" accent5="accent5" accent6="accent6" hlink="hlink" folHlink="folHlink"/>
   <p:sldLayoutIdLst>
-    <p:sldLayoutId id="2147483649" r:id="rId1"/>
-    <p:sldLayoutId id="2147483650" r:id="rId2"/>
-    <p:sldLayoutId id="2147483651" r:id="rId3"/>
-    <p:sldLayoutId id="2147483652" r:id="rId4"/>
-    <p:sldLayoutId id="2147483653" r:id="rId5"/>
-    <p:sldLayoutId id="2147483654" r:id="rId6"/>
-    <p:sldLayoutId id="2147483655" r:id="rId7"/>
-    <p:sldLayoutId id="2147483656" r:id="rId8"/>
-    <p:sldLayoutId id="2147483657" r:id="rId9"/>
-    <p:sldLayoutId id="2147483658" r:id="rId10"/>
-    <p:sldLayoutId id="2147483659" r:id="rId11"/>
+    <p:sldLayoutId id="2147483691" r:id="rId1"/>
+    <p:sldLayoutId id="2147483692" r:id="rId2"/>
+    <p:sldLayoutId id="2147483693" r:id="rId3"/>
+    <p:sldLayoutId id="2147483694" r:id="rId4"/>
+    <p:sldLayoutId id="2147483695" r:id="rId5"/>
+    <p:sldLayoutId id="2147483696" r:id="rId6"/>
+    <p:sldLayoutId id="2147483697" r:id="rId7"/>
+    <p:sldLayoutId id="2147483698" r:id="rId8"/>
+    <p:sldLayoutId id="2147483699" r:id="rId9"/>
+    <p:sldLayoutId id="2147483700" r:id="rId10"/>
+    <p:sldLayoutId id="2147483701" r:id="rId11"/>
+    <p:sldLayoutId id="2147483702" r:id="rId12"/>
+    <p:sldLayoutId id="2147483703" r:id="rId13"/>
+    <p:sldLayoutId id="2147483704" r:id="rId14"/>
+    <p:sldLayoutId id="2147483705" r:id="rId15"/>
+    <p:sldLayoutId id="2147483706" r:id="rId16"/>
+    <p:sldLayoutId id="2147483707" r:id="rId17"/>
   </p:sldLayoutIdLst>
   <p:txStyles>
     <p:titleStyle>
-      <a:lvl1pPr algn="l" defTabSz="914400" rtl="0" eaLnBrk="1" latinLnBrk="0" hangingPunct="1">
-        <a:lnSpc>
-          <a:spcPct val="90000"/>
-        </a:lnSpc>
+      <a:lvl1pPr algn="l" defTabSz="457200" rtl="0" eaLnBrk="1" latinLnBrk="0" hangingPunct="1">
         <a:spcBef>
           <a:spcPct val="0"/>
         </a:spcBef>
         <a:buNone/>
-        <a:defRPr sz="4400" kern="1200">
+        <a:defRPr sz="4200" b="0" i="0" kern="1200">
+          <a:solidFill>
+            <a:schemeClr val="tx2"/>
+          </a:solidFill>
+          <a:latin typeface="+mj-lt"/>
+          <a:ea typeface="+mj-ea"/>
+          <a:cs typeface="+mj-cs"/>
+        </a:defRPr>
+      </a:lvl1pPr>
+      <a:lvl2pPr eaLnBrk="1" hangingPunct="1">
+        <a:defRPr>
+          <a:solidFill>
+            <a:schemeClr val="tx2"/>
+          </a:solidFill>
+        </a:defRPr>
+      </a:lvl2pPr>
+      <a:lvl3pPr eaLnBrk="1" hangingPunct="1">
+        <a:defRPr>
+          <a:solidFill>
+            <a:schemeClr val="tx2"/>
+          </a:solidFill>
+        </a:defRPr>
+      </a:lvl3pPr>
+      <a:lvl4pPr eaLnBrk="1" hangingPunct="1">
+        <a:defRPr>
+          <a:solidFill>
+            <a:schemeClr val="tx2"/>
+          </a:solidFill>
+        </a:defRPr>
+      </a:lvl4pPr>
+      <a:lvl5pPr eaLnBrk="1" hangingPunct="1">
+        <a:defRPr>
+          <a:solidFill>
+            <a:schemeClr val="tx2"/>
+          </a:solidFill>
+        </a:defRPr>
+      </a:lvl5pPr>
+      <a:lvl6pPr eaLnBrk="1" hangingPunct="1">
+        <a:defRPr>
+          <a:solidFill>
+            <a:schemeClr val="tx2"/>
+          </a:solidFill>
+        </a:defRPr>
+      </a:lvl6pPr>
+      <a:lvl7pPr eaLnBrk="1" hangingPunct="1">
+        <a:defRPr>
+          <a:solidFill>
+            <a:schemeClr val="tx2"/>
+          </a:solidFill>
+        </a:defRPr>
+      </a:lvl7pPr>
+      <a:lvl8pPr eaLnBrk="1" hangingPunct="1">
+        <a:defRPr>
+          <a:solidFill>
+            <a:schemeClr val="tx2"/>
+          </a:solidFill>
+        </a:defRPr>
+      </a:lvl8pPr>
+      <a:lvl9pPr eaLnBrk="1" hangingPunct="1">
+        <a:defRPr>
+          <a:solidFill>
+            <a:schemeClr val="tx2"/>
+          </a:solidFill>
+        </a:defRPr>
+      </a:lvl9pPr>
+    </p:titleStyle>
+    <p:bodyStyle>
+      <a:lvl1pPr marL="342900" indent="-342900" algn="l" defTabSz="457200" rtl="0" eaLnBrk="1" latinLnBrk="0" hangingPunct="1">
+        <a:spcBef>
+          <a:spcPts val="1000"/>
+        </a:spcBef>
+        <a:spcAft>
+          <a:spcPts val="0"/>
+        </a:spcAft>
+        <a:buClr>
+          <a:schemeClr val="bg2">
+            <a:lumMod val="40000"/>
+            <a:lumOff val="60000"/>
+          </a:schemeClr>
+        </a:buClr>
+        <a:buSzPct val="80000"/>
+        <a:buFont typeface="Wingdings 3" charset="2"/>
+        <a:buChar char=""/>
+        <a:defRPr sz="2000" b="0" i="0" kern="1200">
           <a:solidFill>
             <a:schemeClr val="tx1"/>
           </a:solidFill>
@@ -3206,18 +6099,213 @@
           <a:cs typeface="+mj-cs"/>
         </a:defRPr>
       </a:lvl1pPr>
-    </p:titleStyle>
-    <p:bodyStyle>
-      <a:lvl1pPr marL="228600" indent="-228600" algn="l" defTabSz="914400" rtl="0" eaLnBrk="1" latinLnBrk="0" hangingPunct="1">
-        <a:lnSpc>
-          <a:spcPct val="90000"/>
-        </a:lnSpc>
+      <a:lvl2pPr marL="742950" indent="-285750" algn="l" defTabSz="457200" rtl="0" eaLnBrk="1" latinLnBrk="0" hangingPunct="1">
         <a:spcBef>
           <a:spcPts val="1000"/>
         </a:spcBef>
-        <a:buFont typeface="Arial" panose="020B0604020202020204" pitchFamily="34" charset="0"/>
-        <a:buChar char="•"/>
-        <a:defRPr sz="2800" kern="1200">
+        <a:spcAft>
+          <a:spcPts val="0"/>
+        </a:spcAft>
+        <a:buClr>
+          <a:schemeClr val="bg2">
+            <a:lumMod val="40000"/>
+            <a:lumOff val="60000"/>
+          </a:schemeClr>
+        </a:buClr>
+        <a:buSzPct val="80000"/>
+        <a:buFont typeface="Wingdings 3" charset="2"/>
+        <a:buChar char=""/>
+        <a:defRPr sz="1800" b="0" i="0" kern="1200">
+          <a:solidFill>
+            <a:schemeClr val="tx1"/>
+          </a:solidFill>
+          <a:latin typeface="+mj-lt"/>
+          <a:ea typeface="+mj-ea"/>
+          <a:cs typeface="+mj-cs"/>
+        </a:defRPr>
+      </a:lvl2pPr>
+      <a:lvl3pPr marL="1143000" indent="-228600" algn="l" defTabSz="457200" rtl="0" eaLnBrk="1" latinLnBrk="0" hangingPunct="1">
+        <a:spcBef>
+          <a:spcPts val="1000"/>
+        </a:spcBef>
+        <a:spcAft>
+          <a:spcPts val="0"/>
+        </a:spcAft>
+        <a:buClr>
+          <a:schemeClr val="bg2">
+            <a:lumMod val="40000"/>
+            <a:lumOff val="60000"/>
+          </a:schemeClr>
+        </a:buClr>
+        <a:buSzPct val="80000"/>
+        <a:buFont typeface="Wingdings 3" charset="2"/>
+        <a:buChar char=""/>
+        <a:defRPr sz="1600" b="0" i="0" kern="1200">
+          <a:solidFill>
+            <a:schemeClr val="tx1"/>
+          </a:solidFill>
+          <a:latin typeface="+mj-lt"/>
+          <a:ea typeface="+mj-ea"/>
+          <a:cs typeface="+mj-cs"/>
+        </a:defRPr>
+      </a:lvl3pPr>
+      <a:lvl4pPr marL="1600200" indent="-228600" algn="l" defTabSz="457200" rtl="0" eaLnBrk="1" latinLnBrk="0" hangingPunct="1">
+        <a:spcBef>
+          <a:spcPts val="1000"/>
+        </a:spcBef>
+        <a:spcAft>
+          <a:spcPts val="0"/>
+        </a:spcAft>
+        <a:buClr>
+          <a:schemeClr val="bg2">
+            <a:lumMod val="40000"/>
+            <a:lumOff val="60000"/>
+          </a:schemeClr>
+        </a:buClr>
+        <a:buSzPct val="80000"/>
+        <a:buFont typeface="Wingdings 3" charset="2"/>
+        <a:buChar char=""/>
+        <a:defRPr sz="1400" b="0" i="0" kern="1200">
+          <a:solidFill>
+            <a:schemeClr val="tx1"/>
+          </a:solidFill>
+          <a:latin typeface="+mj-lt"/>
+          <a:ea typeface="+mj-ea"/>
+          <a:cs typeface="+mj-cs"/>
+        </a:defRPr>
+      </a:lvl4pPr>
+      <a:lvl5pPr marL="2057400" indent="-228600" algn="l" defTabSz="457200" rtl="0" eaLnBrk="1" latinLnBrk="0" hangingPunct="1">
+        <a:spcBef>
+          <a:spcPts val="1000"/>
+        </a:spcBef>
+        <a:spcAft>
+          <a:spcPts val="0"/>
+        </a:spcAft>
+        <a:buClr>
+          <a:schemeClr val="bg2">
+            <a:lumMod val="40000"/>
+            <a:lumOff val="60000"/>
+          </a:schemeClr>
+        </a:buClr>
+        <a:buSzPct val="80000"/>
+        <a:buFont typeface="Wingdings 3" charset="2"/>
+        <a:buChar char=""/>
+        <a:defRPr sz="1400" b="0" i="0" kern="1200">
+          <a:solidFill>
+            <a:schemeClr val="tx1"/>
+          </a:solidFill>
+          <a:latin typeface="+mj-lt"/>
+          <a:ea typeface="+mj-ea"/>
+          <a:cs typeface="+mj-cs"/>
+        </a:defRPr>
+      </a:lvl5pPr>
+      <a:lvl6pPr marL="2506000" indent="-228600" algn="l" defTabSz="457200" rtl="0" eaLnBrk="1" latinLnBrk="0" hangingPunct="1">
+        <a:spcBef>
+          <a:spcPts val="1000"/>
+        </a:spcBef>
+        <a:spcAft>
+          <a:spcPts val="0"/>
+        </a:spcAft>
+        <a:buClr>
+          <a:schemeClr val="bg2">
+            <a:lumMod val="40000"/>
+            <a:lumOff val="60000"/>
+          </a:schemeClr>
+        </a:buClr>
+        <a:buSzPct val="80000"/>
+        <a:buFont typeface="Wingdings 3" charset="2"/>
+        <a:buChar char=""/>
+        <a:defRPr sz="1400" b="0" i="0" kern="1200">
+          <a:solidFill>
+            <a:schemeClr val="tx1"/>
+          </a:solidFill>
+          <a:latin typeface="+mj-lt"/>
+          <a:ea typeface="+mj-ea"/>
+          <a:cs typeface="+mj-cs"/>
+        </a:defRPr>
+      </a:lvl6pPr>
+      <a:lvl7pPr marL="2971800" indent="-228600" algn="l" defTabSz="457200" rtl="0" eaLnBrk="1" latinLnBrk="0" hangingPunct="1">
+        <a:spcBef>
+          <a:spcPts val="1000"/>
+        </a:spcBef>
+        <a:spcAft>
+          <a:spcPts val="0"/>
+        </a:spcAft>
+        <a:buClr>
+          <a:schemeClr val="bg2">
+            <a:lumMod val="40000"/>
+            <a:lumOff val="60000"/>
+          </a:schemeClr>
+        </a:buClr>
+        <a:buSzPct val="80000"/>
+        <a:buFont typeface="Wingdings 3" charset="2"/>
+        <a:buChar char=""/>
+        <a:defRPr sz="1400" b="0" i="0" kern="1200">
+          <a:solidFill>
+            <a:schemeClr val="tx1"/>
+          </a:solidFill>
+          <a:latin typeface="+mj-lt"/>
+          <a:ea typeface="+mj-ea"/>
+          <a:cs typeface="+mj-cs"/>
+        </a:defRPr>
+      </a:lvl7pPr>
+      <a:lvl8pPr marL="3429000" indent="-228600" algn="l" defTabSz="457200" rtl="0" eaLnBrk="1" latinLnBrk="0" hangingPunct="1">
+        <a:spcBef>
+          <a:spcPts val="1000"/>
+        </a:spcBef>
+        <a:spcAft>
+          <a:spcPts val="0"/>
+        </a:spcAft>
+        <a:buClr>
+          <a:schemeClr val="bg2">
+            <a:lumMod val="40000"/>
+            <a:lumOff val="60000"/>
+          </a:schemeClr>
+        </a:buClr>
+        <a:buSzPct val="80000"/>
+        <a:buFont typeface="Wingdings 3" charset="2"/>
+        <a:buChar char=""/>
+        <a:defRPr sz="1400" b="0" i="0" kern="1200">
+          <a:solidFill>
+            <a:schemeClr val="tx1"/>
+          </a:solidFill>
+          <a:latin typeface="+mj-lt"/>
+          <a:ea typeface="+mj-ea"/>
+          <a:cs typeface="+mj-cs"/>
+        </a:defRPr>
+      </a:lvl8pPr>
+      <a:lvl9pPr marL="3886200" indent="-228600" algn="l" defTabSz="457200" rtl="0" eaLnBrk="1" latinLnBrk="0" hangingPunct="1">
+        <a:spcBef>
+          <a:spcPts val="1000"/>
+        </a:spcBef>
+        <a:spcAft>
+          <a:spcPts val="0"/>
+        </a:spcAft>
+        <a:buClr>
+          <a:schemeClr val="bg2">
+            <a:lumMod val="40000"/>
+            <a:lumOff val="60000"/>
+          </a:schemeClr>
+        </a:buClr>
+        <a:buSzPct val="80000"/>
+        <a:buFont typeface="Wingdings 3" charset="2"/>
+        <a:buChar char=""/>
+        <a:defRPr sz="1400" b="0" i="0" kern="1200">
+          <a:solidFill>
+            <a:schemeClr val="tx1"/>
+          </a:solidFill>
+          <a:latin typeface="+mj-lt"/>
+          <a:ea typeface="+mj-ea"/>
+          <a:cs typeface="+mj-cs"/>
+        </a:defRPr>
+      </a:lvl9pPr>
+    </p:bodyStyle>
+    <p:otherStyle>
+      <a:defPPr>
+        <a:defRPr lang="en-US"/>
+      </a:defPPr>
+      <a:lvl1pPr marL="0" algn="l" defTabSz="457200" rtl="0" eaLnBrk="1" latinLnBrk="0" hangingPunct="1">
+        <a:defRPr sz="1800" kern="1200">
           <a:solidFill>
             <a:schemeClr val="tx1"/>
           </a:solidFill>
@@ -3226,16 +6314,8 @@
           <a:cs typeface="+mn-cs"/>
         </a:defRPr>
       </a:lvl1pPr>
-      <a:lvl2pPr marL="685800" indent="-228600" algn="l" defTabSz="914400" rtl="0" eaLnBrk="1" latinLnBrk="0" hangingPunct="1">
-        <a:lnSpc>
-          <a:spcPct val="90000"/>
-        </a:lnSpc>
-        <a:spcBef>
-          <a:spcPts val="500"/>
-        </a:spcBef>
-        <a:buFont typeface="Arial" panose="020B0604020202020204" pitchFamily="34" charset="0"/>
-        <a:buChar char="•"/>
-        <a:defRPr sz="2400" kern="1200">
+      <a:lvl2pPr marL="457200" algn="l" defTabSz="457200" rtl="0" eaLnBrk="1" latinLnBrk="0" hangingPunct="1">
+        <a:defRPr sz="1800" kern="1200">
           <a:solidFill>
             <a:schemeClr val="tx1"/>
           </a:solidFill>
@@ -3244,16 +6324,8 @@
           <a:cs typeface="+mn-cs"/>
         </a:defRPr>
       </a:lvl2pPr>
-      <a:lvl3pPr marL="1143000" indent="-228600" algn="l" defTabSz="914400" rtl="0" eaLnBrk="1" latinLnBrk="0" hangingPunct="1">
-        <a:lnSpc>
-          <a:spcPct val="90000"/>
-        </a:lnSpc>
-        <a:spcBef>
-          <a:spcPts val="500"/>
-        </a:spcBef>
-        <a:buFont typeface="Arial" panose="020B0604020202020204" pitchFamily="34" charset="0"/>
-        <a:buChar char="•"/>
-        <a:defRPr sz="2000" kern="1200">
+      <a:lvl3pPr marL="914400" algn="l" defTabSz="457200" rtl="0" eaLnBrk="1" latinLnBrk="0" hangingPunct="1">
+        <a:defRPr sz="1800" kern="1200">
           <a:solidFill>
             <a:schemeClr val="tx1"/>
           </a:solidFill>
@@ -3262,15 +6334,7 @@
           <a:cs typeface="+mn-cs"/>
         </a:defRPr>
       </a:lvl3pPr>
-      <a:lvl4pPr marL="1600200" indent="-228600" algn="l" defTabSz="914400" rtl="0" eaLnBrk="1" latinLnBrk="0" hangingPunct="1">
-        <a:lnSpc>
-          <a:spcPct val="90000"/>
-        </a:lnSpc>
-        <a:spcBef>
-          <a:spcPts val="500"/>
-        </a:spcBef>
-        <a:buFont typeface="Arial" panose="020B0604020202020204" pitchFamily="34" charset="0"/>
-        <a:buChar char="•"/>
+      <a:lvl4pPr marL="1371600" algn="l" defTabSz="457200" rtl="0" eaLnBrk="1" latinLnBrk="0" hangingPunct="1">
         <a:defRPr sz="1800" kern="1200">
           <a:solidFill>
             <a:schemeClr val="tx1"/>
@@ -3280,15 +6344,7 @@
           <a:cs typeface="+mn-cs"/>
         </a:defRPr>
       </a:lvl4pPr>
-      <a:lvl5pPr marL="2057400" indent="-228600" algn="l" defTabSz="914400" rtl="0" eaLnBrk="1" latinLnBrk="0" hangingPunct="1">
-        <a:lnSpc>
-          <a:spcPct val="90000"/>
-        </a:lnSpc>
-        <a:spcBef>
-          <a:spcPts val="500"/>
-        </a:spcBef>
-        <a:buFont typeface="Arial" panose="020B0604020202020204" pitchFamily="34" charset="0"/>
-        <a:buChar char="•"/>
+      <a:lvl5pPr marL="1828800" algn="l" defTabSz="457200" rtl="0" eaLnBrk="1" latinLnBrk="0" hangingPunct="1">
         <a:defRPr sz="1800" kern="1200">
           <a:solidFill>
             <a:schemeClr val="tx1"/>
@@ -3298,15 +6354,7 @@
           <a:cs typeface="+mn-cs"/>
         </a:defRPr>
       </a:lvl5pPr>
-      <a:lvl6pPr marL="2514600" indent="-228600" algn="l" defTabSz="914400" rtl="0" eaLnBrk="1" latinLnBrk="0" hangingPunct="1">
-        <a:lnSpc>
-          <a:spcPct val="90000"/>
-        </a:lnSpc>
-        <a:spcBef>
-          <a:spcPts val="500"/>
-        </a:spcBef>
-        <a:buFont typeface="Arial" panose="020B0604020202020204" pitchFamily="34" charset="0"/>
-        <a:buChar char="•"/>
+      <a:lvl6pPr marL="2286000" algn="l" defTabSz="457200" rtl="0" eaLnBrk="1" latinLnBrk="0" hangingPunct="1">
         <a:defRPr sz="1800" kern="1200">
           <a:solidFill>
             <a:schemeClr val="tx1"/>
@@ -3316,15 +6364,7 @@
           <a:cs typeface="+mn-cs"/>
         </a:defRPr>
       </a:lvl6pPr>
-      <a:lvl7pPr marL="2971800" indent="-228600" algn="l" defTabSz="914400" rtl="0" eaLnBrk="1" latinLnBrk="0" hangingPunct="1">
-        <a:lnSpc>
-          <a:spcPct val="90000"/>
-        </a:lnSpc>
-        <a:spcBef>
-          <a:spcPts val="500"/>
-        </a:spcBef>
-        <a:buFont typeface="Arial" panose="020B0604020202020204" pitchFamily="34" charset="0"/>
-        <a:buChar char="•"/>
+      <a:lvl7pPr marL="2743200" algn="l" defTabSz="457200" rtl="0" eaLnBrk="1" latinLnBrk="0" hangingPunct="1">
         <a:defRPr sz="1800" kern="1200">
           <a:solidFill>
             <a:schemeClr val="tx1"/>
@@ -3334,15 +6374,7 @@
           <a:cs typeface="+mn-cs"/>
         </a:defRPr>
       </a:lvl7pPr>
-      <a:lvl8pPr marL="3429000" indent="-228600" algn="l" defTabSz="914400" rtl="0" eaLnBrk="1" latinLnBrk="0" hangingPunct="1">
-        <a:lnSpc>
-          <a:spcPct val="90000"/>
-        </a:lnSpc>
-        <a:spcBef>
-          <a:spcPts val="500"/>
-        </a:spcBef>
-        <a:buFont typeface="Arial" panose="020B0604020202020204" pitchFamily="34" charset="0"/>
-        <a:buChar char="•"/>
+      <a:lvl8pPr marL="3200400" algn="l" defTabSz="457200" rtl="0" eaLnBrk="1" latinLnBrk="0" hangingPunct="1">
         <a:defRPr sz="1800" kern="1200">
           <a:solidFill>
             <a:schemeClr val="tx1"/>
@@ -3352,110 +6384,7 @@
           <a:cs typeface="+mn-cs"/>
         </a:defRPr>
       </a:lvl8pPr>
-      <a:lvl9pPr marL="3886200" indent="-228600" algn="l" defTabSz="914400" rtl="0" eaLnBrk="1" latinLnBrk="0" hangingPunct="1">
-        <a:lnSpc>
-          <a:spcPct val="90000"/>
-        </a:lnSpc>
-        <a:spcBef>
-          <a:spcPts val="500"/>
-        </a:spcBef>
-        <a:buFont typeface="Arial" panose="020B0604020202020204" pitchFamily="34" charset="0"/>
-        <a:buChar char="•"/>
-        <a:defRPr sz="1800" kern="1200">
-          <a:solidFill>
-            <a:schemeClr val="tx1"/>
-          </a:solidFill>
-          <a:latin typeface="+mn-lt"/>
-          <a:ea typeface="+mn-ea"/>
-          <a:cs typeface="+mn-cs"/>
-        </a:defRPr>
-      </a:lvl9pPr>
-    </p:bodyStyle>
-    <p:otherStyle>
-      <a:defPPr>
-        <a:defRPr lang="en-US"/>
-      </a:defPPr>
-      <a:lvl1pPr marL="0" algn="l" defTabSz="914400" rtl="0" eaLnBrk="1" latinLnBrk="0" hangingPunct="1">
-        <a:defRPr sz="1800" kern="1200">
-          <a:solidFill>
-            <a:schemeClr val="tx1"/>
-          </a:solidFill>
-          <a:latin typeface="+mn-lt"/>
-          <a:ea typeface="+mn-ea"/>
-          <a:cs typeface="+mn-cs"/>
-        </a:defRPr>
-      </a:lvl1pPr>
-      <a:lvl2pPr marL="457200" algn="l" defTabSz="914400" rtl="0" eaLnBrk="1" latinLnBrk="0" hangingPunct="1">
-        <a:defRPr sz="1800" kern="1200">
-          <a:solidFill>
-            <a:schemeClr val="tx1"/>
-          </a:solidFill>
-          <a:latin typeface="+mn-lt"/>
-          <a:ea typeface="+mn-ea"/>
-          <a:cs typeface="+mn-cs"/>
-        </a:defRPr>
-      </a:lvl2pPr>
-      <a:lvl3pPr marL="914400" algn="l" defTabSz="914400" rtl="0" eaLnBrk="1" latinLnBrk="0" hangingPunct="1">
-        <a:defRPr sz="1800" kern="1200">
-          <a:solidFill>
-            <a:schemeClr val="tx1"/>
-          </a:solidFill>
-          <a:latin typeface="+mn-lt"/>
-          <a:ea typeface="+mn-ea"/>
-          <a:cs typeface="+mn-cs"/>
-        </a:defRPr>
-      </a:lvl3pPr>
-      <a:lvl4pPr marL="1371600" algn="l" defTabSz="914400" rtl="0" eaLnBrk="1" latinLnBrk="0" hangingPunct="1">
-        <a:defRPr sz="1800" kern="1200">
-          <a:solidFill>
-            <a:schemeClr val="tx1"/>
-          </a:solidFill>
-          <a:latin typeface="+mn-lt"/>
-          <a:ea typeface="+mn-ea"/>
-          <a:cs typeface="+mn-cs"/>
-        </a:defRPr>
-      </a:lvl4pPr>
-      <a:lvl5pPr marL="1828800" algn="l" defTabSz="914400" rtl="0" eaLnBrk="1" latinLnBrk="0" hangingPunct="1">
-        <a:defRPr sz="1800" kern="1200">
-          <a:solidFill>
-            <a:schemeClr val="tx1"/>
-          </a:solidFill>
-          <a:latin typeface="+mn-lt"/>
-          <a:ea typeface="+mn-ea"/>
-          <a:cs typeface="+mn-cs"/>
-        </a:defRPr>
-      </a:lvl5pPr>
-      <a:lvl6pPr marL="2286000" algn="l" defTabSz="914400" rtl="0" eaLnBrk="1" latinLnBrk="0" hangingPunct="1">
-        <a:defRPr sz="1800" kern="1200">
-          <a:solidFill>
-            <a:schemeClr val="tx1"/>
-          </a:solidFill>
-          <a:latin typeface="+mn-lt"/>
-          <a:ea typeface="+mn-ea"/>
-          <a:cs typeface="+mn-cs"/>
-        </a:defRPr>
-      </a:lvl6pPr>
-      <a:lvl7pPr marL="2743200" algn="l" defTabSz="914400" rtl="0" eaLnBrk="1" latinLnBrk="0" hangingPunct="1">
-        <a:defRPr sz="1800" kern="1200">
-          <a:solidFill>
-            <a:schemeClr val="tx1"/>
-          </a:solidFill>
-          <a:latin typeface="+mn-lt"/>
-          <a:ea typeface="+mn-ea"/>
-          <a:cs typeface="+mn-cs"/>
-        </a:defRPr>
-      </a:lvl7pPr>
-      <a:lvl8pPr marL="3200400" algn="l" defTabSz="914400" rtl="0" eaLnBrk="1" latinLnBrk="0" hangingPunct="1">
-        <a:defRPr sz="1800" kern="1200">
-          <a:solidFill>
-            <a:schemeClr val="tx1"/>
-          </a:solidFill>
-          <a:latin typeface="+mn-lt"/>
-          <a:ea typeface="+mn-ea"/>
-          <a:cs typeface="+mn-cs"/>
-        </a:defRPr>
-      </a:lvl8pPr>
-      <a:lvl9pPr marL="3657600" algn="l" defTabSz="914400" rtl="0" eaLnBrk="1" latinLnBrk="0" hangingPunct="1">
+      <a:lvl9pPr marL="3657600" algn="l" defTabSz="457200" rtl="0" eaLnBrk="1" latinLnBrk="0" hangingPunct="1">
         <a:defRPr sz="1800" kern="1200">
           <a:solidFill>
             <a:schemeClr val="tx1"/>
@@ -3503,7 +6432,12 @@
             <p:ph type="ctrTitle"/>
           </p:nvPr>
         </p:nvSpPr>
-        <p:spPr/>
+        <p:spPr>
+          <a:xfrm>
+            <a:off x="1154955" y="950495"/>
+            <a:ext cx="8825658" cy="3329581"/>
+          </a:xfrm>
+        </p:spPr>
         <p:txBody>
           <a:bodyPr/>
           <a:lstStyle/>
@@ -3532,49 +6466,54 @@
             <p:ph type="subTitle" idx="1"/>
           </p:nvPr>
         </p:nvSpPr>
-        <p:spPr/>
+        <p:spPr>
+          <a:xfrm>
+            <a:off x="1154955" y="4520706"/>
+            <a:ext cx="8825658" cy="861420"/>
+          </a:xfrm>
+        </p:spPr>
         <p:txBody>
           <a:bodyPr>
-            <a:normAutofit fontScale="85000" lnSpcReduction="20000"/>
+            <a:noAutofit/>
           </a:bodyPr>
           <a:lstStyle/>
           <a:p>
             <a:r>
-              <a:rPr lang="en-NZ" b="1" dirty="0"/>
+              <a:rPr lang="en-NZ" sz="1800" b="1" dirty="0"/>
               <a:t>Project Title: </a:t>
             </a:r>
             <a:r>
-              <a:rPr lang="en-NZ" dirty="0"/>
+              <a:rPr lang="en-NZ" sz="1800" dirty="0"/>
               <a:t>AI-Enhanced vs Legacy Digital Forensics and Investigation Tools – A Comparative Efficacy Analysis</a:t>
             </a:r>
           </a:p>
           <a:p>
             <a:r>
-              <a:rPr lang="en-NZ" b="1" dirty="0"/>
+              <a:rPr lang="en-NZ" sz="1800" b="1" dirty="0"/>
               <a:t>Team Name: </a:t>
             </a:r>
             <a:r>
-              <a:rPr lang="en-NZ" dirty="0"/>
+              <a:rPr lang="en-NZ" sz="1800" dirty="0"/>
               <a:t>Byte Harbor Butchers</a:t>
             </a:r>
           </a:p>
           <a:p>
             <a:r>
-              <a:rPr lang="en-NZ" b="1" dirty="0"/>
+              <a:rPr lang="en-NZ" sz="1800" b="1" dirty="0"/>
               <a:t>Team Members: </a:t>
             </a:r>
             <a:r>
-              <a:rPr lang="en-NZ" dirty="0"/>
+              <a:rPr lang="en-NZ" sz="1800" dirty="0"/>
               <a:t>Olivia Hey, Matt Baker, Sam Davies, Dave Sushames</a:t>
             </a:r>
           </a:p>
           <a:p>
             <a:r>
-              <a:rPr lang="en-NZ" b="1" dirty="0"/>
+              <a:rPr lang="en-NZ" sz="1800" b="1" dirty="0"/>
               <a:t>Project Client: </a:t>
             </a:r>
             <a:r>
-              <a:rPr lang="en-NZ" dirty="0"/>
+              <a:rPr lang="en-NZ" sz="1800" dirty="0"/>
               <a:t>Geoff Gordon</a:t>
             </a:r>
           </a:p>
@@ -3615,7 +6554,7 @@
           <p:cNvPr id="2" name="Title 1">
             <a:extLst>
               <a:ext uri="{FF2B5EF4-FFF2-40B4-BE49-F238E27FC236}">
-                <a16:creationId xmlns:a16="http://schemas.microsoft.com/office/drawing/2014/main" id="{90530326-B10D-8D61-0CFF-8C79806EB64C}"/>
+                <a16:creationId xmlns:a16="http://schemas.microsoft.com/office/drawing/2014/main" id="{047335D3-B3E6-C8A2-402C-FE455859BD5F}"/>
               </a:ext>
             </a:extLst>
           </p:cNvPr>
@@ -3633,7 +6572,7 @@
           <a:p>
             <a:r>
               <a:rPr lang="en-US" dirty="0"/>
-              <a:t>Project description</a:t>
+              <a:t>Topics</a:t>
             </a:r>
             <a:endParaRPr lang="en-NZ" dirty="0"/>
           </a:p>
@@ -3644,7 +6583,7 @@
           <p:cNvPr id="3" name="Content Placeholder 2">
             <a:extLst>
               <a:ext uri="{FF2B5EF4-FFF2-40B4-BE49-F238E27FC236}">
-                <a16:creationId xmlns:a16="http://schemas.microsoft.com/office/drawing/2014/main" id="{6C0C07A1-BD55-F571-87E1-3E1F8CB44291}"/>
+                <a16:creationId xmlns:a16="http://schemas.microsoft.com/office/drawing/2014/main" id="{A157AFC2-32EC-591F-EAE0-425D725D535E}"/>
               </a:ext>
             </a:extLst>
           </p:cNvPr>
@@ -3660,21 +6599,59 @@
           <a:bodyPr/>
           <a:lstStyle/>
           <a:p>
-            <a:pPr marL="0" indent="0">
-              <a:buNone/>
-            </a:pPr>
-            <a:r>
-              <a:rPr lang="en-US" dirty="0"/>
-              <a:t>The project is to compare how locally-run Large Language Models (LLMs) interpret and report on Nmap, Foremost, and Wireshark outputs compared to human analysts.</a:t>
-            </a:r>
-          </a:p>
-          <a:p>
-            <a:pPr marL="0" indent="0">
-              <a:buNone/>
-            </a:pPr>
-            <a:r>
-              <a:rPr lang="en-US" dirty="0"/>
-              <a:t>Framework: Design Science Research.</a:t>
+            <a:r>
+              <a:rPr lang="en-NZ" dirty="0">
+                <a:latin typeface="Century Gothic" panose="020B0502020202020204" pitchFamily="34" charset="0"/>
+              </a:rPr>
+              <a:t>Brief description of project.</a:t>
+            </a:r>
+          </a:p>
+          <a:p>
+            <a:r>
+              <a:rPr lang="en-NZ" dirty="0">
+                <a:latin typeface="Century Gothic" panose="020B0502020202020204" pitchFamily="34" charset="0"/>
+              </a:rPr>
+              <a:t>Milestones and deliverables that have been completed.</a:t>
+            </a:r>
+          </a:p>
+          <a:p>
+            <a:r>
+              <a:rPr lang="en-NZ" dirty="0">
+                <a:latin typeface="Century Gothic" panose="020B0502020202020204" pitchFamily="34" charset="0"/>
+              </a:rPr>
+              <a:t>How progress has been made.</a:t>
+            </a:r>
+          </a:p>
+          <a:p>
+            <a:r>
+              <a:rPr lang="en-NZ" dirty="0">
+                <a:latin typeface="Century Gothic" panose="020B0502020202020204" pitchFamily="34" charset="0"/>
+              </a:rPr>
+              <a:t>What is still to be done.</a:t>
+            </a:r>
+          </a:p>
+          <a:p>
+            <a:r>
+              <a:rPr lang="en-NZ" dirty="0">
+                <a:latin typeface="Century Gothic" panose="020B0502020202020204" pitchFamily="34" charset="0"/>
+              </a:rPr>
+              <a:t>Any changes to timeframes that need to be discussed?</a:t>
+            </a:r>
+          </a:p>
+          <a:p>
+            <a:r>
+              <a:rPr lang="en-NZ" dirty="0">
+                <a:latin typeface="Century Gothic" panose="020B0502020202020204" pitchFamily="34" charset="0"/>
+              </a:rPr>
+              <a:t>Overall client feedback/satisfaction.</a:t>
+            </a:r>
+          </a:p>
+          <a:p>
+            <a:r>
+              <a:rPr lang="en-NZ" dirty="0">
+                <a:latin typeface="Century Gothic" panose="020B0502020202020204" pitchFamily="34" charset="0"/>
+              </a:rPr>
+              <a:t>Questions?</a:t>
             </a:r>
           </a:p>
           <a:p>
@@ -3688,7 +6665,7 @@
     </p:spTree>
     <p:extLst>
       <p:ext uri="{BB962C8B-B14F-4D97-AF65-F5344CB8AC3E}">
-        <p14:creationId xmlns:p14="http://schemas.microsoft.com/office/powerpoint/2010/main" val="2362368263"/>
+        <p14:creationId xmlns:p14="http://schemas.microsoft.com/office/powerpoint/2010/main" val="3468736769"/>
       </p:ext>
     </p:extLst>
   </p:cSld>
@@ -3720,7 +6697,7 @@
           <p:cNvPr id="2" name="Title 1">
             <a:extLst>
               <a:ext uri="{FF2B5EF4-FFF2-40B4-BE49-F238E27FC236}">
-                <a16:creationId xmlns:a16="http://schemas.microsoft.com/office/drawing/2014/main" id="{2683624D-3129-03E9-F115-6F90475E4794}"/>
+                <a16:creationId xmlns:a16="http://schemas.microsoft.com/office/drawing/2014/main" id="{90530326-B10D-8D61-0CFF-8C79806EB64C}"/>
               </a:ext>
             </a:extLst>
           </p:cNvPr>
@@ -3738,7 +6715,7 @@
           <a:p>
             <a:r>
               <a:rPr lang="en-US" dirty="0"/>
-              <a:t>Completed Milestones</a:t>
+              <a:t>Project description</a:t>
             </a:r>
             <a:endParaRPr lang="en-NZ" dirty="0"/>
           </a:p>
@@ -3749,7 +6726,7 @@
           <p:cNvPr id="3" name="Content Placeholder 2">
             <a:extLst>
               <a:ext uri="{FF2B5EF4-FFF2-40B4-BE49-F238E27FC236}">
-                <a16:creationId xmlns:a16="http://schemas.microsoft.com/office/drawing/2014/main" id="{0F35839F-4D04-EB1F-ADC7-579D8D73B752}"/>
+                <a16:creationId xmlns:a16="http://schemas.microsoft.com/office/drawing/2014/main" id="{6C0C07A1-BD55-F571-87E1-3E1F8CB44291}"/>
               </a:ext>
             </a:extLst>
           </p:cNvPr>
@@ -3770,7 +6747,7 @@
             </a:pPr>
             <a:r>
               <a:rPr lang="en-US" dirty="0"/>
-              <a:t>Proposal finished</a:t>
+              <a:t>The project is to compare how locally-run Large Language Models (LLMs) interpret and report on Nmap, Foremost, and Wireshark outputs compared to human analysts.</a:t>
             </a:r>
           </a:p>
           <a:p>
@@ -3779,7 +6756,7 @@
             </a:pPr>
             <a:r>
               <a:rPr lang="en-US" dirty="0"/>
-              <a:t>All forensics tools installed.</a:t>
+              <a:t>Framework: Design Science Research.</a:t>
             </a:r>
           </a:p>
           <a:p>
@@ -3787,26 +6764,8 @@
               <a:buNone/>
             </a:pPr>
             <a:r>
-              <a:rPr lang="en-US" dirty="0"/>
-              <a:t>Created Test Environment</a:t>
-            </a:r>
-          </a:p>
-          <a:p>
-            <a:pPr marL="0" indent="0">
-              <a:buNone/>
-            </a:pPr>
-            <a:r>
               <a:rPr lang="en-NZ" dirty="0"/>
-              <a:t>Selected AI model: Gemma4:26b</a:t>
-            </a:r>
-          </a:p>
-          <a:p>
-            <a:pPr marL="0" indent="0">
-              <a:buNone/>
-            </a:pPr>
-            <a:r>
-              <a:rPr lang="en-NZ" dirty="0"/>
-              <a:t>AI Foremost integration: Python script to automatically feed the carved files into the LLM and produce a report.</a:t>
+              <a:t>(Maybe explain DSR)</a:t>
             </a:r>
           </a:p>
         </p:txBody>
@@ -3814,7 +6773,7 @@
     </p:spTree>
     <p:extLst>
       <p:ext uri="{BB962C8B-B14F-4D97-AF65-F5344CB8AC3E}">
-        <p14:creationId xmlns:p14="http://schemas.microsoft.com/office/powerpoint/2010/main" val="3384359967"/>
+        <p14:creationId xmlns:p14="http://schemas.microsoft.com/office/powerpoint/2010/main" val="2362368263"/>
       </p:ext>
     </p:extLst>
   </p:cSld>
@@ -3846,7 +6805,7 @@
           <p:cNvPr id="2" name="Title 1">
             <a:extLst>
               <a:ext uri="{FF2B5EF4-FFF2-40B4-BE49-F238E27FC236}">
-                <a16:creationId xmlns:a16="http://schemas.microsoft.com/office/drawing/2014/main" id="{2938C9BD-10F8-3FB7-B12D-383CA5C6C775}"/>
+                <a16:creationId xmlns:a16="http://schemas.microsoft.com/office/drawing/2014/main" id="{2683624D-3129-03E9-F115-6F90475E4794}"/>
               </a:ext>
             </a:extLst>
           </p:cNvPr>
@@ -3864,7 +6823,7 @@
           <a:p>
             <a:r>
               <a:rPr lang="en-US" dirty="0"/>
-              <a:t>How progress has been made</a:t>
+              <a:t>Completed Milestones</a:t>
             </a:r>
             <a:endParaRPr lang="en-NZ" dirty="0"/>
           </a:p>
@@ -3875,7 +6834,7 @@
           <p:cNvPr id="3" name="Content Placeholder 2">
             <a:extLst>
               <a:ext uri="{FF2B5EF4-FFF2-40B4-BE49-F238E27FC236}">
-                <a16:creationId xmlns:a16="http://schemas.microsoft.com/office/drawing/2014/main" id="{D196632A-DFFF-0D91-597A-10CA65E9657B}"/>
+                <a16:creationId xmlns:a16="http://schemas.microsoft.com/office/drawing/2014/main" id="{0F35839F-4D04-EB1F-ADC7-579D8D73B752}"/>
               </a:ext>
             </a:extLst>
           </p:cNvPr>
@@ -3894,14 +6853,53 @@
             <a:pPr marL="0" indent="0">
               <a:buNone/>
             </a:pPr>
-            <a:endParaRPr lang="en-NZ" dirty="0"/>
+            <a:r>
+              <a:rPr lang="en-US" dirty="0"/>
+              <a:t>Proposal finished</a:t>
+            </a:r>
+          </a:p>
+          <a:p>
+            <a:pPr marL="0" indent="0">
+              <a:buNone/>
+            </a:pPr>
+            <a:r>
+              <a:rPr lang="en-US" dirty="0"/>
+              <a:t>All forensics tools installed.</a:t>
+            </a:r>
+          </a:p>
+          <a:p>
+            <a:pPr marL="0" indent="0">
+              <a:buNone/>
+            </a:pPr>
+            <a:r>
+              <a:rPr lang="en-US" dirty="0"/>
+              <a:t>Created Test Environment</a:t>
+            </a:r>
+          </a:p>
+          <a:p>
+            <a:pPr marL="0" indent="0">
+              <a:buNone/>
+            </a:pPr>
+            <a:r>
+              <a:rPr lang="en-NZ" dirty="0"/>
+              <a:t>Selected AI model: Gemma4:26b</a:t>
+            </a:r>
+          </a:p>
+          <a:p>
+            <a:pPr marL="0" indent="0">
+              <a:buNone/>
+            </a:pPr>
+            <a:r>
+              <a:rPr lang="en-NZ" dirty="0"/>
+              <a:t>AI Foremost integration: Python script to automatically feed the carved files into the LLM and produce a report.</a:t>
+            </a:r>
           </a:p>
         </p:txBody>
       </p:sp>
     </p:spTree>
     <p:extLst>
       <p:ext uri="{BB962C8B-B14F-4D97-AF65-F5344CB8AC3E}">
-        <p14:creationId xmlns:p14="http://schemas.microsoft.com/office/powerpoint/2010/main" val="256383110"/>
+        <p14:creationId xmlns:p14="http://schemas.microsoft.com/office/powerpoint/2010/main" val="3384359967"/>
       </p:ext>
     </p:extLst>
   </p:cSld>
@@ -3933,7 +6931,7 @@
           <p:cNvPr id="2" name="Title 1">
             <a:extLst>
               <a:ext uri="{FF2B5EF4-FFF2-40B4-BE49-F238E27FC236}">
-                <a16:creationId xmlns:a16="http://schemas.microsoft.com/office/drawing/2014/main" id="{86421533-E00D-2C2D-FEDE-CB1FC05A20A6}"/>
+                <a16:creationId xmlns:a16="http://schemas.microsoft.com/office/drawing/2014/main" id="{2938C9BD-10F8-3FB7-B12D-383CA5C6C775}"/>
               </a:ext>
             </a:extLst>
           </p:cNvPr>
@@ -3951,7 +6949,7 @@
           <a:p>
             <a:r>
               <a:rPr lang="en-US" dirty="0"/>
-              <a:t>What is still to be done</a:t>
+              <a:t>How progress has been made</a:t>
             </a:r>
             <a:endParaRPr lang="en-NZ" dirty="0"/>
           </a:p>
@@ -3962,7 +6960,7 @@
           <p:cNvPr id="3" name="Content Placeholder 2">
             <a:extLst>
               <a:ext uri="{FF2B5EF4-FFF2-40B4-BE49-F238E27FC236}">
-                <a16:creationId xmlns:a16="http://schemas.microsoft.com/office/drawing/2014/main" id="{FE3682BF-2AAA-17DB-13EF-80FD9DC2ED51}"/>
+                <a16:creationId xmlns:a16="http://schemas.microsoft.com/office/drawing/2014/main" id="{D196632A-DFFF-0D91-597A-10CA65E9657B}"/>
               </a:ext>
             </a:extLst>
           </p:cNvPr>
@@ -3983,7 +6981,7 @@
             </a:pPr>
             <a:r>
               <a:rPr lang="en-US" dirty="0"/>
-              <a:t>Finalize test metrics</a:t>
+              <a:t>The project’s scope has changed significantly since first conception. Initially, we were to compare AI enhanced DF tools to legacy ones. However, many AI tools were just an AI using the legacy tool.</a:t>
             </a:r>
           </a:p>
           <a:p>
@@ -3991,37 +6989,9 @@
               <a:buNone/>
             </a:pPr>
             <a:r>
-              <a:rPr lang="en-US" dirty="0"/>
-              <a:t>Nmap and Wireshark integration</a:t>
-            </a:r>
-          </a:p>
-          <a:p>
-            <a:pPr marL="0" indent="0">
-              <a:buNone/>
-            </a:pPr>
-            <a:r>
-              <a:rPr lang="en-US" dirty="0"/>
-              <a:t>Run tests</a:t>
-            </a:r>
-          </a:p>
-          <a:p>
-            <a:pPr marL="0" indent="0">
-              <a:buNone/>
-            </a:pPr>
-            <a:r>
-              <a:rPr lang="en-US" dirty="0"/>
-              <a:t>Consolidate findings</a:t>
-            </a:r>
-          </a:p>
-          <a:p>
-            <a:pPr marL="0" indent="0">
-              <a:buNone/>
-            </a:pPr>
-            <a:r>
-              <a:rPr lang="en-US"/>
-              <a:t>Final report</a:t>
-            </a:r>
-            <a:endParaRPr lang="en-US" dirty="0"/>
+              <a:rPr lang="en-NZ" dirty="0"/>
+              <a:t>We have cut the number of tools down to three: Foremost, Wireshark, and Nmap.</a:t>
+            </a:r>
           </a:p>
           <a:p>
             <a:pPr marL="0" indent="0">
@@ -4034,7 +7004,7 @@
     </p:spTree>
     <p:extLst>
       <p:ext uri="{BB962C8B-B14F-4D97-AF65-F5344CB8AC3E}">
-        <p14:creationId xmlns:p14="http://schemas.microsoft.com/office/powerpoint/2010/main" val="1449235414"/>
+        <p14:creationId xmlns:p14="http://schemas.microsoft.com/office/powerpoint/2010/main" val="256383110"/>
       </p:ext>
     </p:extLst>
   </p:cSld>
@@ -4066,6 +7036,138 @@
           <p:cNvPr id="2" name="Title 1">
             <a:extLst>
               <a:ext uri="{FF2B5EF4-FFF2-40B4-BE49-F238E27FC236}">
+                <a16:creationId xmlns:a16="http://schemas.microsoft.com/office/drawing/2014/main" id="{86421533-E00D-2C2D-FEDE-CB1FC05A20A6}"/>
+              </a:ext>
+            </a:extLst>
+          </p:cNvPr>
+          <p:cNvSpPr>
+            <a:spLocks noGrp="1"/>
+          </p:cNvSpPr>
+          <p:nvPr>
+            <p:ph type="title"/>
+          </p:nvPr>
+        </p:nvSpPr>
+        <p:spPr/>
+        <p:txBody>
+          <a:bodyPr/>
+          <a:lstStyle/>
+          <a:p>
+            <a:r>
+              <a:rPr lang="en-US" dirty="0"/>
+              <a:t>What is still to be done</a:t>
+            </a:r>
+            <a:endParaRPr lang="en-NZ" dirty="0"/>
+          </a:p>
+        </p:txBody>
+      </p:sp>
+      <p:sp>
+        <p:nvSpPr>
+          <p:cNvPr id="3" name="Content Placeholder 2">
+            <a:extLst>
+              <a:ext uri="{FF2B5EF4-FFF2-40B4-BE49-F238E27FC236}">
+                <a16:creationId xmlns:a16="http://schemas.microsoft.com/office/drawing/2014/main" id="{FE3682BF-2AAA-17DB-13EF-80FD9DC2ED51}"/>
+              </a:ext>
+            </a:extLst>
+          </p:cNvPr>
+          <p:cNvSpPr>
+            <a:spLocks noGrp="1"/>
+          </p:cNvSpPr>
+          <p:nvPr>
+            <p:ph idx="1"/>
+          </p:nvPr>
+        </p:nvSpPr>
+        <p:spPr/>
+        <p:txBody>
+          <a:bodyPr/>
+          <a:lstStyle/>
+          <a:p>
+            <a:pPr marL="0" indent="0">
+              <a:buNone/>
+            </a:pPr>
+            <a:r>
+              <a:rPr lang="en-US" dirty="0"/>
+              <a:t>Finalize test metrics</a:t>
+            </a:r>
+          </a:p>
+          <a:p>
+            <a:pPr marL="0" indent="0">
+              <a:buNone/>
+            </a:pPr>
+            <a:r>
+              <a:rPr lang="en-US" dirty="0"/>
+              <a:t>Nmap and Wireshark integration</a:t>
+            </a:r>
+          </a:p>
+          <a:p>
+            <a:pPr marL="0" indent="0">
+              <a:buNone/>
+            </a:pPr>
+            <a:r>
+              <a:rPr lang="en-US" dirty="0"/>
+              <a:t>Run tests</a:t>
+            </a:r>
+          </a:p>
+          <a:p>
+            <a:pPr marL="0" indent="0">
+              <a:buNone/>
+            </a:pPr>
+            <a:r>
+              <a:rPr lang="en-US" dirty="0"/>
+              <a:t>Consolidate findings</a:t>
+            </a:r>
+          </a:p>
+          <a:p>
+            <a:pPr marL="0" indent="0">
+              <a:buNone/>
+            </a:pPr>
+            <a:r>
+              <a:rPr lang="en-US" dirty="0"/>
+              <a:t>Final report</a:t>
+            </a:r>
+          </a:p>
+          <a:p>
+            <a:pPr marL="0" indent="0">
+              <a:buNone/>
+            </a:pPr>
+            <a:endParaRPr lang="en-NZ" dirty="0"/>
+          </a:p>
+        </p:txBody>
+      </p:sp>
+    </p:spTree>
+    <p:extLst>
+      <p:ext uri="{BB962C8B-B14F-4D97-AF65-F5344CB8AC3E}">
+        <p14:creationId xmlns:p14="http://schemas.microsoft.com/office/powerpoint/2010/main" val="1449235414"/>
+      </p:ext>
+    </p:extLst>
+  </p:cSld>
+  <p:clrMapOvr>
+    <a:masterClrMapping/>
+  </p:clrMapOvr>
+</p:sld>
+</file>
+
+<file path=ppt/slides/slide7.xml><?xml version="1.0" encoding="utf-8"?>
+<p:sld xmlns:a="http://schemas.openxmlformats.org/drawingml/2006/main" xmlns:r="http://schemas.openxmlformats.org/officeDocument/2006/relationships" xmlns:p="http://schemas.openxmlformats.org/presentationml/2006/main">
+  <p:cSld>
+    <p:spTree>
+      <p:nvGrpSpPr>
+        <p:cNvPr id="1" name=""/>
+        <p:cNvGrpSpPr/>
+        <p:nvPr/>
+      </p:nvGrpSpPr>
+      <p:grpSpPr>
+        <a:xfrm>
+          <a:off x="0" y="0"/>
+          <a:ext cx="0" cy="0"/>
+          <a:chOff x="0" y="0"/>
+          <a:chExt cx="0" cy="0"/>
+        </a:xfrm>
+      </p:grpSpPr>
+      <p:sp>
+        <p:nvSpPr>
+          <p:cNvPr id="2" name="Title 1">
+            <a:extLst>
+              <a:ext uri="{FF2B5EF4-FFF2-40B4-BE49-F238E27FC236}">
                 <a16:creationId xmlns:a16="http://schemas.microsoft.com/office/drawing/2014/main" id="{34223870-F07E-046E-D74E-D0008EB3121A}"/>
               </a:ext>
             </a:extLst>
@@ -4110,6 +7212,17 @@
         <p:txBody>
           <a:bodyPr/>
           <a:lstStyle/>
+          <a:p>
+            <a:pPr marL="0" indent="0">
+              <a:buNone/>
+            </a:pPr>
+            <a:r>
+              <a:rPr lang="en-NZ" dirty="0">
+                <a:latin typeface="Century Gothic" panose="020B0502020202020204" pitchFamily="34" charset="0"/>
+              </a:rPr>
+              <a:t>The time frame has been shifted due to Capstone proposal taking longer than expected. </a:t>
+            </a:r>
+          </a:p>
           <a:p>
             <a:pPr marL="0" indent="0">
               <a:buNone/>
@@ -4131,10 +7244,75 @@
 </p:sld>
 </file>
 
+<file path=ppt/slides/slide8.xml><?xml version="1.0" encoding="utf-8"?>
+<p:sld xmlns:a="http://schemas.openxmlformats.org/drawingml/2006/main" xmlns:r="http://schemas.openxmlformats.org/officeDocument/2006/relationships" xmlns:p="http://schemas.openxmlformats.org/presentationml/2006/main">
+  <p:cSld>
+    <p:spTree>
+      <p:nvGrpSpPr>
+        <p:cNvPr id="1" name=""/>
+        <p:cNvGrpSpPr/>
+        <p:nvPr/>
+      </p:nvGrpSpPr>
+      <p:grpSpPr>
+        <a:xfrm>
+          <a:off x="0" y="0"/>
+          <a:ext cx="0" cy="0"/>
+          <a:chOff x="0" y="0"/>
+          <a:chExt cx="0" cy="0"/>
+        </a:xfrm>
+      </p:grpSpPr>
+      <p:sp>
+        <p:nvSpPr>
+          <p:cNvPr id="2" name="Title 1">
+            <a:extLst>
+              <a:ext uri="{FF2B5EF4-FFF2-40B4-BE49-F238E27FC236}">
+                <a16:creationId xmlns:a16="http://schemas.microsoft.com/office/drawing/2014/main" id="{EF4F9A50-08D3-B5BA-98EE-2A5CB574A435}"/>
+              </a:ext>
+            </a:extLst>
+          </p:cNvPr>
+          <p:cNvSpPr>
+            <a:spLocks noGrp="1"/>
+          </p:cNvSpPr>
+          <p:nvPr>
+            <p:ph type="title"/>
+          </p:nvPr>
+        </p:nvSpPr>
+        <p:spPr>
+          <a:xfrm>
+            <a:off x="1177584" y="2728735"/>
+            <a:ext cx="9836832" cy="1400530"/>
+          </a:xfrm>
+        </p:spPr>
+        <p:txBody>
+          <a:bodyPr/>
+          <a:lstStyle/>
+          <a:p>
+            <a:r>
+              <a:rPr lang="en-NZ" dirty="0">
+                <a:latin typeface="Century Gothic" panose="020B0502020202020204" pitchFamily="34" charset="0"/>
+              </a:rPr>
+              <a:t>Overall client feedback/satisfaction </a:t>
+            </a:r>
+          </a:p>
+        </p:txBody>
+      </p:sp>
+    </p:spTree>
+    <p:extLst>
+      <p:ext uri="{BB962C8B-B14F-4D97-AF65-F5344CB8AC3E}">
+        <p14:creationId xmlns:p14="http://schemas.microsoft.com/office/powerpoint/2010/main" val="300935319"/>
+      </p:ext>
+    </p:extLst>
+  </p:cSld>
+  <p:clrMapOvr>
+    <a:masterClrMapping/>
+  </p:clrMapOvr>
+</p:sld>
+</file>
+
 <file path=ppt/theme/theme1.xml><?xml version="1.0" encoding="utf-8"?>
-<a:theme xmlns:a="http://schemas.openxmlformats.org/drawingml/2006/main" name="Office Theme">
+<a:theme xmlns:a="http://schemas.openxmlformats.org/drawingml/2006/main" name="Ion">
   <a:themeElements>
-    <a:clrScheme name="Office">
+    <a:clrScheme name="Ion">
       <a:dk1>
         <a:sysClr val="windowText" lastClr="000000"/>
       </a:dk1>
@@ -4142,44 +7320,44 @@
         <a:sysClr val="window" lastClr="FFFFFF"/>
       </a:lt1>
       <a:dk2>
-        <a:srgbClr val="0E2841"/>
+        <a:srgbClr val="1E5155"/>
       </a:dk2>
       <a:lt2>
-        <a:srgbClr val="E8E8E8"/>
+        <a:srgbClr val="EBEBEB"/>
       </a:lt2>
       <a:accent1>
-        <a:srgbClr val="156082"/>
+        <a:srgbClr val="B01513"/>
       </a:accent1>
       <a:accent2>
-        <a:srgbClr val="E97132"/>
+        <a:srgbClr val="EA6312"/>
       </a:accent2>
       <a:accent3>
-        <a:srgbClr val="196B24"/>
+        <a:srgbClr val="E6B729"/>
       </a:accent3>
       <a:accent4>
-        <a:srgbClr val="0F9ED5"/>
+        <a:srgbClr val="6AAC90"/>
       </a:accent4>
       <a:accent5>
-        <a:srgbClr val="A02B93"/>
+        <a:srgbClr val="54849A"/>
       </a:accent5>
       <a:accent6>
-        <a:srgbClr val="4EA72E"/>
+        <a:srgbClr val="9E5E9B"/>
       </a:accent6>
       <a:hlink>
-        <a:srgbClr val="467886"/>
+        <a:srgbClr val="58C1BA"/>
       </a:hlink>
       <a:folHlink>
-        <a:srgbClr val="96607D"/>
+        <a:srgbClr val="9DFFCB"/>
       </a:folHlink>
     </a:clrScheme>
-    <a:fontScheme name="Office">
+    <a:fontScheme name="Ion">
       <a:majorFont>
-        <a:latin typeface="Aptos Display" panose="02110004020202020204"/>
+        <a:latin typeface="Century Gothic" panose="020B0502020202020204"/>
         <a:ea typeface=""/>
         <a:cs typeface=""/>
-        <a:font script="Jpan" typeface="游ゴシック Light"/>
+        <a:font script="Jpan" typeface="メイリオ"/>
         <a:font script="Hang" typeface="맑은 고딕"/>
-        <a:font script="Hans" typeface="等线 Light"/>
+        <a:font script="Hans" typeface="宋体"/>
         <a:font script="Hant" typeface="新細明體"/>
         <a:font script="Arab" typeface="Times New Roman"/>
         <a:font script="Hebr" typeface="Times New Roman"/>
@@ -4207,31 +7385,14 @@
         <a:font script="Viet" typeface="Times New Roman"/>
         <a:font script="Uigh" typeface="Microsoft Uighur"/>
         <a:font script="Geor" typeface="Sylfaen"/>
-        <a:font script="Armn" typeface="Arial"/>
-        <a:font script="Bugi" typeface="Leelawadee UI"/>
-        <a:font script="Bopo" typeface="Microsoft JhengHei"/>
-        <a:font script="Java" typeface="Javanese Text"/>
-        <a:font script="Lisu" typeface="Segoe UI"/>
-        <a:font script="Mymr" typeface="Myanmar Text"/>
-        <a:font script="Nkoo" typeface="Ebrima"/>
-        <a:font script="Olck" typeface="Nirmala UI"/>
-        <a:font script="Osma" typeface="Ebrima"/>
-        <a:font script="Phag" typeface="Phagspa"/>
-        <a:font script="Syrn" typeface="Estrangelo Edessa"/>
-        <a:font script="Syrj" typeface="Estrangelo Edessa"/>
-        <a:font script="Syre" typeface="Estrangelo Edessa"/>
-        <a:font script="Sora" typeface="Nirmala UI"/>
-        <a:font script="Tale" typeface="Microsoft Tai Le"/>
-        <a:font script="Talu" typeface="Microsoft New Tai Lue"/>
-        <a:font script="Tfng" typeface="Ebrima"/>
       </a:majorFont>
       <a:minorFont>
-        <a:latin typeface="Aptos" panose="02110004020202020204"/>
+        <a:latin typeface="Century Gothic" panose="020B0502020202020204"/>
         <a:ea typeface=""/>
         <a:cs typeface=""/>
-        <a:font script="Jpan" typeface="游ゴシック"/>
+        <a:font script="Jpan" typeface="メイリオ"/>
         <a:font script="Hang" typeface="맑은 고딕"/>
-        <a:font script="Hans" typeface="等线"/>
+        <a:font script="Hans" typeface="宋体"/>
         <a:font script="Hant" typeface="新細明體"/>
         <a:font script="Arab" typeface="Arial"/>
         <a:font script="Hebr" typeface="Arial"/>
@@ -4259,26 +7420,9 @@
         <a:font script="Viet" typeface="Arial"/>
         <a:font script="Uigh" typeface="Microsoft Uighur"/>
         <a:font script="Geor" typeface="Sylfaen"/>
-        <a:font script="Armn" typeface="Arial"/>
-        <a:font script="Bugi" typeface="Leelawadee UI"/>
-        <a:font script="Bopo" typeface="Microsoft JhengHei"/>
-        <a:font script="Java" typeface="Javanese Text"/>
-        <a:font script="Lisu" typeface="Segoe UI"/>
-        <a:font script="Mymr" typeface="Myanmar Text"/>
-        <a:font script="Nkoo" typeface="Ebrima"/>
-        <a:font script="Olck" typeface="Nirmala UI"/>
-        <a:font script="Osma" typeface="Ebrima"/>
-        <a:font script="Phag" typeface="Phagspa"/>
-        <a:font script="Syrn" typeface="Estrangelo Edessa"/>
-        <a:font script="Syrj" typeface="Estrangelo Edessa"/>
-        <a:font script="Syre" typeface="Estrangelo Edessa"/>
-        <a:font script="Sora" typeface="Nirmala UI"/>
-        <a:font script="Tale" typeface="Microsoft Tai Le"/>
-        <a:font script="Talu" typeface="Microsoft New Tai Lue"/>
-        <a:font script="Tfng" typeface="Ebrima"/>
       </a:minorFont>
     </a:fontScheme>
-    <a:fmtScheme name="Office">
+    <a:fmtScheme name="Ion">
       <a:fillStyleLst>
         <a:solidFill>
           <a:schemeClr val="phClr"/>
@@ -4287,23 +7431,15 @@
           <a:gsLst>
             <a:gs pos="0">
               <a:schemeClr val="phClr">
-                <a:lumMod val="110000"/>
-                <a:satMod val="105000"/>
-                <a:tint val="67000"/>
-              </a:schemeClr>
-            </a:gs>
-            <a:gs pos="50000">
-              <a:schemeClr val="phClr">
-                <a:lumMod val="105000"/>
-                <a:satMod val="103000"/>
-                <a:tint val="73000"/>
+                <a:tint val="64000"/>
+                <a:lumMod val="118000"/>
               </a:schemeClr>
             </a:gs>
             <a:gs pos="100000">
               <a:schemeClr val="phClr">
-                <a:lumMod val="105000"/>
-                <a:satMod val="109000"/>
-                <a:tint val="81000"/>
+                <a:tint val="92000"/>
+                <a:alpha val="100000"/>
+                <a:lumMod val="110000"/>
               </a:schemeClr>
             </a:gs>
           </a:gsLst>
@@ -4313,23 +7449,14 @@
           <a:gsLst>
             <a:gs pos="0">
               <a:schemeClr val="phClr">
-                <a:satMod val="103000"/>
-                <a:lumMod val="102000"/>
-                <a:tint val="94000"/>
-              </a:schemeClr>
-            </a:gs>
-            <a:gs pos="50000">
-              <a:schemeClr val="phClr">
-                <a:satMod val="110000"/>
-                <a:lumMod val="100000"/>
-                <a:shade val="100000"/>
+                <a:tint val="98000"/>
+                <a:lumMod val="114000"/>
               </a:schemeClr>
             </a:gs>
             <a:gs pos="100000">
               <a:schemeClr val="phClr">
-                <a:lumMod val="99000"/>
-                <a:satMod val="120000"/>
-                <a:shade val="78000"/>
+                <a:shade val="90000"/>
+                <a:lumMod val="84000"/>
               </a:schemeClr>
             </a:gs>
           </a:gsLst>
@@ -4337,26 +7464,23 @@
         </a:gradFill>
       </a:fillStyleLst>
       <a:lnStyleLst>
-        <a:ln w="12700" cap="flat" cmpd="sng" algn="ctr">
+        <a:ln w="9525" cap="rnd" cmpd="sng" algn="ctr">
           <a:solidFill>
             <a:schemeClr val="phClr"/>
           </a:solidFill>
           <a:prstDash val="solid"/>
-          <a:miter lim="800000"/>
         </a:ln>
-        <a:ln w="19050" cap="flat" cmpd="sng" algn="ctr">
+        <a:ln w="19050" cap="rnd" cmpd="sng" algn="ctr">
           <a:solidFill>
             <a:schemeClr val="phClr"/>
           </a:solidFill>
           <a:prstDash val="solid"/>
-          <a:miter lim="800000"/>
         </a:ln>
-        <a:ln w="25400" cap="flat" cmpd="sng" algn="ctr">
+        <a:ln w="28575" cap="rnd" cmpd="sng" algn="ctr">
           <a:solidFill>
             <a:schemeClr val="phClr"/>
           </a:solidFill>
           <a:prstDash val="solid"/>
-          <a:miter lim="800000"/>
         </a:ln>
       </a:lnStyleLst>
       <a:effectStyleLst>
@@ -4364,83 +7488,88 @@
           <a:effectLst/>
         </a:effectStyle>
         <a:effectStyle>
-          <a:effectLst/>
+          <a:effectLst>
+            <a:outerShdw blurRad="38100" dist="25400" dir="5400000" rotWithShape="0">
+              <a:srgbClr val="000000">
+                <a:alpha val="45000"/>
+              </a:srgbClr>
+            </a:outerShdw>
+          </a:effectLst>
         </a:effectStyle>
         <a:effectStyle>
           <a:effectLst>
-            <a:outerShdw blurRad="57150" dist="19050" dir="5400000" algn="ctr" rotWithShape="0">
+            <a:outerShdw blurRad="63500" dist="38100" dir="5400000" rotWithShape="0">
               <a:srgbClr val="000000">
-                <a:alpha val="63000"/>
+                <a:alpha val="60000"/>
               </a:srgbClr>
             </a:outerShdw>
           </a:effectLst>
+          <a:scene3d>
+            <a:camera prst="orthographicFront">
+              <a:rot lat="0" lon="0" rev="0"/>
+            </a:camera>
+            <a:lightRig rig="threePt" dir="tl"/>
+          </a:scene3d>
+          <a:sp3d prstMaterial="plastic">
+            <a:bevelT w="0" h="0"/>
+          </a:sp3d>
         </a:effectStyle>
       </a:effectStyleLst>
       <a:bgFillStyleLst>
         <a:solidFill>
           <a:schemeClr val="phClr"/>
         </a:solidFill>
-        <a:solidFill>
-          <a:schemeClr val="phClr">
-            <a:tint val="95000"/>
-            <a:satMod val="170000"/>
-          </a:schemeClr>
-        </a:solidFill>
         <a:gradFill rotWithShape="1">
           <a:gsLst>
             <a:gs pos="0">
               <a:schemeClr val="phClr">
-                <a:tint val="93000"/>
-                <a:satMod val="150000"/>
-                <a:shade val="98000"/>
-                <a:lumMod val="102000"/>
-              </a:schemeClr>
-            </a:gs>
-            <a:gs pos="50000">
-              <a:schemeClr val="phClr">
-                <a:tint val="98000"/>
+                <a:tint val="97000"/>
+                <a:hueMod val="88000"/>
                 <a:satMod val="130000"/>
-                <a:shade val="90000"/>
-                <a:lumMod val="103000"/>
+                <a:lumMod val="124000"/>
               </a:schemeClr>
             </a:gs>
             <a:gs pos="100000">
               <a:schemeClr val="phClr">
-                <a:shade val="63000"/>
-                <a:satMod val="120000"/>
+                <a:tint val="96000"/>
+                <a:shade val="88000"/>
+                <a:hueMod val="108000"/>
+                <a:satMod val="164000"/>
+                <a:lumMod val="76000"/>
               </a:schemeClr>
             </a:gs>
           </a:gsLst>
-          <a:lin ang="5400000" scaled="0"/>
+          <a:path path="circle">
+            <a:fillToRect l="45000" t="65000" r="125000" b="100000"/>
+          </a:path>
         </a:gradFill>
+        <a:blipFill rotWithShape="1">
+          <a:blip xmlns:r="http://schemas.openxmlformats.org/officeDocument/2006/relationships" r:embed="rId1">
+            <a:duotone>
+              <a:schemeClr val="phClr">
+                <a:shade val="69000"/>
+                <a:hueMod val="108000"/>
+                <a:satMod val="164000"/>
+                <a:lumMod val="74000"/>
+              </a:schemeClr>
+              <a:schemeClr val="phClr">
+                <a:tint val="96000"/>
+                <a:hueMod val="88000"/>
+                <a:satMod val="140000"/>
+                <a:lumMod val="132000"/>
+              </a:schemeClr>
+            </a:duotone>
+          </a:blip>
+          <a:stretch/>
+        </a:blipFill>
       </a:bgFillStyleLst>
     </a:fmtScheme>
   </a:themeElements>
-  <a:objectDefaults>
-    <a:lnDef>
-      <a:spPr/>
-      <a:bodyPr/>
-      <a:lstStyle/>
-      <a:style>
-        <a:lnRef idx="2">
-          <a:schemeClr val="accent1"/>
-        </a:lnRef>
-        <a:fillRef idx="0">
-          <a:schemeClr val="accent1"/>
-        </a:fillRef>
-        <a:effectRef idx="1">
-          <a:schemeClr val="accent1"/>
-        </a:effectRef>
-        <a:fontRef idx="minor">
-          <a:schemeClr val="tx1"/>
-        </a:fontRef>
-      </a:style>
-    </a:lnDef>
-  </a:objectDefaults>
+  <a:objectDefaults/>
   <a:extraClrSchemeLst/>
   <a:extLst>
     <a:ext uri="{05A4C25C-085E-4340-85A3-A5531E510DB2}">
-      <thm15:themeFamily xmlns:thm15="http://schemas.microsoft.com/office/thememl/2012/main" name="Office Theme" id="{2E142A2C-CD16-42D6-873A-C26D2A0506FA}" vid="{1BDDFF52-6CD6-40A5-AB3C-68EB2F1E4D0A}"/>
+      <thm15:themeFamily xmlns:thm15="http://schemas.microsoft.com/office/thememl/2012/main" name="Ion" id="{B8441ADB-2E43-4AF7-B97A-BD870242C6A8}" vid="{292E63A9-BB86-4E3D-B92A-7223C6510D2E}"/>
     </a:ext>
   </a:extLst>
 </a:theme>
